--- a/documents/명함제작/4.  [2026 우리가치(WeValue) QI 활동 프로젝트 명함.pptx
+++ b/documents/명함제작/4.  [2026 우리가치(WeValue) QI 활동 프로젝트 명함.pptx
@@ -5,13 +5,15 @@
     <p:sldMasterId id="2147483870" r:id="rId1"/>
   </p:sldMasterIdLst>
   <p:notesMasterIdLst>
-    <p:notesMasterId r:id="rId6"/>
+    <p:notesMasterId r:id="rId8"/>
   </p:notesMasterIdLst>
   <p:sldIdLst>
     <p:sldId id="257" r:id="rId2"/>
     <p:sldId id="297" r:id="rId3"/>
     <p:sldId id="262" r:id="rId4"/>
     <p:sldId id="300" r:id="rId5"/>
+    <p:sldId id="306" r:id="rId6"/>
+    <p:sldId id="305" r:id="rId7"/>
   </p:sldIdLst>
   <p:sldSz cx="3240088" cy="1800225"/>
   <p:notesSz cx="6858000" cy="9945688"/>
@@ -231,7 +233,7 @@
           <a:p>
             <a:fld id="{F929F65E-AEE7-45C5-814B-4468CAF1E537}" type="datetimeFigureOut">
               <a:rPr lang="ko-KR" altLang="en-US" smtClean="0"/>
-              <a:t>2026-03-08</a:t>
+              <a:t>2026-03-11</a:t>
             </a:fld>
             <a:endParaRPr lang="ko-KR" altLang="en-US"/>
           </a:p>
@@ -629,7 +631,7 @@
           <a:p>
             <a:fld id="{149F34B4-7175-41BD-B98B-2E7021201D7D}" type="datetimeFigureOut">
               <a:rPr lang="ko-KR" altLang="en-US" smtClean="0"/>
-              <a:t>2026-03-08</a:t>
+              <a:t>2026-03-11</a:t>
             </a:fld>
             <a:endParaRPr lang="ko-KR" altLang="en-US"/>
           </a:p>
@@ -799,7 +801,7 @@
           <a:p>
             <a:fld id="{149F34B4-7175-41BD-B98B-2E7021201D7D}" type="datetimeFigureOut">
               <a:rPr lang="ko-KR" altLang="en-US" smtClean="0"/>
-              <a:t>2026-03-08</a:t>
+              <a:t>2026-03-11</a:t>
             </a:fld>
             <a:endParaRPr lang="ko-KR" altLang="en-US"/>
           </a:p>
@@ -979,7 +981,7 @@
           <a:p>
             <a:fld id="{149F34B4-7175-41BD-B98B-2E7021201D7D}" type="datetimeFigureOut">
               <a:rPr lang="ko-KR" altLang="en-US" smtClean="0"/>
-              <a:t>2026-03-08</a:t>
+              <a:t>2026-03-11</a:t>
             </a:fld>
             <a:endParaRPr lang="ko-KR" altLang="en-US"/>
           </a:p>
@@ -1888,7 +1890,7 @@
           <a:p>
             <a:fld id="{149F34B4-7175-41BD-B98B-2E7021201D7D}" type="datetimeFigureOut">
               <a:rPr lang="ko-KR" altLang="en-US" smtClean="0"/>
-              <a:t>2026-03-08</a:t>
+              <a:t>2026-03-11</a:t>
             </a:fld>
             <a:endParaRPr lang="ko-KR" altLang="en-US"/>
           </a:p>
@@ -2134,7 +2136,7 @@
           <a:p>
             <a:fld id="{149F34B4-7175-41BD-B98B-2E7021201D7D}" type="datetimeFigureOut">
               <a:rPr lang="ko-KR" altLang="en-US" smtClean="0"/>
-              <a:t>2026-03-08</a:t>
+              <a:t>2026-03-11</a:t>
             </a:fld>
             <a:endParaRPr lang="ko-KR" altLang="en-US"/>
           </a:p>
@@ -2366,7 +2368,7 @@
           <a:p>
             <a:fld id="{149F34B4-7175-41BD-B98B-2E7021201D7D}" type="datetimeFigureOut">
               <a:rPr lang="ko-KR" altLang="en-US" smtClean="0"/>
-              <a:t>2026-03-08</a:t>
+              <a:t>2026-03-11</a:t>
             </a:fld>
             <a:endParaRPr lang="ko-KR" altLang="en-US"/>
           </a:p>
@@ -2733,7 +2735,7 @@
           <a:p>
             <a:fld id="{149F34B4-7175-41BD-B98B-2E7021201D7D}" type="datetimeFigureOut">
               <a:rPr lang="ko-KR" altLang="en-US" smtClean="0"/>
-              <a:t>2026-03-08</a:t>
+              <a:t>2026-03-11</a:t>
             </a:fld>
             <a:endParaRPr lang="ko-KR" altLang="en-US"/>
           </a:p>
@@ -2851,7 +2853,7 @@
           <a:p>
             <a:fld id="{149F34B4-7175-41BD-B98B-2E7021201D7D}" type="datetimeFigureOut">
               <a:rPr lang="ko-KR" altLang="en-US" smtClean="0"/>
-              <a:t>2026-03-08</a:t>
+              <a:t>2026-03-11</a:t>
             </a:fld>
             <a:endParaRPr lang="ko-KR" altLang="en-US"/>
           </a:p>
@@ -2946,7 +2948,7 @@
           <a:p>
             <a:fld id="{149F34B4-7175-41BD-B98B-2E7021201D7D}" type="datetimeFigureOut">
               <a:rPr lang="ko-KR" altLang="en-US" smtClean="0"/>
-              <a:t>2026-03-08</a:t>
+              <a:t>2026-03-11</a:t>
             </a:fld>
             <a:endParaRPr lang="ko-KR" altLang="en-US"/>
           </a:p>
@@ -3223,7 +3225,7 @@
           <a:p>
             <a:fld id="{149F34B4-7175-41BD-B98B-2E7021201D7D}" type="datetimeFigureOut">
               <a:rPr lang="ko-KR" altLang="en-US" smtClean="0"/>
-              <a:t>2026-03-08</a:t>
+              <a:t>2026-03-11</a:t>
             </a:fld>
             <a:endParaRPr lang="ko-KR" altLang="en-US"/>
           </a:p>
@@ -3480,7 +3482,7 @@
           <a:p>
             <a:fld id="{149F34B4-7175-41BD-B98B-2E7021201D7D}" type="datetimeFigureOut">
               <a:rPr lang="ko-KR" altLang="en-US" smtClean="0"/>
-              <a:t>2026-03-08</a:t>
+              <a:t>2026-03-11</a:t>
             </a:fld>
             <a:endParaRPr lang="ko-KR" altLang="en-US"/>
           </a:p>
@@ -3693,7 +3695,7 @@
           <a:p>
             <a:fld id="{149F34B4-7175-41BD-B98B-2E7021201D7D}" type="datetimeFigureOut">
               <a:rPr lang="ko-KR" altLang="en-US" smtClean="0"/>
-              <a:t>2026-03-08</a:t>
+              <a:t>2026-03-11</a:t>
             </a:fld>
             <a:endParaRPr lang="ko-KR" altLang="en-US"/>
           </a:p>
@@ -7357,6 +7359,3002 @@
     <p:extLst>
       <p:ext uri="{BB962C8B-B14F-4D97-AF65-F5344CB8AC3E}">
         <p14:creationId xmlns:p14="http://schemas.microsoft.com/office/powerpoint/2010/main" val="1528733584"/>
+      </p:ext>
+    </p:extLst>
+  </p:cSld>
+  <p:clrMapOvr>
+    <a:masterClrMapping/>
+  </p:clrMapOvr>
+</p:sld>
+</file>
+
+<file path=ppt/slides/slide5.xml><?xml version="1.0" encoding="utf-8"?>
+<p:sld xmlns:a="http://schemas.openxmlformats.org/drawingml/2006/main" xmlns:r="http://schemas.openxmlformats.org/officeDocument/2006/relationships" xmlns:p="http://schemas.openxmlformats.org/presentationml/2006/main">
+  <p:cSld>
+    <p:spTree>
+      <p:nvGrpSpPr>
+        <p:cNvPr id="1" name="">
+          <a:extLst>
+            <a:ext uri="{FF2B5EF4-FFF2-40B4-BE49-F238E27FC236}">
+              <a16:creationId xmlns:a16="http://schemas.microsoft.com/office/drawing/2014/main" id="{75C95857-5CB6-E176-FDD7-C77B771BAC79}"/>
+            </a:ext>
+          </a:extLst>
+        </p:cNvPr>
+        <p:cNvGrpSpPr/>
+        <p:nvPr/>
+      </p:nvGrpSpPr>
+      <p:grpSpPr>
+        <a:xfrm>
+          <a:off x="0" y="0"/>
+          <a:ext cx="0" cy="0"/>
+          <a:chOff x="0" y="0"/>
+          <a:chExt cx="0" cy="0"/>
+        </a:xfrm>
+      </p:grpSpPr>
+      <p:sp>
+        <p:nvSpPr>
+          <p:cNvPr id="32" name="사각형: 둥근 모서리 31">
+            <a:extLst>
+              <a:ext uri="{FF2B5EF4-FFF2-40B4-BE49-F238E27FC236}">
+                <a16:creationId xmlns:a16="http://schemas.microsoft.com/office/drawing/2014/main" id="{B0243490-B7C6-42DB-B189-20704EFBD587}"/>
+              </a:ext>
+            </a:extLst>
+          </p:cNvPr>
+          <p:cNvSpPr/>
+          <p:nvPr/>
+        </p:nvSpPr>
+        <p:spPr>
+          <a:xfrm>
+            <a:off x="226620" y="282605"/>
+            <a:ext cx="896591" cy="192090"/>
+          </a:xfrm>
+          <a:prstGeom prst="roundRect">
+            <a:avLst/>
+          </a:prstGeom>
+          <a:solidFill>
+            <a:schemeClr val="accent4">
+              <a:lumMod val="20000"/>
+              <a:lumOff val="80000"/>
+            </a:schemeClr>
+          </a:solidFill>
+          <a:ln>
+            <a:solidFill>
+              <a:schemeClr val="bg1">
+                <a:lumMod val="95000"/>
+              </a:schemeClr>
+            </a:solidFill>
+          </a:ln>
+        </p:spPr>
+        <p:style>
+          <a:lnRef idx="2">
+            <a:schemeClr val="accent1">
+              <a:shade val="50000"/>
+            </a:schemeClr>
+          </a:lnRef>
+          <a:fillRef idx="1">
+            <a:schemeClr val="accent1"/>
+          </a:fillRef>
+          <a:effectRef idx="0">
+            <a:schemeClr val="accent1"/>
+          </a:effectRef>
+          <a:fontRef idx="minor">
+            <a:schemeClr val="lt1"/>
+          </a:fontRef>
+        </p:style>
+        <p:txBody>
+          <a:bodyPr rtlCol="0" anchor="ctr"/>
+          <a:lstStyle/>
+          <a:p>
+            <a:pPr algn="ctr"/>
+            <a:endParaRPr lang="ko-KR" altLang="en-US" sz="630"/>
+          </a:p>
+        </p:txBody>
+      </p:sp>
+      <p:sp>
+        <p:nvSpPr>
+          <p:cNvPr id="31" name="사각형: 둥근 모서리 30">
+            <a:extLst>
+              <a:ext uri="{FF2B5EF4-FFF2-40B4-BE49-F238E27FC236}">
+                <a16:creationId xmlns:a16="http://schemas.microsoft.com/office/drawing/2014/main" id="{30F47067-F54E-4A90-9F21-57BD24BB9C63}"/>
+              </a:ext>
+            </a:extLst>
+          </p:cNvPr>
+          <p:cNvSpPr/>
+          <p:nvPr/>
+        </p:nvSpPr>
+        <p:spPr>
+          <a:xfrm>
+            <a:off x="1141463" y="282605"/>
+            <a:ext cx="1871533" cy="192090"/>
+          </a:xfrm>
+          <a:prstGeom prst="roundRect">
+            <a:avLst/>
+          </a:prstGeom>
+          <a:solidFill>
+            <a:schemeClr val="accent6">
+              <a:lumMod val="20000"/>
+              <a:lumOff val="80000"/>
+            </a:schemeClr>
+          </a:solidFill>
+          <a:ln>
+            <a:solidFill>
+              <a:schemeClr val="bg1">
+                <a:lumMod val="95000"/>
+              </a:schemeClr>
+            </a:solidFill>
+          </a:ln>
+        </p:spPr>
+        <p:style>
+          <a:lnRef idx="2">
+            <a:schemeClr val="accent1">
+              <a:shade val="50000"/>
+            </a:schemeClr>
+          </a:lnRef>
+          <a:fillRef idx="1">
+            <a:schemeClr val="accent1"/>
+          </a:fillRef>
+          <a:effectRef idx="0">
+            <a:schemeClr val="accent1"/>
+          </a:effectRef>
+          <a:fontRef idx="minor">
+            <a:schemeClr val="lt1"/>
+          </a:fontRef>
+        </p:style>
+        <p:txBody>
+          <a:bodyPr rtlCol="0" anchor="ctr"/>
+          <a:lstStyle/>
+          <a:p>
+            <a:pPr algn="ctr"/>
+            <a:endParaRPr lang="ko-KR" altLang="en-US" sz="630"/>
+          </a:p>
+        </p:txBody>
+      </p:sp>
+      <p:sp>
+        <p:nvSpPr>
+          <p:cNvPr id="23" name="TextBox 22">
+            <a:extLst>
+              <a:ext uri="{FF2B5EF4-FFF2-40B4-BE49-F238E27FC236}">
+                <a16:creationId xmlns:a16="http://schemas.microsoft.com/office/drawing/2014/main" id="{CD41B2AA-F91D-4DF3-86CD-504CE316D08F}"/>
+              </a:ext>
+            </a:extLst>
+          </p:cNvPr>
+          <p:cNvSpPr txBox="1"/>
+          <p:nvPr/>
+        </p:nvSpPr>
+        <p:spPr>
+          <a:xfrm>
+            <a:off x="1868409" y="898006"/>
+            <a:ext cx="995304" cy="264688"/>
+          </a:xfrm>
+          <a:prstGeom prst="rect">
+            <a:avLst/>
+          </a:prstGeom>
+          <a:noFill/>
+        </p:spPr>
+        <p:txBody>
+          <a:bodyPr wrap="square">
+            <a:spAutoFit/>
+          </a:bodyPr>
+          <a:lstStyle/>
+          <a:p>
+            <a:r>
+              <a:rPr lang="ko-KR" altLang="en-US" sz="560" dirty="0">
+                <a:latin typeface="KoPub돋움체 Light" panose="02020603020101020101" pitchFamily="18" charset="-127"/>
+                <a:ea typeface="KoPub돋움체 Light" panose="02020603020101020101" pitchFamily="18" charset="-127"/>
+              </a:rPr>
+              <a:t>야간 응급 유선 보고 후 사후 </a:t>
+            </a:r>
+            <a:r>
+              <a:rPr lang="en-US" altLang="ko-KR" sz="560" dirty="0">
+                <a:latin typeface="KoPub돋움체 Light" panose="02020603020101020101" pitchFamily="18" charset="-127"/>
+                <a:ea typeface="KoPub돋움체 Light" panose="02020603020101020101" pitchFamily="18" charset="-127"/>
+              </a:rPr>
+              <a:t>[A]-[D] 1</a:t>
+            </a:r>
+            <a:r>
+              <a:rPr lang="ko-KR" altLang="en-US" sz="560" dirty="0">
+                <a:latin typeface="KoPub돋움체 Light" panose="02020603020101020101" pitchFamily="18" charset="-127"/>
+                <a:ea typeface="KoPub돋움체 Light" panose="02020603020101020101" pitchFamily="18" charset="-127"/>
+              </a:rPr>
+              <a:t>줄 기록</a:t>
+            </a:r>
+          </a:p>
+        </p:txBody>
+      </p:sp>
+      <p:sp>
+        <p:nvSpPr>
+          <p:cNvPr id="24" name="사각형: 둥근 모서리 23">
+            <a:extLst>
+              <a:ext uri="{FF2B5EF4-FFF2-40B4-BE49-F238E27FC236}">
+                <a16:creationId xmlns:a16="http://schemas.microsoft.com/office/drawing/2014/main" id="{A193F6F5-6376-4F98-A3BB-96E53249AC9E}"/>
+              </a:ext>
+            </a:extLst>
+          </p:cNvPr>
+          <p:cNvSpPr/>
+          <p:nvPr/>
+        </p:nvSpPr>
+        <p:spPr>
+          <a:xfrm>
+            <a:off x="1793399" y="836088"/>
+            <a:ext cx="1219597" cy="335942"/>
+          </a:xfrm>
+          <a:prstGeom prst="roundRect">
+            <a:avLst>
+              <a:gd name="adj" fmla="val 13824"/>
+            </a:avLst>
+          </a:prstGeom>
+          <a:noFill/>
+          <a:ln w="6350">
+            <a:solidFill>
+              <a:schemeClr val="bg1">
+                <a:lumMod val="85000"/>
+              </a:schemeClr>
+            </a:solidFill>
+          </a:ln>
+        </p:spPr>
+        <p:style>
+          <a:lnRef idx="2">
+            <a:schemeClr val="accent3">
+              <a:shade val="15000"/>
+            </a:schemeClr>
+          </a:lnRef>
+          <a:fillRef idx="1">
+            <a:schemeClr val="accent3"/>
+          </a:fillRef>
+          <a:effectRef idx="0">
+            <a:schemeClr val="accent3"/>
+          </a:effectRef>
+          <a:fontRef idx="minor">
+            <a:schemeClr val="lt1"/>
+          </a:fontRef>
+        </p:style>
+        <p:txBody>
+          <a:bodyPr rtlCol="0" anchor="ctr"/>
+          <a:lstStyle/>
+          <a:p>
+            <a:pPr algn="ctr"/>
+            <a:endParaRPr lang="ko-KR" altLang="en-US" sz="1778">
+              <a:latin typeface="KoPub돋움체 Medium" panose="02020603020101020101" pitchFamily="18" charset="-127"/>
+              <a:ea typeface="KoPub돋움체 Light" panose="02020603020101020101"/>
+            </a:endParaRPr>
+          </a:p>
+        </p:txBody>
+      </p:sp>
+      <p:sp>
+        <p:nvSpPr>
+          <p:cNvPr id="25" name="사각형: 둥근 모서리 24">
+            <a:extLst>
+              <a:ext uri="{FF2B5EF4-FFF2-40B4-BE49-F238E27FC236}">
+                <a16:creationId xmlns:a16="http://schemas.microsoft.com/office/drawing/2014/main" id="{ABE07B44-9D20-4CE2-BFB6-8DDA339570CA}"/>
+              </a:ext>
+            </a:extLst>
+          </p:cNvPr>
+          <p:cNvSpPr/>
+          <p:nvPr/>
+        </p:nvSpPr>
+        <p:spPr>
+          <a:xfrm>
+            <a:off x="1141463" y="837938"/>
+            <a:ext cx="634156" cy="334091"/>
+          </a:xfrm>
+          <a:prstGeom prst="roundRect">
+            <a:avLst>
+              <a:gd name="adj" fmla="val 13097"/>
+            </a:avLst>
+          </a:prstGeom>
+          <a:solidFill>
+            <a:schemeClr val="accent6">
+              <a:lumMod val="20000"/>
+              <a:lumOff val="80000"/>
+            </a:schemeClr>
+          </a:solidFill>
+          <a:ln>
+            <a:noFill/>
+          </a:ln>
+        </p:spPr>
+        <p:style>
+          <a:lnRef idx="2">
+            <a:schemeClr val="accent3">
+              <a:shade val="15000"/>
+            </a:schemeClr>
+          </a:lnRef>
+          <a:fillRef idx="1">
+            <a:schemeClr val="accent3"/>
+          </a:fillRef>
+          <a:effectRef idx="0">
+            <a:schemeClr val="accent3"/>
+          </a:effectRef>
+          <a:fontRef idx="minor">
+            <a:schemeClr val="lt1"/>
+          </a:fontRef>
+        </p:style>
+        <p:txBody>
+          <a:bodyPr rtlCol="0" anchor="ctr"/>
+          <a:lstStyle/>
+          <a:p>
+            <a:pPr algn="ctr"/>
+            <a:endParaRPr lang="ko-KR" altLang="en-US" sz="1778">
+              <a:latin typeface="KoPub돋움체 Medium" panose="02020603020101020101" pitchFamily="18" charset="-127"/>
+              <a:ea typeface="KoPub돋움체 Light" panose="02020603020101020101"/>
+            </a:endParaRPr>
+          </a:p>
+        </p:txBody>
+      </p:sp>
+      <p:sp>
+        <p:nvSpPr>
+          <p:cNvPr id="26" name="TextBox 25">
+            <a:extLst>
+              <a:ext uri="{FF2B5EF4-FFF2-40B4-BE49-F238E27FC236}">
+                <a16:creationId xmlns:a16="http://schemas.microsoft.com/office/drawing/2014/main" id="{31132F88-5AA2-43B2-8C2A-F2BB31E51E43}"/>
+              </a:ext>
+            </a:extLst>
+          </p:cNvPr>
+          <p:cNvSpPr txBox="1"/>
+          <p:nvPr/>
+        </p:nvSpPr>
+        <p:spPr>
+          <a:xfrm>
+            <a:off x="1154612" y="936320"/>
+            <a:ext cx="607860" cy="178510"/>
+          </a:xfrm>
+          <a:prstGeom prst="rect">
+            <a:avLst/>
+          </a:prstGeom>
+          <a:noFill/>
+        </p:spPr>
+        <p:txBody>
+          <a:bodyPr wrap="none" rtlCol="0">
+            <a:spAutoFit/>
+          </a:bodyPr>
+          <a:lstStyle/>
+          <a:p>
+            <a:pPr algn="ctr"/>
+            <a:r>
+              <a:rPr lang="en-US" altLang="ko-KR" sz="560" b="1" dirty="0">
+                <a:latin typeface="KoPub돋움체 Light" panose="02020603020101020101" pitchFamily="18" charset="-127"/>
+                <a:ea typeface="KoPub돋움체 Light" panose="02020603020101020101" pitchFamily="18" charset="-127"/>
+              </a:rPr>
+              <a:t>[D-</a:t>
+            </a:r>
+            <a:r>
+              <a:rPr lang="ko-KR" altLang="en-US" sz="560" b="1" dirty="0" err="1">
+                <a:latin typeface="KoPub돋움체 Light" panose="02020603020101020101" pitchFamily="18" charset="-127"/>
+                <a:ea typeface="KoPub돋움체 Light" panose="02020603020101020101" pitchFamily="18" charset="-127"/>
+              </a:rPr>
+              <a:t>야간유선</a:t>
+            </a:r>
+            <a:r>
+              <a:rPr lang="en-US" altLang="ko-KR" sz="560" b="1" dirty="0">
+                <a:latin typeface="KoPub돋움체 Light" panose="02020603020101020101" pitchFamily="18" charset="-127"/>
+                <a:ea typeface="KoPub돋움체 Light" panose="02020603020101020101" pitchFamily="18" charset="-127"/>
+              </a:rPr>
+              <a:t>]</a:t>
+            </a:r>
+          </a:p>
+        </p:txBody>
+      </p:sp>
+      <p:sp>
+        <p:nvSpPr>
+          <p:cNvPr id="3" name="TextBox 2">
+            <a:extLst>
+              <a:ext uri="{FF2B5EF4-FFF2-40B4-BE49-F238E27FC236}">
+                <a16:creationId xmlns:a16="http://schemas.microsoft.com/office/drawing/2014/main" id="{BDB8E964-7EED-74B0-E816-8BE4F8865B12}"/>
+              </a:ext>
+            </a:extLst>
+          </p:cNvPr>
+          <p:cNvSpPr txBox="1"/>
+          <p:nvPr/>
+        </p:nvSpPr>
+        <p:spPr>
+          <a:xfrm>
+            <a:off x="-10111" y="64610"/>
+            <a:ext cx="1347869" cy="168379"/>
+          </a:xfrm>
+          <a:prstGeom prst="rect">
+            <a:avLst/>
+          </a:prstGeom>
+          <a:noFill/>
+        </p:spPr>
+        <p:txBody>
+          <a:bodyPr wrap="none">
+            <a:spAutoFit/>
+          </a:bodyPr>
+          <a:lstStyle/>
+          <a:p>
+            <a:pPr algn="ctr"/>
+            <a:r>
+              <a:rPr lang="ko-KR" altLang="en-US" sz="494" spc="-11" dirty="0">
+                <a:latin typeface="KoPub돋움체 Light" panose="02020603020101020101" pitchFamily="18" charset="-127"/>
+                <a:ea typeface="KoPub돋움체 Light" panose="02020603020101020101" pitchFamily="18" charset="-127"/>
+              </a:rPr>
+              <a:t>순천향대학교 천안병원 </a:t>
+            </a:r>
+            <a:r>
+              <a:rPr lang="en-US" altLang="ko-KR" sz="494" spc="-11" dirty="0">
+                <a:latin typeface="KoPub돋움체 Light" panose="02020603020101020101" pitchFamily="18" charset="-127"/>
+                <a:ea typeface="KoPub돋움체 Light" panose="02020603020101020101" pitchFamily="18" charset="-127"/>
+              </a:rPr>
+              <a:t>| </a:t>
+            </a:r>
+            <a:r>
+              <a:rPr lang="ko-KR" altLang="en-US" sz="494" spc="-11" dirty="0">
+                <a:latin typeface="KoPub돋움체 Light" panose="02020603020101020101" pitchFamily="18" charset="-127"/>
+                <a:ea typeface="KoPub돋움체 Light" panose="02020603020101020101" pitchFamily="18" charset="-127"/>
+              </a:rPr>
+              <a:t>진료지원간호팀 </a:t>
+            </a:r>
+          </a:p>
+        </p:txBody>
+      </p:sp>
+      <p:grpSp>
+        <p:nvGrpSpPr>
+          <p:cNvPr id="7" name="그룹 6">
+            <a:extLst>
+              <a:ext uri="{FF2B5EF4-FFF2-40B4-BE49-F238E27FC236}">
+                <a16:creationId xmlns:a16="http://schemas.microsoft.com/office/drawing/2014/main" id="{399CA2A2-FAD0-4681-B98C-3A7AA0484B78}"/>
+              </a:ext>
+            </a:extLst>
+          </p:cNvPr>
+          <p:cNvGrpSpPr/>
+          <p:nvPr/>
+        </p:nvGrpSpPr>
+        <p:grpSpPr>
+          <a:xfrm>
+            <a:off x="227092" y="488646"/>
+            <a:ext cx="904857" cy="1183130"/>
+            <a:chOff x="592138" y="1592949"/>
+            <a:chExt cx="2585305" cy="3380371"/>
+          </a:xfrm>
+        </p:grpSpPr>
+        <p:sp>
+          <p:nvSpPr>
+            <p:cNvPr id="22" name="사각형: 둥근 모서리 21">
+              <a:extLst>
+                <a:ext uri="{FF2B5EF4-FFF2-40B4-BE49-F238E27FC236}">
+                  <a16:creationId xmlns:a16="http://schemas.microsoft.com/office/drawing/2014/main" id="{8DA9AE8C-7191-4002-98F1-FF77B72D519F}"/>
+                </a:ext>
+              </a:extLst>
+            </p:cNvPr>
+            <p:cNvSpPr/>
+            <p:nvPr/>
+          </p:nvSpPr>
+          <p:spPr>
+            <a:xfrm>
+              <a:off x="592138" y="1592949"/>
+              <a:ext cx="2561688" cy="2814796"/>
+            </a:xfrm>
+            <a:prstGeom prst="roundRect">
+              <a:avLst>
+                <a:gd name="adj" fmla="val 5214"/>
+              </a:avLst>
+            </a:prstGeom>
+            <a:solidFill>
+              <a:schemeClr val="bg1"/>
+            </a:solidFill>
+            <a:ln>
+              <a:solidFill>
+                <a:schemeClr val="bg1">
+                  <a:lumMod val="75000"/>
+                </a:schemeClr>
+              </a:solidFill>
+            </a:ln>
+          </p:spPr>
+          <p:style>
+            <a:lnRef idx="2">
+              <a:schemeClr val="accent3">
+                <a:shade val="15000"/>
+              </a:schemeClr>
+            </a:lnRef>
+            <a:fillRef idx="1">
+              <a:schemeClr val="accent3"/>
+            </a:fillRef>
+            <a:effectRef idx="0">
+              <a:schemeClr val="accent3"/>
+            </a:effectRef>
+            <a:fontRef idx="minor">
+              <a:schemeClr val="lt1"/>
+            </a:fontRef>
+          </p:style>
+          <p:txBody>
+            <a:bodyPr rtlCol="0" anchor="ctr"/>
+            <a:lstStyle/>
+            <a:p>
+              <a:pPr algn="ctr"/>
+              <a:endParaRPr lang="ko-KR" altLang="en-US" sz="1778">
+                <a:solidFill>
+                  <a:schemeClr val="tx1"/>
+                </a:solidFill>
+                <a:ea typeface="KoPub돋움체 Light" panose="02020603020101020101"/>
+              </a:endParaRPr>
+            </a:p>
+          </p:txBody>
+        </p:sp>
+        <p:sp>
+          <p:nvSpPr>
+            <p:cNvPr id="17" name="TextBox 16">
+              <a:extLst>
+                <a:ext uri="{FF2B5EF4-FFF2-40B4-BE49-F238E27FC236}">
+                  <a16:creationId xmlns:a16="http://schemas.microsoft.com/office/drawing/2014/main" id="{5E33DDDA-6085-D01E-695B-8DCA20A2A084}"/>
+                </a:ext>
+              </a:extLst>
+            </p:cNvPr>
+            <p:cNvSpPr txBox="1"/>
+            <p:nvPr/>
+          </p:nvSpPr>
+          <p:spPr>
+            <a:xfrm>
+              <a:off x="630047" y="1754858"/>
+              <a:ext cx="2547396" cy="3218462"/>
+            </a:xfrm>
+            <a:prstGeom prst="rect">
+              <a:avLst/>
+            </a:prstGeom>
+            <a:noFill/>
+          </p:spPr>
+          <p:txBody>
+            <a:bodyPr wrap="square">
+              <a:spAutoFit/>
+            </a:bodyPr>
+            <a:lstStyle/>
+            <a:p>
+              <a:r>
+                <a:rPr lang="en-US" altLang="ko-KR" sz="560" b="1" dirty="0">
+                  <a:latin typeface="KoPub돋움체 Light" panose="02020603020101020101" pitchFamily="18" charset="-127"/>
+                  <a:ea typeface="KoPub돋움체 Light" panose="02020603020101020101" pitchFamily="18" charset="-127"/>
+                </a:rPr>
+                <a:t>[CHEMO] </a:t>
+              </a:r>
+              <a:r>
+                <a:rPr lang="ko-KR" altLang="en-US" sz="560" dirty="0"/>
+                <a:t>항암 관리</a:t>
+              </a:r>
+            </a:p>
+            <a:p>
+              <a:r>
+                <a:rPr lang="en-US" altLang="ko-KR" sz="560" b="1" dirty="0">
+                  <a:latin typeface="KoPub돋움체 Light" panose="02020603020101020101" pitchFamily="18" charset="-127"/>
+                  <a:ea typeface="KoPub돋움체 Light" panose="02020603020101020101" pitchFamily="18" charset="-127"/>
+                </a:rPr>
+                <a:t>[BLOOD]</a:t>
+              </a:r>
+              <a:r>
+                <a:rPr lang="en-US" altLang="ko-KR" sz="560" dirty="0">
+                  <a:latin typeface="KoPub돋움체 Light" panose="02020603020101020101" pitchFamily="18" charset="-127"/>
+                  <a:ea typeface="KoPub돋움체 Light" panose="02020603020101020101" pitchFamily="18" charset="-127"/>
+                </a:rPr>
+                <a:t> </a:t>
+              </a:r>
+              <a:r>
+                <a:rPr lang="ko-KR" altLang="en-US" sz="560" dirty="0">
+                  <a:latin typeface="KoPub돋움체 Light" panose="02020603020101020101" pitchFamily="18" charset="-127"/>
+                  <a:ea typeface="KoPub돋움체 Light" panose="02020603020101020101" pitchFamily="18" charset="-127"/>
+                </a:rPr>
+                <a:t>수혈 관리</a:t>
+              </a:r>
+              <a:endParaRPr lang="en-US" altLang="ko-KR" sz="560" dirty="0">
+                <a:latin typeface="KoPub돋움체 Light" panose="02020603020101020101" pitchFamily="18" charset="-127"/>
+                <a:ea typeface="KoPub돋움체 Light" panose="02020603020101020101" pitchFamily="18" charset="-127"/>
+              </a:endParaRPr>
+            </a:p>
+            <a:p>
+              <a:r>
+                <a:rPr lang="en-US" altLang="ko-KR" sz="560" b="1" dirty="0">
+                  <a:latin typeface="KoPub돋움체 Light" panose="02020603020101020101" pitchFamily="18" charset="-127"/>
+                  <a:ea typeface="KoPub돋움체 Light" panose="02020603020101020101" pitchFamily="18" charset="-127"/>
+                </a:rPr>
+                <a:t>[CVR]</a:t>
+              </a:r>
+              <a:r>
+                <a:rPr lang="en-US" altLang="ko-KR" sz="560" dirty="0">
+                  <a:latin typeface="KoPub돋움체 Light" panose="02020603020101020101" pitchFamily="18" charset="-127"/>
+                  <a:ea typeface="KoPub돋움체 Light" panose="02020603020101020101" pitchFamily="18" charset="-127"/>
+                </a:rPr>
+                <a:t> </a:t>
+              </a:r>
+              <a:r>
+                <a:rPr lang="ko-KR" altLang="en-US" sz="560" dirty="0">
+                  <a:latin typeface="KoPub돋움체 Light" panose="02020603020101020101" pitchFamily="18" charset="-127"/>
+                  <a:ea typeface="KoPub돋움체 Light" panose="02020603020101020101" pitchFamily="18" charset="-127"/>
+                </a:rPr>
+                <a:t>위험 수치</a:t>
+              </a:r>
+              <a:endParaRPr lang="en-US" altLang="ko-KR" sz="560" dirty="0">
+                <a:latin typeface="KoPub돋움체 Light" panose="02020603020101020101" pitchFamily="18" charset="-127"/>
+                <a:ea typeface="KoPub돋움체 Light" panose="02020603020101020101" pitchFamily="18" charset="-127"/>
+              </a:endParaRPr>
+            </a:p>
+            <a:p>
+              <a:r>
+                <a:rPr lang="en-US" altLang="ko-KR" sz="560" b="1" dirty="0">
+                  <a:latin typeface="KoPub돋움체 Light" panose="02020603020101020101" pitchFamily="18" charset="-127"/>
+                  <a:ea typeface="KoPub돋움체 Light" panose="02020603020101020101" pitchFamily="18" charset="-127"/>
+                </a:rPr>
+                <a:t>[LIFE] </a:t>
+              </a:r>
+              <a:r>
+                <a:rPr lang="ko-KR" altLang="en-US" sz="560" dirty="0">
+                  <a:latin typeface="KoPub돋움체 Light" panose="02020603020101020101" pitchFamily="18" charset="-127"/>
+                  <a:ea typeface="KoPub돋움체 Light" panose="02020603020101020101" pitchFamily="18" charset="-127"/>
+                </a:rPr>
+                <a:t>존엄</a:t>
+              </a:r>
+              <a:r>
+                <a:rPr lang="en-US" altLang="ko-KR" sz="560" dirty="0">
+                  <a:latin typeface="KoPub돋움체 Light" panose="02020603020101020101" pitchFamily="18" charset="-127"/>
+                  <a:ea typeface="KoPub돋움체 Light" panose="02020603020101020101" pitchFamily="18" charset="-127"/>
+                </a:rPr>
+                <a:t>/</a:t>
+              </a:r>
+              <a:r>
+                <a:rPr lang="ko-KR" altLang="en-US" sz="560" dirty="0">
+                  <a:latin typeface="KoPub돋움체 Light" panose="02020603020101020101" pitchFamily="18" charset="-127"/>
+                  <a:ea typeface="KoPub돋움체 Light" panose="02020603020101020101" pitchFamily="18" charset="-127"/>
+                </a:rPr>
+                <a:t>임종</a:t>
+              </a:r>
+              <a:endParaRPr lang="en-US" altLang="ko-KR" sz="560" dirty="0">
+                <a:latin typeface="KoPub돋움체 Light" panose="02020603020101020101" pitchFamily="18" charset="-127"/>
+                <a:ea typeface="KoPub돋움체 Light" panose="02020603020101020101" pitchFamily="18" charset="-127"/>
+              </a:endParaRPr>
+            </a:p>
+            <a:p>
+              <a:r>
+                <a:rPr lang="en-US" altLang="ko-KR" sz="560" b="1" dirty="0">
+                  <a:latin typeface="KoPub돋움체 Light" panose="02020603020101020101" pitchFamily="18" charset="-127"/>
+                  <a:ea typeface="KoPub돋움체 Light" panose="02020603020101020101" pitchFamily="18" charset="-127"/>
+                </a:rPr>
+                <a:t>[MEET] </a:t>
+              </a:r>
+              <a:r>
+                <a:rPr lang="ko-KR" altLang="en-US" sz="560" dirty="0">
+                  <a:latin typeface="KoPub돋움체 Light" panose="02020603020101020101" pitchFamily="18" charset="-127"/>
+                  <a:ea typeface="KoPub돋움체 Light" panose="02020603020101020101" pitchFamily="18" charset="-127"/>
+                </a:rPr>
+                <a:t>보호자 면담</a:t>
+              </a:r>
+              <a:endParaRPr lang="en-US" altLang="ko-KR" sz="560" dirty="0">
+                <a:latin typeface="KoPub돋움체 Light" panose="02020603020101020101" pitchFamily="18" charset="-127"/>
+                <a:ea typeface="KoPub돋움체 Light" panose="02020603020101020101" pitchFamily="18" charset="-127"/>
+              </a:endParaRPr>
+            </a:p>
+            <a:p>
+              <a:r>
+                <a:rPr lang="en-US" altLang="ko-KR" sz="560" b="1" dirty="0">
+                  <a:latin typeface="KoPub돋움체 Light" panose="02020603020101020101" pitchFamily="18" charset="-127"/>
+                  <a:ea typeface="KoPub돋움체 Light" panose="02020603020101020101" pitchFamily="18" charset="-127"/>
+                </a:rPr>
+                <a:t>[MARROW] </a:t>
+              </a:r>
+              <a:r>
+                <a:rPr lang="ko-KR" altLang="en-US" sz="560" dirty="0">
+                  <a:latin typeface="KoPub돋움체 Light" panose="02020603020101020101" pitchFamily="18" charset="-127"/>
+                  <a:ea typeface="KoPub돋움체 Light" panose="02020603020101020101" pitchFamily="18" charset="-127"/>
+                </a:rPr>
+                <a:t>골수 검사</a:t>
+              </a:r>
+              <a:endParaRPr lang="en-US" altLang="ko-KR" sz="560" dirty="0">
+                <a:latin typeface="KoPub돋움체 Light" panose="02020603020101020101" pitchFamily="18" charset="-127"/>
+                <a:ea typeface="KoPub돋움체 Light" panose="02020603020101020101" pitchFamily="18" charset="-127"/>
+              </a:endParaRPr>
+            </a:p>
+            <a:p>
+              <a:r>
+                <a:rPr lang="en-US" altLang="ko-KR" sz="560" b="1" dirty="0">
+                  <a:latin typeface="KoPub돋움체 Light" panose="02020603020101020101" pitchFamily="18" charset="-127"/>
+                  <a:ea typeface="KoPub돋움체 Light" panose="02020603020101020101" pitchFamily="18" charset="-127"/>
+                </a:rPr>
+                <a:t>[ISO] </a:t>
+              </a:r>
+              <a:r>
+                <a:rPr lang="ko-KR" altLang="en-US" sz="560" dirty="0">
+                  <a:latin typeface="KoPub돋움체 Light" panose="02020603020101020101" pitchFamily="18" charset="-127"/>
+                  <a:ea typeface="KoPub돋움체 Light" panose="02020603020101020101" pitchFamily="18" charset="-127"/>
+                </a:rPr>
+                <a:t>격리 관리</a:t>
+              </a:r>
+              <a:endParaRPr lang="en-US" altLang="ko-KR" sz="560" dirty="0">
+                <a:latin typeface="KoPub돋움체 Light" panose="02020603020101020101" pitchFamily="18" charset="-127"/>
+                <a:ea typeface="KoPub돋움체 Light" panose="02020603020101020101" pitchFamily="18" charset="-127"/>
+              </a:endParaRPr>
+            </a:p>
+            <a:p>
+              <a:r>
+                <a:rPr lang="en-US" altLang="ko-KR" sz="560" b="1" dirty="0">
+                  <a:latin typeface="KoPub돋움체 Light" panose="02020603020101020101" pitchFamily="18" charset="-127"/>
+                  <a:ea typeface="KoPub돋움체 Light" panose="02020603020101020101" pitchFamily="18" charset="-127"/>
+                </a:rPr>
+                <a:t>[C-Status] </a:t>
+              </a:r>
+              <a:r>
+                <a:rPr lang="ko-KR" altLang="en-US" sz="560" dirty="0">
+                  <a:latin typeface="KoPub돋움체 Light" panose="02020603020101020101" pitchFamily="18" charset="-127"/>
+                  <a:ea typeface="KoPub돋움체 Light" panose="02020603020101020101" pitchFamily="18" charset="-127"/>
+                </a:rPr>
+                <a:t>상태 악화</a:t>
+              </a:r>
+              <a:endParaRPr lang="en-US" altLang="ko-KR" sz="560" dirty="0">
+                <a:latin typeface="KoPub돋움체 Light" panose="02020603020101020101" pitchFamily="18" charset="-127"/>
+                <a:ea typeface="KoPub돋움체 Light" panose="02020603020101020101" pitchFamily="18" charset="-127"/>
+              </a:endParaRPr>
+            </a:p>
+            <a:p>
+              <a:r>
+                <a:rPr lang="en-US" altLang="ko-KR" sz="560" b="1" dirty="0">
+                  <a:latin typeface="KoPub돋움체 Light" panose="02020603020101020101" pitchFamily="18" charset="-127"/>
+                  <a:ea typeface="KoPub돋움체 Light" panose="02020603020101020101" pitchFamily="18" charset="-127"/>
+                </a:rPr>
+                <a:t>[PAIN] </a:t>
+              </a:r>
+              <a:r>
+                <a:rPr lang="ko-KR" altLang="en-US" sz="560" dirty="0">
+                  <a:latin typeface="KoPub돋움체 Light" panose="02020603020101020101" pitchFamily="18" charset="-127"/>
+                  <a:ea typeface="KoPub돋움체 Light" panose="02020603020101020101" pitchFamily="18" charset="-127"/>
+                </a:rPr>
+                <a:t>통증 조절</a:t>
+              </a:r>
+              <a:endParaRPr lang="en-US" altLang="ko-KR" sz="560" dirty="0">
+                <a:latin typeface="KoPub돋움체 Light" panose="02020603020101020101" pitchFamily="18" charset="-127"/>
+                <a:ea typeface="KoPub돋움체 Light" panose="02020603020101020101" pitchFamily="18" charset="-127"/>
+              </a:endParaRPr>
+            </a:p>
+            <a:p>
+              <a:r>
+                <a:rPr lang="en-US" altLang="ko-KR" sz="560" b="1" dirty="0">
+                  <a:latin typeface="KoPub돋움체 Light" panose="02020603020101020101" pitchFamily="18" charset="-127"/>
+                  <a:ea typeface="KoPub돋움체 Light" panose="02020603020101020101" pitchFamily="18" charset="-127"/>
+                </a:rPr>
+                <a:t>[OUT] </a:t>
+              </a:r>
+              <a:r>
+                <a:rPr lang="ko-KR" altLang="en-US" sz="560" dirty="0">
+                  <a:latin typeface="KoPub돋움체 Light" panose="02020603020101020101" pitchFamily="18" charset="-127"/>
+                  <a:ea typeface="KoPub돋움체 Light" panose="02020603020101020101" pitchFamily="18" charset="-127"/>
+                </a:rPr>
+                <a:t>퇴원</a:t>
+              </a:r>
+              <a:r>
+                <a:rPr lang="en-US" altLang="ko-KR" sz="560" dirty="0">
+                  <a:latin typeface="KoPub돋움체 Light" panose="02020603020101020101" pitchFamily="18" charset="-127"/>
+                  <a:ea typeface="KoPub돋움체 Light" panose="02020603020101020101" pitchFamily="18" charset="-127"/>
+                </a:rPr>
+                <a:t>/</a:t>
+              </a:r>
+              <a:r>
+                <a:rPr lang="ko-KR" altLang="en-US" sz="560" dirty="0">
+                  <a:latin typeface="KoPub돋움체 Light" panose="02020603020101020101" pitchFamily="18" charset="-127"/>
+                  <a:ea typeface="KoPub돋움체 Light" panose="02020603020101020101" pitchFamily="18" charset="-127"/>
+                </a:rPr>
+                <a:t>전과</a:t>
+              </a:r>
+              <a:r>
+                <a:rPr lang="en-US" altLang="ko-KR" sz="560" dirty="0">
+                  <a:latin typeface="KoPub돋움체 Light" panose="02020603020101020101" pitchFamily="18" charset="-127"/>
+                  <a:ea typeface="KoPub돋움체 Light" panose="02020603020101020101" pitchFamily="18" charset="-127"/>
+                </a:rPr>
+                <a:t>/</a:t>
+              </a:r>
+              <a:r>
+                <a:rPr lang="ko-KR" altLang="en-US" sz="560" dirty="0">
+                  <a:latin typeface="KoPub돋움체 Light" panose="02020603020101020101" pitchFamily="18" charset="-127"/>
+                  <a:ea typeface="KoPub돋움체 Light" panose="02020603020101020101" pitchFamily="18" charset="-127"/>
+                </a:rPr>
+                <a:t>사망</a:t>
+              </a:r>
+              <a:endParaRPr lang="en-US" altLang="ko-KR" sz="560" dirty="0">
+                <a:latin typeface="KoPub돋움체 Light" panose="02020603020101020101" pitchFamily="18" charset="-127"/>
+                <a:ea typeface="KoPub돋움체 Light" panose="02020603020101020101" pitchFamily="18" charset="-127"/>
+              </a:endParaRPr>
+            </a:p>
+          </p:txBody>
+        </p:sp>
+      </p:grpSp>
+      <p:sp>
+        <p:nvSpPr>
+          <p:cNvPr id="2" name="TextBox 1">
+            <a:extLst>
+              <a:ext uri="{FF2B5EF4-FFF2-40B4-BE49-F238E27FC236}">
+                <a16:creationId xmlns:a16="http://schemas.microsoft.com/office/drawing/2014/main" id="{5C7E232E-6B0D-4C30-967C-1D82B967BC1B}"/>
+              </a:ext>
+            </a:extLst>
+          </p:cNvPr>
+          <p:cNvSpPr txBox="1"/>
+          <p:nvPr/>
+        </p:nvSpPr>
+        <p:spPr>
+          <a:xfrm>
+            <a:off x="226149" y="308631"/>
+            <a:ext cx="897534" cy="307777"/>
+          </a:xfrm>
+          <a:prstGeom prst="rect">
+            <a:avLst/>
+          </a:prstGeom>
+          <a:noFill/>
+        </p:spPr>
+        <p:txBody>
+          <a:bodyPr wrap="square" rtlCol="0">
+            <a:spAutoFit/>
+          </a:bodyPr>
+          <a:lstStyle/>
+          <a:p>
+            <a:pPr algn="ctr"/>
+            <a:r>
+              <a:rPr lang="ko-KR" altLang="en-US" sz="700" b="1" dirty="0">
+                <a:latin typeface="KoPub돋움체 Light" panose="02020603020101020101" pitchFamily="18" charset="-127"/>
+                <a:ea typeface="KoPub돋움체 Light" panose="02020603020101020101" pitchFamily="18" charset="-127"/>
+              </a:rPr>
+              <a:t>하이패스 태그 </a:t>
+            </a:r>
+            <a:r>
+              <a:rPr lang="en-US" altLang="ko-KR" sz="700" b="1" dirty="0">
+                <a:latin typeface="KoPub돋움체 Light" panose="02020603020101020101" pitchFamily="18" charset="-127"/>
+                <a:ea typeface="KoPub돋움체 Light" panose="02020603020101020101" pitchFamily="18" charset="-127"/>
+              </a:rPr>
+              <a:t>10</a:t>
+            </a:r>
+            <a:r>
+              <a:rPr lang="ko-KR" altLang="en-US" sz="700" b="1" dirty="0">
+                <a:latin typeface="KoPub돋움체 Light" panose="02020603020101020101" pitchFamily="18" charset="-127"/>
+                <a:ea typeface="KoPub돋움체 Light" panose="02020603020101020101" pitchFamily="18" charset="-127"/>
+              </a:rPr>
+              <a:t>종</a:t>
+            </a:r>
+            <a:endParaRPr lang="en-US" altLang="ko-KR" sz="700" b="1" dirty="0">
+              <a:latin typeface="KoPub돋움체 Light" panose="02020603020101020101" pitchFamily="18" charset="-127"/>
+              <a:ea typeface="KoPub돋움체 Light" panose="02020603020101020101" pitchFamily="18" charset="-127"/>
+            </a:endParaRPr>
+          </a:p>
+        </p:txBody>
+      </p:sp>
+      <p:sp>
+        <p:nvSpPr>
+          <p:cNvPr id="8" name="TextBox 7">
+            <a:extLst>
+              <a:ext uri="{FF2B5EF4-FFF2-40B4-BE49-F238E27FC236}">
+                <a16:creationId xmlns:a16="http://schemas.microsoft.com/office/drawing/2014/main" id="{2D7FF5CD-F432-4D5C-924D-9C31E13C1988}"/>
+              </a:ext>
+            </a:extLst>
+          </p:cNvPr>
+          <p:cNvSpPr txBox="1"/>
+          <p:nvPr/>
+        </p:nvSpPr>
+        <p:spPr>
+          <a:xfrm>
+            <a:off x="1868409" y="550565"/>
+            <a:ext cx="995304" cy="350865"/>
+          </a:xfrm>
+          <a:prstGeom prst="rect">
+            <a:avLst/>
+          </a:prstGeom>
+          <a:noFill/>
+        </p:spPr>
+        <p:txBody>
+          <a:bodyPr wrap="square">
+            <a:spAutoFit/>
+          </a:bodyPr>
+          <a:lstStyle/>
+          <a:p>
+            <a:r>
+              <a:rPr lang="ko-KR" altLang="en-US" sz="560" dirty="0">
+                <a:latin typeface="KoPub돋움체 Light" panose="02020603020101020101" pitchFamily="18" charset="-127"/>
+                <a:ea typeface="KoPub돋움체 Light" panose="02020603020101020101" pitchFamily="18" charset="-127"/>
+              </a:rPr>
+              <a:t>근무 교대 시 미완료 건에 </a:t>
+            </a:r>
+            <a:r>
+              <a:rPr lang="en-US" altLang="ko-KR" sz="560" dirty="0">
+                <a:latin typeface="KoPub돋움체 Light" panose="02020603020101020101" pitchFamily="18" charset="-127"/>
+                <a:ea typeface="KoPub돋움체 Light" panose="02020603020101020101" pitchFamily="18" charset="-127"/>
+              </a:rPr>
+              <a:t>'</a:t>
+            </a:r>
+            <a:r>
+              <a:rPr lang="ko-KR" altLang="en-US" sz="560" dirty="0">
+                <a:latin typeface="KoPub돋움체 Light" panose="02020603020101020101" pitchFamily="18" charset="-127"/>
+                <a:ea typeface="KoPub돋움체 Light" panose="02020603020101020101" pitchFamily="18" charset="-127"/>
+              </a:rPr>
+              <a:t>답장</a:t>
+            </a:r>
+            <a:r>
+              <a:rPr lang="en-US" altLang="ko-KR" sz="560" dirty="0">
+                <a:latin typeface="KoPub돋움체 Light" panose="02020603020101020101" pitchFamily="18" charset="-127"/>
+                <a:ea typeface="KoPub돋움체 Light" panose="02020603020101020101" pitchFamily="18" charset="-127"/>
+              </a:rPr>
+              <a:t>'</a:t>
+            </a:r>
+            <a:r>
+              <a:rPr lang="ko-KR" altLang="en-US" sz="560" dirty="0">
+                <a:latin typeface="KoPub돋움체 Light" panose="02020603020101020101" pitchFamily="18" charset="-127"/>
+                <a:ea typeface="KoPub돋움체 Light" panose="02020603020101020101" pitchFamily="18" charset="-127"/>
+              </a:rPr>
+              <a:t>으로 인계 기록</a:t>
+            </a:r>
+            <a:endParaRPr lang="en-US" altLang="ko-KR" sz="560" dirty="0">
+              <a:latin typeface="KoPub돋움체 Light" panose="02020603020101020101" pitchFamily="18" charset="-127"/>
+              <a:ea typeface="KoPub돋움체 Light" panose="02020603020101020101" pitchFamily="18" charset="-127"/>
+            </a:endParaRPr>
+          </a:p>
+        </p:txBody>
+      </p:sp>
+      <p:sp>
+        <p:nvSpPr>
+          <p:cNvPr id="9" name="사각형: 둥근 모서리 8">
+            <a:extLst>
+              <a:ext uri="{FF2B5EF4-FFF2-40B4-BE49-F238E27FC236}">
+                <a16:creationId xmlns:a16="http://schemas.microsoft.com/office/drawing/2014/main" id="{81771CDF-B55B-4421-928F-D1D7D43CFAC8}"/>
+              </a:ext>
+            </a:extLst>
+          </p:cNvPr>
+          <p:cNvSpPr/>
+          <p:nvPr/>
+        </p:nvSpPr>
+        <p:spPr>
+          <a:xfrm>
+            <a:off x="1793399" y="488647"/>
+            <a:ext cx="1219597" cy="335942"/>
+          </a:xfrm>
+          <a:prstGeom prst="roundRect">
+            <a:avLst>
+              <a:gd name="adj" fmla="val 13824"/>
+            </a:avLst>
+          </a:prstGeom>
+          <a:noFill/>
+          <a:ln w="6350">
+            <a:solidFill>
+              <a:schemeClr val="bg1">
+                <a:lumMod val="85000"/>
+              </a:schemeClr>
+            </a:solidFill>
+          </a:ln>
+        </p:spPr>
+        <p:style>
+          <a:lnRef idx="2">
+            <a:schemeClr val="accent3">
+              <a:shade val="15000"/>
+            </a:schemeClr>
+          </a:lnRef>
+          <a:fillRef idx="1">
+            <a:schemeClr val="accent3"/>
+          </a:fillRef>
+          <a:effectRef idx="0">
+            <a:schemeClr val="accent3"/>
+          </a:effectRef>
+          <a:fontRef idx="minor">
+            <a:schemeClr val="lt1"/>
+          </a:fontRef>
+        </p:style>
+        <p:txBody>
+          <a:bodyPr rtlCol="0" anchor="ctr"/>
+          <a:lstStyle/>
+          <a:p>
+            <a:pPr algn="ctr"/>
+            <a:endParaRPr lang="ko-KR" altLang="en-US" sz="1778">
+              <a:latin typeface="KoPub돋움체 Medium" panose="02020603020101020101" pitchFamily="18" charset="-127"/>
+              <a:ea typeface="KoPub돋움체 Light" panose="02020603020101020101"/>
+            </a:endParaRPr>
+          </a:p>
+        </p:txBody>
+      </p:sp>
+      <p:sp>
+        <p:nvSpPr>
+          <p:cNvPr id="11" name="사각형: 둥근 모서리 10">
+            <a:extLst>
+              <a:ext uri="{FF2B5EF4-FFF2-40B4-BE49-F238E27FC236}">
+                <a16:creationId xmlns:a16="http://schemas.microsoft.com/office/drawing/2014/main" id="{A9BD57B0-0CB8-437B-91FF-358B1B271C52}"/>
+              </a:ext>
+            </a:extLst>
+          </p:cNvPr>
+          <p:cNvSpPr/>
+          <p:nvPr/>
+        </p:nvSpPr>
+        <p:spPr>
+          <a:xfrm>
+            <a:off x="1141463" y="490498"/>
+            <a:ext cx="634156" cy="334091"/>
+          </a:xfrm>
+          <a:prstGeom prst="roundRect">
+            <a:avLst>
+              <a:gd name="adj" fmla="val 13097"/>
+            </a:avLst>
+          </a:prstGeom>
+          <a:solidFill>
+            <a:schemeClr val="accent6">
+              <a:lumMod val="20000"/>
+              <a:lumOff val="80000"/>
+            </a:schemeClr>
+          </a:solidFill>
+          <a:ln>
+            <a:noFill/>
+          </a:ln>
+        </p:spPr>
+        <p:style>
+          <a:lnRef idx="2">
+            <a:schemeClr val="accent3">
+              <a:shade val="15000"/>
+            </a:schemeClr>
+          </a:lnRef>
+          <a:fillRef idx="1">
+            <a:schemeClr val="accent3"/>
+          </a:fillRef>
+          <a:effectRef idx="0">
+            <a:schemeClr val="accent3"/>
+          </a:effectRef>
+          <a:fontRef idx="minor">
+            <a:schemeClr val="lt1"/>
+          </a:fontRef>
+        </p:style>
+        <p:txBody>
+          <a:bodyPr rtlCol="0" anchor="ctr"/>
+          <a:lstStyle/>
+          <a:p>
+            <a:pPr algn="ctr"/>
+            <a:endParaRPr lang="ko-KR" altLang="en-US" sz="1778">
+              <a:latin typeface="KoPub돋움체 Medium" panose="02020603020101020101" pitchFamily="18" charset="-127"/>
+              <a:ea typeface="KoPub돋움체 Light" panose="02020603020101020101"/>
+            </a:endParaRPr>
+          </a:p>
+        </p:txBody>
+      </p:sp>
+      <p:sp>
+        <p:nvSpPr>
+          <p:cNvPr id="12" name="TextBox 11">
+            <a:extLst>
+              <a:ext uri="{FF2B5EF4-FFF2-40B4-BE49-F238E27FC236}">
+                <a16:creationId xmlns:a16="http://schemas.microsoft.com/office/drawing/2014/main" id="{3717CE27-01D2-4557-B697-30F1806A81B3}"/>
+              </a:ext>
+            </a:extLst>
+          </p:cNvPr>
+          <p:cNvSpPr txBox="1"/>
+          <p:nvPr/>
+        </p:nvSpPr>
+        <p:spPr>
+          <a:xfrm>
+            <a:off x="1209915" y="588879"/>
+            <a:ext cx="497252" cy="178510"/>
+          </a:xfrm>
+          <a:prstGeom prst="rect">
+            <a:avLst/>
+          </a:prstGeom>
+          <a:noFill/>
+        </p:spPr>
+        <p:txBody>
+          <a:bodyPr wrap="none" rtlCol="0">
+            <a:spAutoFit/>
+          </a:bodyPr>
+          <a:lstStyle/>
+          <a:p>
+            <a:pPr algn="ctr"/>
+            <a:r>
+              <a:rPr lang="en-US" altLang="ko-KR" sz="560" b="1" dirty="0">
+                <a:latin typeface="KoPub돋움체 Light" panose="02020603020101020101" pitchFamily="18" charset="-127"/>
+                <a:ea typeface="KoPub돋움체 Light" panose="02020603020101020101" pitchFamily="18" charset="-127"/>
+              </a:rPr>
+              <a:t>[IN-OUT]</a:t>
+            </a:r>
+          </a:p>
+        </p:txBody>
+      </p:sp>
+      <p:sp>
+        <p:nvSpPr>
+          <p:cNvPr id="4" name="직사각형 3">
+            <a:extLst>
+              <a:ext uri="{FF2B5EF4-FFF2-40B4-BE49-F238E27FC236}">
+                <a16:creationId xmlns:a16="http://schemas.microsoft.com/office/drawing/2014/main" id="{3306E135-233E-4999-A710-7E3C99EFDAEF}"/>
+              </a:ext>
+            </a:extLst>
+          </p:cNvPr>
+          <p:cNvSpPr/>
+          <p:nvPr/>
+        </p:nvSpPr>
+        <p:spPr>
+          <a:xfrm>
+            <a:off x="1546703" y="301181"/>
+            <a:ext cx="1088760" cy="200055"/>
+          </a:xfrm>
+          <a:prstGeom prst="rect">
+            <a:avLst/>
+          </a:prstGeom>
+        </p:spPr>
+        <p:txBody>
+          <a:bodyPr wrap="none">
+            <a:spAutoFit/>
+          </a:bodyPr>
+          <a:lstStyle/>
+          <a:p>
+            <a:r>
+              <a:rPr lang="ko-KR" altLang="en-US" sz="700" b="1" dirty="0">
+                <a:latin typeface="KoPub돋움체 Light" panose="02020603020101020101" pitchFamily="18" charset="-127"/>
+                <a:ea typeface="KoPub돋움체 Light" panose="02020603020101020101" pitchFamily="18" charset="-127"/>
+              </a:rPr>
+              <a:t>나를 지키는 방어 기록</a:t>
+            </a:r>
+            <a:endParaRPr lang="en-US" altLang="ko-KR" sz="700" b="1" dirty="0">
+              <a:latin typeface="KoPub돋움체 Light" panose="02020603020101020101" pitchFamily="18" charset="-127"/>
+              <a:ea typeface="KoPub돋움체 Light" panose="02020603020101020101" pitchFamily="18" charset="-127"/>
+            </a:endParaRPr>
+          </a:p>
+        </p:txBody>
+      </p:sp>
+      <p:sp>
+        <p:nvSpPr>
+          <p:cNvPr id="27" name="TextBox 26">
+            <a:extLst>
+              <a:ext uri="{FF2B5EF4-FFF2-40B4-BE49-F238E27FC236}">
+                <a16:creationId xmlns:a16="http://schemas.microsoft.com/office/drawing/2014/main" id="{6950ADB8-A755-4C4B-8102-F58976B5B6D4}"/>
+              </a:ext>
+            </a:extLst>
+          </p:cNvPr>
+          <p:cNvSpPr txBox="1"/>
+          <p:nvPr/>
+        </p:nvSpPr>
+        <p:spPr>
+          <a:xfrm>
+            <a:off x="1868409" y="1226341"/>
+            <a:ext cx="1091803" cy="350865"/>
+          </a:xfrm>
+          <a:prstGeom prst="rect">
+            <a:avLst/>
+          </a:prstGeom>
+          <a:noFill/>
+        </p:spPr>
+        <p:txBody>
+          <a:bodyPr wrap="square">
+            <a:spAutoFit/>
+          </a:bodyPr>
+          <a:lstStyle/>
+          <a:p>
+            <a:r>
+              <a:rPr lang="en-US" altLang="ko-KR" sz="560" dirty="0">
+                <a:latin typeface="KoPub돋움체 Light" panose="02020603020101020101" pitchFamily="18" charset="-127"/>
+                <a:ea typeface="KoPub돋움체 Light" panose="02020603020101020101" pitchFamily="18" charset="-127"/>
+              </a:rPr>
+              <a:t>PA </a:t>
+            </a:r>
+            <a:r>
+              <a:rPr lang="ko-KR" altLang="en-US" sz="560" dirty="0">
+                <a:latin typeface="KoPub돋움체 Light" panose="02020603020101020101" pitchFamily="18" charset="-127"/>
+                <a:ea typeface="KoPub돋움체 Light" panose="02020603020101020101" pitchFamily="18" charset="-127"/>
+              </a:rPr>
+              <a:t>지연 사유</a:t>
+            </a:r>
+            <a:r>
+              <a:rPr lang="en-US" altLang="ko-KR" sz="560" dirty="0">
+                <a:latin typeface="KoPub돋움체 Light" panose="02020603020101020101" pitchFamily="18" charset="-127"/>
+                <a:ea typeface="KoPub돋움체 Light" panose="02020603020101020101" pitchFamily="18" charset="-127"/>
+              </a:rPr>
+              <a:t>(</a:t>
+            </a:r>
+            <a:r>
+              <a:rPr lang="ko-KR" altLang="en-US" sz="560" dirty="0">
+                <a:latin typeface="KoPub돋움체 Light" panose="02020603020101020101" pitchFamily="18" charset="-127"/>
+                <a:ea typeface="KoPub돋움체 Light" panose="02020603020101020101" pitchFamily="18" charset="-127"/>
+              </a:rPr>
+              <a:t>응급</a:t>
+            </a:r>
+            <a:r>
+              <a:rPr lang="en-US" altLang="ko-KR" sz="560" dirty="0">
+                <a:latin typeface="KoPub돋움체 Light" panose="02020603020101020101" pitchFamily="18" charset="-127"/>
+                <a:ea typeface="KoPub돋움체 Light" panose="02020603020101020101" pitchFamily="18" charset="-127"/>
+              </a:rPr>
+              <a:t>·</a:t>
+            </a:r>
+            <a:r>
+              <a:rPr lang="ko-KR" altLang="en-US" sz="560" dirty="0">
+                <a:latin typeface="KoPub돋움체 Light" panose="02020603020101020101" pitchFamily="18" charset="-127"/>
+                <a:ea typeface="KoPub돋움체 Light" panose="02020603020101020101" pitchFamily="18" charset="-127"/>
+              </a:rPr>
+              <a:t>수술</a:t>
+            </a:r>
+            <a:r>
+              <a:rPr lang="en-US" altLang="ko-KR" sz="560" dirty="0">
+                <a:latin typeface="KoPub돋움체 Light" panose="02020603020101020101" pitchFamily="18" charset="-127"/>
+                <a:ea typeface="KoPub돋움체 Light" panose="02020603020101020101" pitchFamily="18" charset="-127"/>
+              </a:rPr>
+              <a:t>·</a:t>
+            </a:r>
+            <a:r>
+              <a:rPr lang="ko-KR" altLang="en-US" sz="560" dirty="0">
+                <a:latin typeface="KoPub돋움체 Light" panose="02020603020101020101" pitchFamily="18" charset="-127"/>
+                <a:ea typeface="KoPub돋움체 Light" panose="02020603020101020101" pitchFamily="18" charset="-127"/>
+              </a:rPr>
+              <a:t>대기</a:t>
+            </a:r>
+            <a:r>
+              <a:rPr lang="en-US" altLang="ko-KR" sz="560" dirty="0">
+                <a:latin typeface="KoPub돋움체 Light" panose="02020603020101020101" pitchFamily="18" charset="-127"/>
+                <a:ea typeface="KoPub돋움체 Light" panose="02020603020101020101" pitchFamily="18" charset="-127"/>
+              </a:rPr>
+              <a:t>·</a:t>
+            </a:r>
+            <a:r>
+              <a:rPr lang="ko-KR" altLang="en-US" sz="560" dirty="0" err="1">
+                <a:latin typeface="KoPub돋움체 Light" panose="02020603020101020101" pitchFamily="18" charset="-127"/>
+                <a:ea typeface="KoPub돋움체 Light" panose="02020603020101020101" pitchFamily="18" charset="-127"/>
+              </a:rPr>
+              <a:t>컨펌</a:t>
+            </a:r>
+            <a:r>
+              <a:rPr lang="en-US" altLang="ko-KR" sz="560" dirty="0">
+                <a:latin typeface="KoPub돋움체 Light" panose="02020603020101020101" pitchFamily="18" charset="-127"/>
+                <a:ea typeface="KoPub돋움체 Light" panose="02020603020101020101" pitchFamily="18" charset="-127"/>
+              </a:rPr>
+              <a:t>) </a:t>
+            </a:r>
+            <a:r>
+              <a:rPr lang="ko-KR" altLang="en-US" sz="560" dirty="0">
+                <a:latin typeface="KoPub돋움체 Light" panose="02020603020101020101" pitchFamily="18" charset="-127"/>
+                <a:ea typeface="KoPub돋움체 Light" panose="02020603020101020101" pitchFamily="18" charset="-127"/>
+              </a:rPr>
+              <a:t>명시</a:t>
+            </a:r>
+            <a:endParaRPr lang="en-US" altLang="ko-KR" sz="560" dirty="0">
+              <a:latin typeface="KoPub돋움체 Light" panose="02020603020101020101" pitchFamily="18" charset="-127"/>
+              <a:ea typeface="KoPub돋움체 Light" panose="02020603020101020101" pitchFamily="18" charset="-127"/>
+            </a:endParaRPr>
+          </a:p>
+        </p:txBody>
+      </p:sp>
+      <p:sp>
+        <p:nvSpPr>
+          <p:cNvPr id="28" name="사각형: 둥근 모서리 27">
+            <a:extLst>
+              <a:ext uri="{FF2B5EF4-FFF2-40B4-BE49-F238E27FC236}">
+                <a16:creationId xmlns:a16="http://schemas.microsoft.com/office/drawing/2014/main" id="{2A688FE5-A3E9-4A7D-9640-97D9C0317280}"/>
+              </a:ext>
+            </a:extLst>
+          </p:cNvPr>
+          <p:cNvSpPr/>
+          <p:nvPr/>
+        </p:nvSpPr>
+        <p:spPr>
+          <a:xfrm>
+            <a:off x="1793399" y="1181677"/>
+            <a:ext cx="1219597" cy="290297"/>
+          </a:xfrm>
+          <a:prstGeom prst="roundRect">
+            <a:avLst>
+              <a:gd name="adj" fmla="val 13824"/>
+            </a:avLst>
+          </a:prstGeom>
+          <a:noFill/>
+          <a:ln w="6350">
+            <a:solidFill>
+              <a:schemeClr val="bg1">
+                <a:lumMod val="85000"/>
+              </a:schemeClr>
+            </a:solidFill>
+          </a:ln>
+        </p:spPr>
+        <p:style>
+          <a:lnRef idx="2">
+            <a:schemeClr val="accent3">
+              <a:shade val="15000"/>
+            </a:schemeClr>
+          </a:lnRef>
+          <a:fillRef idx="1">
+            <a:schemeClr val="accent3"/>
+          </a:fillRef>
+          <a:effectRef idx="0">
+            <a:schemeClr val="accent3"/>
+          </a:effectRef>
+          <a:fontRef idx="minor">
+            <a:schemeClr val="lt1"/>
+          </a:fontRef>
+        </p:style>
+        <p:txBody>
+          <a:bodyPr rtlCol="0" anchor="ctr"/>
+          <a:lstStyle/>
+          <a:p>
+            <a:pPr algn="ctr"/>
+            <a:endParaRPr lang="ko-KR" altLang="en-US" sz="1778">
+              <a:latin typeface="KoPub돋움체 Medium" panose="02020603020101020101" pitchFamily="18" charset="-127"/>
+              <a:ea typeface="KoPub돋움체 Light" panose="02020603020101020101"/>
+            </a:endParaRPr>
+          </a:p>
+        </p:txBody>
+      </p:sp>
+      <p:sp>
+        <p:nvSpPr>
+          <p:cNvPr id="29" name="사각형: 둥근 모서리 28">
+            <a:extLst>
+              <a:ext uri="{FF2B5EF4-FFF2-40B4-BE49-F238E27FC236}">
+                <a16:creationId xmlns:a16="http://schemas.microsoft.com/office/drawing/2014/main" id="{64D39DA0-5EC6-4030-BC9A-5BA4D6820777}"/>
+              </a:ext>
+            </a:extLst>
+          </p:cNvPr>
+          <p:cNvSpPr/>
+          <p:nvPr/>
+        </p:nvSpPr>
+        <p:spPr>
+          <a:xfrm>
+            <a:off x="1141463" y="1183528"/>
+            <a:ext cx="634156" cy="290297"/>
+          </a:xfrm>
+          <a:prstGeom prst="roundRect">
+            <a:avLst>
+              <a:gd name="adj" fmla="val 13097"/>
+            </a:avLst>
+          </a:prstGeom>
+          <a:solidFill>
+            <a:schemeClr val="accent6">
+              <a:lumMod val="20000"/>
+              <a:lumOff val="80000"/>
+            </a:schemeClr>
+          </a:solidFill>
+          <a:ln>
+            <a:noFill/>
+          </a:ln>
+        </p:spPr>
+        <p:style>
+          <a:lnRef idx="2">
+            <a:schemeClr val="accent3">
+              <a:shade val="15000"/>
+            </a:schemeClr>
+          </a:lnRef>
+          <a:fillRef idx="1">
+            <a:schemeClr val="accent3"/>
+          </a:fillRef>
+          <a:effectRef idx="0">
+            <a:schemeClr val="accent3"/>
+          </a:effectRef>
+          <a:fontRef idx="minor">
+            <a:schemeClr val="lt1"/>
+          </a:fontRef>
+        </p:style>
+        <p:txBody>
+          <a:bodyPr rtlCol="0" anchor="ctr"/>
+          <a:lstStyle/>
+          <a:p>
+            <a:pPr algn="ctr"/>
+            <a:endParaRPr lang="ko-KR" altLang="en-US" sz="1778">
+              <a:latin typeface="KoPub돋움체 Medium" panose="02020603020101020101" pitchFamily="18" charset="-127"/>
+              <a:ea typeface="KoPub돋움체 Light" panose="02020603020101020101"/>
+            </a:endParaRPr>
+          </a:p>
+        </p:txBody>
+      </p:sp>
+      <p:sp>
+        <p:nvSpPr>
+          <p:cNvPr id="30" name="TextBox 29">
+            <a:extLst>
+              <a:ext uri="{FF2B5EF4-FFF2-40B4-BE49-F238E27FC236}">
+                <a16:creationId xmlns:a16="http://schemas.microsoft.com/office/drawing/2014/main" id="{3C4779CB-7AE4-4301-8B2E-ADD0772F1C8C}"/>
+              </a:ext>
+            </a:extLst>
+          </p:cNvPr>
+          <p:cNvSpPr txBox="1"/>
+          <p:nvPr/>
+        </p:nvSpPr>
+        <p:spPr>
+          <a:xfrm>
+            <a:off x="1239570" y="1269430"/>
+            <a:ext cx="437941" cy="178510"/>
+          </a:xfrm>
+          <a:prstGeom prst="rect">
+            <a:avLst/>
+          </a:prstGeom>
+          <a:noFill/>
+        </p:spPr>
+        <p:txBody>
+          <a:bodyPr wrap="none" rtlCol="0">
+            <a:spAutoFit/>
+          </a:bodyPr>
+          <a:lstStyle/>
+          <a:p>
+            <a:pPr algn="ctr"/>
+            <a:r>
+              <a:rPr lang="en-US" altLang="ko-KR" sz="560" b="1" dirty="0">
+                <a:latin typeface="KoPub돋움체 Light" panose="02020603020101020101" pitchFamily="18" charset="-127"/>
+                <a:ea typeface="KoPub돋움체 Light" panose="02020603020101020101" pitchFamily="18" charset="-127"/>
+              </a:rPr>
+              <a:t>C-Code</a:t>
+            </a:r>
+          </a:p>
+        </p:txBody>
+      </p:sp>
+      <p:sp>
+        <p:nvSpPr>
+          <p:cNvPr id="33" name="TextBox 32">
+            <a:extLst>
+              <a:ext uri="{FF2B5EF4-FFF2-40B4-BE49-F238E27FC236}">
+                <a16:creationId xmlns:a16="http://schemas.microsoft.com/office/drawing/2014/main" id="{CE2D936A-A45B-43D0-819F-2B99B59D02C1}"/>
+              </a:ext>
+            </a:extLst>
+          </p:cNvPr>
+          <p:cNvSpPr txBox="1"/>
+          <p:nvPr/>
+        </p:nvSpPr>
+        <p:spPr>
+          <a:xfrm>
+            <a:off x="607522" y="1499044"/>
+            <a:ext cx="2016899" cy="221599"/>
+          </a:xfrm>
+          <a:prstGeom prst="rect">
+            <a:avLst/>
+          </a:prstGeom>
+          <a:noFill/>
+        </p:spPr>
+        <p:txBody>
+          <a:bodyPr wrap="none" rtlCol="0">
+            <a:spAutoFit/>
+          </a:bodyPr>
+          <a:lstStyle/>
+          <a:p>
+            <a:pPr algn="ctr"/>
+            <a:r>
+              <a:rPr lang="en-US" altLang="ko-KR" sz="840" b="1" dirty="0">
+                <a:solidFill>
+                  <a:srgbClr val="7030A0"/>
+                </a:solidFill>
+                <a:latin typeface="KoPub돋움체 Light" panose="02020603020101020101" pitchFamily="18" charset="-127"/>
+                <a:ea typeface="KoPub돋움체 Light" panose="02020603020101020101" pitchFamily="18" charset="-127"/>
+              </a:rPr>
+              <a:t>“</a:t>
+            </a:r>
+            <a:r>
+              <a:rPr lang="ko-KR" altLang="en-US" sz="840" b="1" dirty="0">
+                <a:solidFill>
+                  <a:srgbClr val="7030A0"/>
+                </a:solidFill>
+                <a:latin typeface="KoPub돋움체 Light" panose="02020603020101020101" pitchFamily="18" charset="-127"/>
+                <a:ea typeface="KoPub돋움체 Light" panose="02020603020101020101" pitchFamily="18" charset="-127"/>
+              </a:rPr>
+              <a:t>기록은 메신저에서</a:t>
+            </a:r>
+            <a:r>
+              <a:rPr lang="en-US" altLang="ko-KR" sz="840" b="1" dirty="0">
+                <a:solidFill>
+                  <a:srgbClr val="7030A0"/>
+                </a:solidFill>
+                <a:latin typeface="KoPub돋움체 Light" panose="02020603020101020101" pitchFamily="18" charset="-127"/>
+                <a:ea typeface="KoPub돋움체 Light" panose="02020603020101020101" pitchFamily="18" charset="-127"/>
+              </a:rPr>
+              <a:t>, </a:t>
+            </a:r>
+            <a:r>
+              <a:rPr lang="ko-KR" altLang="en-US" sz="840" b="1" dirty="0">
+                <a:solidFill>
+                  <a:srgbClr val="7030A0"/>
+                </a:solidFill>
+                <a:latin typeface="KoPub돋움체 Light" panose="02020603020101020101" pitchFamily="18" charset="-127"/>
+                <a:ea typeface="KoPub돋움체 Light" panose="02020603020101020101" pitchFamily="18" charset="-127"/>
+              </a:rPr>
+              <a:t>정보는 </a:t>
+            </a:r>
+            <a:r>
+              <a:rPr lang="en-US" altLang="ko-KR" sz="840" b="1" dirty="0">
+                <a:solidFill>
+                  <a:srgbClr val="7030A0"/>
+                </a:solidFill>
+                <a:latin typeface="KoPub돋움체 Light" panose="02020603020101020101" pitchFamily="18" charset="-127"/>
+                <a:ea typeface="KoPub돋움체 Light" panose="02020603020101020101" pitchFamily="18" charset="-127"/>
+              </a:rPr>
+              <a:t>QR</a:t>
+            </a:r>
+            <a:r>
+              <a:rPr lang="ko-KR" altLang="en-US" sz="840" b="1" dirty="0">
+                <a:solidFill>
+                  <a:srgbClr val="7030A0"/>
+                </a:solidFill>
+                <a:latin typeface="KoPub돋움체 Light" panose="02020603020101020101" pitchFamily="18" charset="-127"/>
+                <a:ea typeface="KoPub돋움체 Light" panose="02020603020101020101" pitchFamily="18" charset="-127"/>
+              </a:rPr>
+              <a:t>에서</a:t>
+            </a:r>
+            <a:r>
+              <a:rPr lang="en-US" altLang="ko-KR" sz="840" b="1" dirty="0">
+                <a:solidFill>
+                  <a:srgbClr val="7030A0"/>
+                </a:solidFill>
+                <a:latin typeface="KoPub돋움체 Light" panose="02020603020101020101" pitchFamily="18" charset="-127"/>
+                <a:ea typeface="KoPub돋움체 Light" panose="02020603020101020101" pitchFamily="18" charset="-127"/>
+              </a:rPr>
+              <a:t>!”</a:t>
+            </a:r>
+          </a:p>
+        </p:txBody>
+      </p:sp>
+    </p:spTree>
+    <p:extLst>
+      <p:ext uri="{BB962C8B-B14F-4D97-AF65-F5344CB8AC3E}">
+        <p14:creationId xmlns:p14="http://schemas.microsoft.com/office/powerpoint/2010/main" val="4173235279"/>
+      </p:ext>
+    </p:extLst>
+  </p:cSld>
+  <p:clrMapOvr>
+    <a:masterClrMapping/>
+  </p:clrMapOvr>
+</p:sld>
+</file>
+
+<file path=ppt/slides/slide6.xml><?xml version="1.0" encoding="utf-8"?>
+<p:sld xmlns:a="http://schemas.openxmlformats.org/drawingml/2006/main" xmlns:r="http://schemas.openxmlformats.org/officeDocument/2006/relationships" xmlns:p="http://schemas.openxmlformats.org/presentationml/2006/main">
+  <p:cSld>
+    <p:spTree>
+      <p:nvGrpSpPr>
+        <p:cNvPr id="1" name="">
+          <a:extLst>
+            <a:ext uri="{FF2B5EF4-FFF2-40B4-BE49-F238E27FC236}">
+              <a16:creationId xmlns:a16="http://schemas.microsoft.com/office/drawing/2014/main" id="{75C95857-5CB6-E176-FDD7-C77B771BAC79}"/>
+            </a:ext>
+          </a:extLst>
+        </p:cNvPr>
+        <p:cNvGrpSpPr/>
+        <p:nvPr/>
+      </p:nvGrpSpPr>
+      <p:grpSpPr>
+        <a:xfrm>
+          <a:off x="0" y="0"/>
+          <a:ext cx="0" cy="0"/>
+          <a:chOff x="0" y="0"/>
+          <a:chExt cx="0" cy="0"/>
+        </a:xfrm>
+      </p:grpSpPr>
+      <p:sp>
+        <p:nvSpPr>
+          <p:cNvPr id="32" name="사각형: 둥근 모서리 31">
+            <a:extLst>
+              <a:ext uri="{FF2B5EF4-FFF2-40B4-BE49-F238E27FC236}">
+                <a16:creationId xmlns:a16="http://schemas.microsoft.com/office/drawing/2014/main" id="{B0243490-B7C6-42DB-B189-20704EFBD587}"/>
+              </a:ext>
+            </a:extLst>
+          </p:cNvPr>
+          <p:cNvSpPr/>
+          <p:nvPr/>
+        </p:nvSpPr>
+        <p:spPr>
+          <a:xfrm>
+            <a:off x="226620" y="282605"/>
+            <a:ext cx="896591" cy="192090"/>
+          </a:xfrm>
+          <a:prstGeom prst="roundRect">
+            <a:avLst/>
+          </a:prstGeom>
+          <a:solidFill>
+            <a:schemeClr val="accent4">
+              <a:lumMod val="20000"/>
+              <a:lumOff val="80000"/>
+            </a:schemeClr>
+          </a:solidFill>
+          <a:ln>
+            <a:solidFill>
+              <a:schemeClr val="bg1">
+                <a:lumMod val="95000"/>
+              </a:schemeClr>
+            </a:solidFill>
+          </a:ln>
+        </p:spPr>
+        <p:style>
+          <a:lnRef idx="2">
+            <a:schemeClr val="accent1">
+              <a:shade val="50000"/>
+            </a:schemeClr>
+          </a:lnRef>
+          <a:fillRef idx="1">
+            <a:schemeClr val="accent1"/>
+          </a:fillRef>
+          <a:effectRef idx="0">
+            <a:schemeClr val="accent1"/>
+          </a:effectRef>
+          <a:fontRef idx="minor">
+            <a:schemeClr val="lt1"/>
+          </a:fontRef>
+        </p:style>
+        <p:txBody>
+          <a:bodyPr rtlCol="0" anchor="ctr"/>
+          <a:lstStyle/>
+          <a:p>
+            <a:pPr algn="ctr"/>
+            <a:endParaRPr lang="ko-KR" altLang="en-US" sz="630"/>
+          </a:p>
+        </p:txBody>
+      </p:sp>
+      <p:sp>
+        <p:nvSpPr>
+          <p:cNvPr id="31" name="사각형: 둥근 모서리 30">
+            <a:extLst>
+              <a:ext uri="{FF2B5EF4-FFF2-40B4-BE49-F238E27FC236}">
+                <a16:creationId xmlns:a16="http://schemas.microsoft.com/office/drawing/2014/main" id="{30F47067-F54E-4A90-9F21-57BD24BB9C63}"/>
+              </a:ext>
+            </a:extLst>
+          </p:cNvPr>
+          <p:cNvSpPr/>
+          <p:nvPr/>
+        </p:nvSpPr>
+        <p:spPr>
+          <a:xfrm>
+            <a:off x="1141463" y="282605"/>
+            <a:ext cx="1871533" cy="192090"/>
+          </a:xfrm>
+          <a:prstGeom prst="roundRect">
+            <a:avLst/>
+          </a:prstGeom>
+          <a:solidFill>
+            <a:schemeClr val="accent6">
+              <a:lumMod val="20000"/>
+              <a:lumOff val="80000"/>
+            </a:schemeClr>
+          </a:solidFill>
+          <a:ln>
+            <a:solidFill>
+              <a:schemeClr val="bg1">
+                <a:lumMod val="95000"/>
+              </a:schemeClr>
+            </a:solidFill>
+          </a:ln>
+        </p:spPr>
+        <p:style>
+          <a:lnRef idx="2">
+            <a:schemeClr val="accent1">
+              <a:shade val="50000"/>
+            </a:schemeClr>
+          </a:lnRef>
+          <a:fillRef idx="1">
+            <a:schemeClr val="accent1"/>
+          </a:fillRef>
+          <a:effectRef idx="0">
+            <a:schemeClr val="accent1"/>
+          </a:effectRef>
+          <a:fontRef idx="minor">
+            <a:schemeClr val="lt1"/>
+          </a:fontRef>
+        </p:style>
+        <p:txBody>
+          <a:bodyPr rtlCol="0" anchor="ctr"/>
+          <a:lstStyle/>
+          <a:p>
+            <a:pPr algn="ctr"/>
+            <a:endParaRPr lang="ko-KR" altLang="en-US" sz="630"/>
+          </a:p>
+        </p:txBody>
+      </p:sp>
+      <p:sp>
+        <p:nvSpPr>
+          <p:cNvPr id="23" name="TextBox 22">
+            <a:extLst>
+              <a:ext uri="{FF2B5EF4-FFF2-40B4-BE49-F238E27FC236}">
+                <a16:creationId xmlns:a16="http://schemas.microsoft.com/office/drawing/2014/main" id="{CD41B2AA-F91D-4DF3-86CD-504CE316D08F}"/>
+              </a:ext>
+            </a:extLst>
+          </p:cNvPr>
+          <p:cNvSpPr txBox="1"/>
+          <p:nvPr/>
+        </p:nvSpPr>
+        <p:spPr>
+          <a:xfrm>
+            <a:off x="1868409" y="898006"/>
+            <a:ext cx="995304" cy="264688"/>
+          </a:xfrm>
+          <a:prstGeom prst="rect">
+            <a:avLst/>
+          </a:prstGeom>
+          <a:noFill/>
+        </p:spPr>
+        <p:txBody>
+          <a:bodyPr wrap="square">
+            <a:spAutoFit/>
+          </a:bodyPr>
+          <a:lstStyle/>
+          <a:p>
+            <a:r>
+              <a:rPr lang="ko-KR" altLang="en-US" sz="560" dirty="0">
+                <a:latin typeface="KoPub돋움체 Light" panose="02020603020101020101" pitchFamily="18" charset="-127"/>
+                <a:ea typeface="KoPub돋움체 Light" panose="02020603020101020101" pitchFamily="18" charset="-127"/>
+              </a:rPr>
+              <a:t>야간 응급 유선 보고 후 사후 </a:t>
+            </a:r>
+            <a:r>
+              <a:rPr lang="en-US" altLang="ko-KR" sz="560" dirty="0">
+                <a:latin typeface="KoPub돋움체 Light" panose="02020603020101020101" pitchFamily="18" charset="-127"/>
+                <a:ea typeface="KoPub돋움체 Light" panose="02020603020101020101" pitchFamily="18" charset="-127"/>
+              </a:rPr>
+              <a:t>[A]-[D] 1</a:t>
+            </a:r>
+            <a:r>
+              <a:rPr lang="ko-KR" altLang="en-US" sz="560" dirty="0">
+                <a:latin typeface="KoPub돋움체 Light" panose="02020603020101020101" pitchFamily="18" charset="-127"/>
+                <a:ea typeface="KoPub돋움체 Light" panose="02020603020101020101" pitchFamily="18" charset="-127"/>
+              </a:rPr>
+              <a:t>줄 기록</a:t>
+            </a:r>
+          </a:p>
+        </p:txBody>
+      </p:sp>
+      <p:sp>
+        <p:nvSpPr>
+          <p:cNvPr id="24" name="사각형: 둥근 모서리 23">
+            <a:extLst>
+              <a:ext uri="{FF2B5EF4-FFF2-40B4-BE49-F238E27FC236}">
+                <a16:creationId xmlns:a16="http://schemas.microsoft.com/office/drawing/2014/main" id="{A193F6F5-6376-4F98-A3BB-96E53249AC9E}"/>
+              </a:ext>
+            </a:extLst>
+          </p:cNvPr>
+          <p:cNvSpPr/>
+          <p:nvPr/>
+        </p:nvSpPr>
+        <p:spPr>
+          <a:xfrm>
+            <a:off x="1793399" y="836088"/>
+            <a:ext cx="1219597" cy="335942"/>
+          </a:xfrm>
+          <a:prstGeom prst="roundRect">
+            <a:avLst>
+              <a:gd name="adj" fmla="val 13824"/>
+            </a:avLst>
+          </a:prstGeom>
+          <a:noFill/>
+          <a:ln w="6350">
+            <a:solidFill>
+              <a:schemeClr val="bg1">
+                <a:lumMod val="85000"/>
+              </a:schemeClr>
+            </a:solidFill>
+          </a:ln>
+        </p:spPr>
+        <p:style>
+          <a:lnRef idx="2">
+            <a:schemeClr val="accent3">
+              <a:shade val="15000"/>
+            </a:schemeClr>
+          </a:lnRef>
+          <a:fillRef idx="1">
+            <a:schemeClr val="accent3"/>
+          </a:fillRef>
+          <a:effectRef idx="0">
+            <a:schemeClr val="accent3"/>
+          </a:effectRef>
+          <a:fontRef idx="minor">
+            <a:schemeClr val="lt1"/>
+          </a:fontRef>
+        </p:style>
+        <p:txBody>
+          <a:bodyPr rtlCol="0" anchor="ctr"/>
+          <a:lstStyle/>
+          <a:p>
+            <a:pPr algn="ctr"/>
+            <a:endParaRPr lang="ko-KR" altLang="en-US" sz="1778">
+              <a:latin typeface="KoPub돋움체 Medium" panose="02020603020101020101" pitchFamily="18" charset="-127"/>
+              <a:ea typeface="KoPub돋움체 Light" panose="02020603020101020101"/>
+            </a:endParaRPr>
+          </a:p>
+        </p:txBody>
+      </p:sp>
+      <p:sp>
+        <p:nvSpPr>
+          <p:cNvPr id="25" name="사각형: 둥근 모서리 24">
+            <a:extLst>
+              <a:ext uri="{FF2B5EF4-FFF2-40B4-BE49-F238E27FC236}">
+                <a16:creationId xmlns:a16="http://schemas.microsoft.com/office/drawing/2014/main" id="{ABE07B44-9D20-4CE2-BFB6-8DDA339570CA}"/>
+              </a:ext>
+            </a:extLst>
+          </p:cNvPr>
+          <p:cNvSpPr/>
+          <p:nvPr/>
+        </p:nvSpPr>
+        <p:spPr>
+          <a:xfrm>
+            <a:off x="1141463" y="837938"/>
+            <a:ext cx="634156" cy="334091"/>
+          </a:xfrm>
+          <a:prstGeom prst="roundRect">
+            <a:avLst>
+              <a:gd name="adj" fmla="val 13097"/>
+            </a:avLst>
+          </a:prstGeom>
+          <a:solidFill>
+            <a:schemeClr val="accent6">
+              <a:lumMod val="20000"/>
+              <a:lumOff val="80000"/>
+            </a:schemeClr>
+          </a:solidFill>
+          <a:ln>
+            <a:noFill/>
+          </a:ln>
+        </p:spPr>
+        <p:style>
+          <a:lnRef idx="2">
+            <a:schemeClr val="accent3">
+              <a:shade val="15000"/>
+            </a:schemeClr>
+          </a:lnRef>
+          <a:fillRef idx="1">
+            <a:schemeClr val="accent3"/>
+          </a:fillRef>
+          <a:effectRef idx="0">
+            <a:schemeClr val="accent3"/>
+          </a:effectRef>
+          <a:fontRef idx="minor">
+            <a:schemeClr val="lt1"/>
+          </a:fontRef>
+        </p:style>
+        <p:txBody>
+          <a:bodyPr rtlCol="0" anchor="ctr"/>
+          <a:lstStyle/>
+          <a:p>
+            <a:pPr algn="ctr"/>
+            <a:endParaRPr lang="ko-KR" altLang="en-US" sz="1778">
+              <a:latin typeface="KoPub돋움체 Medium" panose="02020603020101020101" pitchFamily="18" charset="-127"/>
+              <a:ea typeface="KoPub돋움체 Light" panose="02020603020101020101"/>
+            </a:endParaRPr>
+          </a:p>
+        </p:txBody>
+      </p:sp>
+      <p:sp>
+        <p:nvSpPr>
+          <p:cNvPr id="26" name="TextBox 25">
+            <a:extLst>
+              <a:ext uri="{FF2B5EF4-FFF2-40B4-BE49-F238E27FC236}">
+                <a16:creationId xmlns:a16="http://schemas.microsoft.com/office/drawing/2014/main" id="{31132F88-5AA2-43B2-8C2A-F2BB31E51E43}"/>
+              </a:ext>
+            </a:extLst>
+          </p:cNvPr>
+          <p:cNvSpPr txBox="1"/>
+          <p:nvPr/>
+        </p:nvSpPr>
+        <p:spPr>
+          <a:xfrm>
+            <a:off x="1154612" y="936320"/>
+            <a:ext cx="607860" cy="178510"/>
+          </a:xfrm>
+          <a:prstGeom prst="rect">
+            <a:avLst/>
+          </a:prstGeom>
+          <a:noFill/>
+        </p:spPr>
+        <p:txBody>
+          <a:bodyPr wrap="none" rtlCol="0">
+            <a:spAutoFit/>
+          </a:bodyPr>
+          <a:lstStyle/>
+          <a:p>
+            <a:pPr algn="ctr"/>
+            <a:r>
+              <a:rPr lang="en-US" altLang="ko-KR" sz="560" b="1" dirty="0">
+                <a:latin typeface="KoPub돋움체 Light" panose="02020603020101020101" pitchFamily="18" charset="-127"/>
+                <a:ea typeface="KoPub돋움체 Light" panose="02020603020101020101" pitchFamily="18" charset="-127"/>
+              </a:rPr>
+              <a:t>[D-</a:t>
+            </a:r>
+            <a:r>
+              <a:rPr lang="ko-KR" altLang="en-US" sz="560" b="1" dirty="0" err="1">
+                <a:latin typeface="KoPub돋움체 Light" panose="02020603020101020101" pitchFamily="18" charset="-127"/>
+                <a:ea typeface="KoPub돋움체 Light" panose="02020603020101020101" pitchFamily="18" charset="-127"/>
+              </a:rPr>
+              <a:t>야간유선</a:t>
+            </a:r>
+            <a:r>
+              <a:rPr lang="en-US" altLang="ko-KR" sz="560" b="1" dirty="0">
+                <a:latin typeface="KoPub돋움체 Light" panose="02020603020101020101" pitchFamily="18" charset="-127"/>
+                <a:ea typeface="KoPub돋움체 Light" panose="02020603020101020101" pitchFamily="18" charset="-127"/>
+              </a:rPr>
+              <a:t>]</a:t>
+            </a:r>
+          </a:p>
+        </p:txBody>
+      </p:sp>
+      <p:sp>
+        <p:nvSpPr>
+          <p:cNvPr id="3" name="TextBox 2">
+            <a:extLst>
+              <a:ext uri="{FF2B5EF4-FFF2-40B4-BE49-F238E27FC236}">
+                <a16:creationId xmlns:a16="http://schemas.microsoft.com/office/drawing/2014/main" id="{BDB8E964-7EED-74B0-E816-8BE4F8865B12}"/>
+              </a:ext>
+            </a:extLst>
+          </p:cNvPr>
+          <p:cNvSpPr txBox="1"/>
+          <p:nvPr/>
+        </p:nvSpPr>
+        <p:spPr>
+          <a:xfrm>
+            <a:off x="-10111" y="64610"/>
+            <a:ext cx="1347869" cy="168379"/>
+          </a:xfrm>
+          <a:prstGeom prst="rect">
+            <a:avLst/>
+          </a:prstGeom>
+          <a:noFill/>
+        </p:spPr>
+        <p:txBody>
+          <a:bodyPr wrap="none">
+            <a:spAutoFit/>
+          </a:bodyPr>
+          <a:lstStyle/>
+          <a:p>
+            <a:pPr algn="ctr"/>
+            <a:r>
+              <a:rPr lang="ko-KR" altLang="en-US" sz="494" spc="-11" dirty="0">
+                <a:latin typeface="KoPub돋움체 Light" panose="02020603020101020101" pitchFamily="18" charset="-127"/>
+                <a:ea typeface="KoPub돋움체 Light" panose="02020603020101020101" pitchFamily="18" charset="-127"/>
+              </a:rPr>
+              <a:t>순천향대학교 천안병원 </a:t>
+            </a:r>
+            <a:r>
+              <a:rPr lang="en-US" altLang="ko-KR" sz="494" spc="-11" dirty="0">
+                <a:latin typeface="KoPub돋움체 Light" panose="02020603020101020101" pitchFamily="18" charset="-127"/>
+                <a:ea typeface="KoPub돋움체 Light" panose="02020603020101020101" pitchFamily="18" charset="-127"/>
+              </a:rPr>
+              <a:t>| </a:t>
+            </a:r>
+            <a:r>
+              <a:rPr lang="ko-KR" altLang="en-US" sz="494" spc="-11" dirty="0">
+                <a:latin typeface="KoPub돋움체 Light" panose="02020603020101020101" pitchFamily="18" charset="-127"/>
+                <a:ea typeface="KoPub돋움체 Light" panose="02020603020101020101" pitchFamily="18" charset="-127"/>
+              </a:rPr>
+              <a:t>진료지원간호팀 </a:t>
+            </a:r>
+          </a:p>
+        </p:txBody>
+      </p:sp>
+      <p:grpSp>
+        <p:nvGrpSpPr>
+          <p:cNvPr id="7" name="그룹 6">
+            <a:extLst>
+              <a:ext uri="{FF2B5EF4-FFF2-40B4-BE49-F238E27FC236}">
+                <a16:creationId xmlns:a16="http://schemas.microsoft.com/office/drawing/2014/main" id="{399CA2A2-FAD0-4681-B98C-3A7AA0484B78}"/>
+              </a:ext>
+            </a:extLst>
+          </p:cNvPr>
+          <p:cNvGrpSpPr/>
+          <p:nvPr/>
+        </p:nvGrpSpPr>
+        <p:grpSpPr>
+          <a:xfrm>
+            <a:off x="227092" y="488646"/>
+            <a:ext cx="904857" cy="1183130"/>
+            <a:chOff x="592138" y="1592949"/>
+            <a:chExt cx="2585305" cy="3380371"/>
+          </a:xfrm>
+        </p:grpSpPr>
+        <p:sp>
+          <p:nvSpPr>
+            <p:cNvPr id="22" name="사각형: 둥근 모서리 21">
+              <a:extLst>
+                <a:ext uri="{FF2B5EF4-FFF2-40B4-BE49-F238E27FC236}">
+                  <a16:creationId xmlns:a16="http://schemas.microsoft.com/office/drawing/2014/main" id="{8DA9AE8C-7191-4002-98F1-FF77B72D519F}"/>
+                </a:ext>
+              </a:extLst>
+            </p:cNvPr>
+            <p:cNvSpPr/>
+            <p:nvPr/>
+          </p:nvSpPr>
+          <p:spPr>
+            <a:xfrm>
+              <a:off x="592138" y="1592949"/>
+              <a:ext cx="2561688" cy="2814796"/>
+            </a:xfrm>
+            <a:prstGeom prst="roundRect">
+              <a:avLst>
+                <a:gd name="adj" fmla="val 5214"/>
+              </a:avLst>
+            </a:prstGeom>
+            <a:solidFill>
+              <a:schemeClr val="bg1"/>
+            </a:solidFill>
+            <a:ln>
+              <a:solidFill>
+                <a:schemeClr val="bg1">
+                  <a:lumMod val="75000"/>
+                </a:schemeClr>
+              </a:solidFill>
+            </a:ln>
+          </p:spPr>
+          <p:style>
+            <a:lnRef idx="2">
+              <a:schemeClr val="accent3">
+                <a:shade val="15000"/>
+              </a:schemeClr>
+            </a:lnRef>
+            <a:fillRef idx="1">
+              <a:schemeClr val="accent3"/>
+            </a:fillRef>
+            <a:effectRef idx="0">
+              <a:schemeClr val="accent3"/>
+            </a:effectRef>
+            <a:fontRef idx="minor">
+              <a:schemeClr val="lt1"/>
+            </a:fontRef>
+          </p:style>
+          <p:txBody>
+            <a:bodyPr rtlCol="0" anchor="ctr"/>
+            <a:lstStyle/>
+            <a:p>
+              <a:pPr algn="ctr"/>
+              <a:endParaRPr lang="ko-KR" altLang="en-US" sz="1778">
+                <a:solidFill>
+                  <a:schemeClr val="tx1"/>
+                </a:solidFill>
+                <a:ea typeface="KoPub돋움체 Light" panose="02020603020101020101"/>
+              </a:endParaRPr>
+            </a:p>
+          </p:txBody>
+        </p:sp>
+        <p:sp>
+          <p:nvSpPr>
+            <p:cNvPr id="17" name="TextBox 16">
+              <a:extLst>
+                <a:ext uri="{FF2B5EF4-FFF2-40B4-BE49-F238E27FC236}">
+                  <a16:creationId xmlns:a16="http://schemas.microsoft.com/office/drawing/2014/main" id="{5E33DDDA-6085-D01E-695B-8DCA20A2A084}"/>
+                </a:ext>
+              </a:extLst>
+            </p:cNvPr>
+            <p:cNvSpPr txBox="1"/>
+            <p:nvPr/>
+          </p:nvSpPr>
+          <p:spPr>
+            <a:xfrm>
+              <a:off x="630047" y="1754858"/>
+              <a:ext cx="2547396" cy="3218462"/>
+            </a:xfrm>
+            <a:prstGeom prst="rect">
+              <a:avLst/>
+            </a:prstGeom>
+            <a:noFill/>
+          </p:spPr>
+          <p:txBody>
+            <a:bodyPr wrap="square">
+              <a:spAutoFit/>
+            </a:bodyPr>
+            <a:lstStyle/>
+            <a:p>
+              <a:r>
+                <a:rPr lang="en-US" altLang="ko-KR" sz="560" b="1" dirty="0">
+                  <a:latin typeface="KoPub돋움체 Light" panose="02020603020101020101" pitchFamily="18" charset="-127"/>
+                  <a:ea typeface="KoPub돋움체 Light" panose="02020603020101020101" pitchFamily="18" charset="-127"/>
+                </a:rPr>
+                <a:t>[CHEMO] </a:t>
+              </a:r>
+              <a:r>
+                <a:rPr lang="ko-KR" altLang="en-US" sz="560" dirty="0"/>
+                <a:t>항암 관리</a:t>
+              </a:r>
+            </a:p>
+            <a:p>
+              <a:r>
+                <a:rPr lang="en-US" altLang="ko-KR" sz="560" b="1" dirty="0">
+                  <a:latin typeface="KoPub돋움체 Light" panose="02020603020101020101" pitchFamily="18" charset="-127"/>
+                  <a:ea typeface="KoPub돋움체 Light" panose="02020603020101020101" pitchFamily="18" charset="-127"/>
+                </a:rPr>
+                <a:t>[BLOOD]</a:t>
+              </a:r>
+              <a:r>
+                <a:rPr lang="en-US" altLang="ko-KR" sz="560" dirty="0">
+                  <a:latin typeface="KoPub돋움체 Light" panose="02020603020101020101" pitchFamily="18" charset="-127"/>
+                  <a:ea typeface="KoPub돋움체 Light" panose="02020603020101020101" pitchFamily="18" charset="-127"/>
+                </a:rPr>
+                <a:t> </a:t>
+              </a:r>
+              <a:r>
+                <a:rPr lang="ko-KR" altLang="en-US" sz="560" dirty="0">
+                  <a:latin typeface="KoPub돋움체 Light" panose="02020603020101020101" pitchFamily="18" charset="-127"/>
+                  <a:ea typeface="KoPub돋움체 Light" panose="02020603020101020101" pitchFamily="18" charset="-127"/>
+                </a:rPr>
+                <a:t>수혈 관리</a:t>
+              </a:r>
+              <a:endParaRPr lang="en-US" altLang="ko-KR" sz="560" dirty="0">
+                <a:latin typeface="KoPub돋움체 Light" panose="02020603020101020101" pitchFamily="18" charset="-127"/>
+                <a:ea typeface="KoPub돋움체 Light" panose="02020603020101020101" pitchFamily="18" charset="-127"/>
+              </a:endParaRPr>
+            </a:p>
+            <a:p>
+              <a:r>
+                <a:rPr lang="en-US" altLang="ko-KR" sz="560" b="1" dirty="0">
+                  <a:latin typeface="KoPub돋움체 Light" panose="02020603020101020101" pitchFamily="18" charset="-127"/>
+                  <a:ea typeface="KoPub돋움체 Light" panose="02020603020101020101" pitchFamily="18" charset="-127"/>
+                </a:rPr>
+                <a:t>[CVR]</a:t>
+              </a:r>
+              <a:r>
+                <a:rPr lang="en-US" altLang="ko-KR" sz="560" dirty="0">
+                  <a:latin typeface="KoPub돋움체 Light" panose="02020603020101020101" pitchFamily="18" charset="-127"/>
+                  <a:ea typeface="KoPub돋움체 Light" panose="02020603020101020101" pitchFamily="18" charset="-127"/>
+                </a:rPr>
+                <a:t> </a:t>
+              </a:r>
+              <a:r>
+                <a:rPr lang="ko-KR" altLang="en-US" sz="560" dirty="0">
+                  <a:latin typeface="KoPub돋움체 Light" panose="02020603020101020101" pitchFamily="18" charset="-127"/>
+                  <a:ea typeface="KoPub돋움체 Light" panose="02020603020101020101" pitchFamily="18" charset="-127"/>
+                </a:rPr>
+                <a:t>위험 수치</a:t>
+              </a:r>
+              <a:endParaRPr lang="en-US" altLang="ko-KR" sz="560" dirty="0">
+                <a:latin typeface="KoPub돋움체 Light" panose="02020603020101020101" pitchFamily="18" charset="-127"/>
+                <a:ea typeface="KoPub돋움체 Light" panose="02020603020101020101" pitchFamily="18" charset="-127"/>
+              </a:endParaRPr>
+            </a:p>
+            <a:p>
+              <a:r>
+                <a:rPr lang="en-US" altLang="ko-KR" sz="560" b="1" dirty="0">
+                  <a:latin typeface="KoPub돋움체 Light" panose="02020603020101020101" pitchFamily="18" charset="-127"/>
+                  <a:ea typeface="KoPub돋움체 Light" panose="02020603020101020101" pitchFamily="18" charset="-127"/>
+                </a:rPr>
+                <a:t>[LIFE] </a:t>
+              </a:r>
+              <a:r>
+                <a:rPr lang="ko-KR" altLang="en-US" sz="560" dirty="0">
+                  <a:latin typeface="KoPub돋움체 Light" panose="02020603020101020101" pitchFamily="18" charset="-127"/>
+                  <a:ea typeface="KoPub돋움체 Light" panose="02020603020101020101" pitchFamily="18" charset="-127"/>
+                </a:rPr>
+                <a:t>존엄</a:t>
+              </a:r>
+              <a:r>
+                <a:rPr lang="en-US" altLang="ko-KR" sz="560" dirty="0">
+                  <a:latin typeface="KoPub돋움체 Light" panose="02020603020101020101" pitchFamily="18" charset="-127"/>
+                  <a:ea typeface="KoPub돋움체 Light" panose="02020603020101020101" pitchFamily="18" charset="-127"/>
+                </a:rPr>
+                <a:t>/</a:t>
+              </a:r>
+              <a:r>
+                <a:rPr lang="ko-KR" altLang="en-US" sz="560" dirty="0">
+                  <a:latin typeface="KoPub돋움체 Light" panose="02020603020101020101" pitchFamily="18" charset="-127"/>
+                  <a:ea typeface="KoPub돋움체 Light" panose="02020603020101020101" pitchFamily="18" charset="-127"/>
+                </a:rPr>
+                <a:t>임종</a:t>
+              </a:r>
+              <a:endParaRPr lang="en-US" altLang="ko-KR" sz="560" dirty="0">
+                <a:latin typeface="KoPub돋움체 Light" panose="02020603020101020101" pitchFamily="18" charset="-127"/>
+                <a:ea typeface="KoPub돋움체 Light" panose="02020603020101020101" pitchFamily="18" charset="-127"/>
+              </a:endParaRPr>
+            </a:p>
+            <a:p>
+              <a:r>
+                <a:rPr lang="en-US" altLang="ko-KR" sz="560" b="1" dirty="0">
+                  <a:latin typeface="KoPub돋움체 Light" panose="02020603020101020101" pitchFamily="18" charset="-127"/>
+                  <a:ea typeface="KoPub돋움체 Light" panose="02020603020101020101" pitchFamily="18" charset="-127"/>
+                </a:rPr>
+                <a:t>[MEET] </a:t>
+              </a:r>
+              <a:r>
+                <a:rPr lang="ko-KR" altLang="en-US" sz="560" dirty="0">
+                  <a:latin typeface="KoPub돋움체 Light" panose="02020603020101020101" pitchFamily="18" charset="-127"/>
+                  <a:ea typeface="KoPub돋움체 Light" panose="02020603020101020101" pitchFamily="18" charset="-127"/>
+                </a:rPr>
+                <a:t>보호자 면담</a:t>
+              </a:r>
+              <a:endParaRPr lang="en-US" altLang="ko-KR" sz="560" dirty="0">
+                <a:latin typeface="KoPub돋움체 Light" panose="02020603020101020101" pitchFamily="18" charset="-127"/>
+                <a:ea typeface="KoPub돋움체 Light" panose="02020603020101020101" pitchFamily="18" charset="-127"/>
+              </a:endParaRPr>
+            </a:p>
+            <a:p>
+              <a:r>
+                <a:rPr lang="en-US" altLang="ko-KR" sz="560" b="1" dirty="0">
+                  <a:latin typeface="KoPub돋움체 Light" panose="02020603020101020101" pitchFamily="18" charset="-127"/>
+                  <a:ea typeface="KoPub돋움체 Light" panose="02020603020101020101" pitchFamily="18" charset="-127"/>
+                </a:rPr>
+                <a:t>[MARROW] </a:t>
+              </a:r>
+              <a:r>
+                <a:rPr lang="ko-KR" altLang="en-US" sz="560" dirty="0">
+                  <a:latin typeface="KoPub돋움체 Light" panose="02020603020101020101" pitchFamily="18" charset="-127"/>
+                  <a:ea typeface="KoPub돋움체 Light" panose="02020603020101020101" pitchFamily="18" charset="-127"/>
+                </a:rPr>
+                <a:t>골수 검사</a:t>
+              </a:r>
+              <a:endParaRPr lang="en-US" altLang="ko-KR" sz="560" dirty="0">
+                <a:latin typeface="KoPub돋움체 Light" panose="02020603020101020101" pitchFamily="18" charset="-127"/>
+                <a:ea typeface="KoPub돋움체 Light" panose="02020603020101020101" pitchFamily="18" charset="-127"/>
+              </a:endParaRPr>
+            </a:p>
+            <a:p>
+              <a:r>
+                <a:rPr lang="en-US" altLang="ko-KR" sz="560" b="1" dirty="0">
+                  <a:latin typeface="KoPub돋움체 Light" panose="02020603020101020101" pitchFamily="18" charset="-127"/>
+                  <a:ea typeface="KoPub돋움체 Light" panose="02020603020101020101" pitchFamily="18" charset="-127"/>
+                </a:rPr>
+                <a:t>[ISO] </a:t>
+              </a:r>
+              <a:r>
+                <a:rPr lang="ko-KR" altLang="en-US" sz="560" dirty="0">
+                  <a:latin typeface="KoPub돋움체 Light" panose="02020603020101020101" pitchFamily="18" charset="-127"/>
+                  <a:ea typeface="KoPub돋움체 Light" panose="02020603020101020101" pitchFamily="18" charset="-127"/>
+                </a:rPr>
+                <a:t>격리 관리</a:t>
+              </a:r>
+              <a:endParaRPr lang="en-US" altLang="ko-KR" sz="560" dirty="0">
+                <a:latin typeface="KoPub돋움체 Light" panose="02020603020101020101" pitchFamily="18" charset="-127"/>
+                <a:ea typeface="KoPub돋움체 Light" panose="02020603020101020101" pitchFamily="18" charset="-127"/>
+              </a:endParaRPr>
+            </a:p>
+            <a:p>
+              <a:r>
+                <a:rPr lang="en-US" altLang="ko-KR" sz="560" b="1" dirty="0">
+                  <a:latin typeface="KoPub돋움체 Light" panose="02020603020101020101" pitchFamily="18" charset="-127"/>
+                  <a:ea typeface="KoPub돋움체 Light" panose="02020603020101020101" pitchFamily="18" charset="-127"/>
+                </a:rPr>
+                <a:t>[C-Status] </a:t>
+              </a:r>
+              <a:r>
+                <a:rPr lang="ko-KR" altLang="en-US" sz="560" dirty="0">
+                  <a:latin typeface="KoPub돋움체 Light" panose="02020603020101020101" pitchFamily="18" charset="-127"/>
+                  <a:ea typeface="KoPub돋움체 Light" panose="02020603020101020101" pitchFamily="18" charset="-127"/>
+                </a:rPr>
+                <a:t>상태 악화</a:t>
+              </a:r>
+              <a:endParaRPr lang="en-US" altLang="ko-KR" sz="560" dirty="0">
+                <a:latin typeface="KoPub돋움체 Light" panose="02020603020101020101" pitchFamily="18" charset="-127"/>
+                <a:ea typeface="KoPub돋움체 Light" panose="02020603020101020101" pitchFamily="18" charset="-127"/>
+              </a:endParaRPr>
+            </a:p>
+            <a:p>
+              <a:r>
+                <a:rPr lang="en-US" altLang="ko-KR" sz="560" b="1" dirty="0">
+                  <a:latin typeface="KoPub돋움체 Light" panose="02020603020101020101" pitchFamily="18" charset="-127"/>
+                  <a:ea typeface="KoPub돋움체 Light" panose="02020603020101020101" pitchFamily="18" charset="-127"/>
+                </a:rPr>
+                <a:t>[PAIN] </a:t>
+              </a:r>
+              <a:r>
+                <a:rPr lang="ko-KR" altLang="en-US" sz="560" dirty="0">
+                  <a:latin typeface="KoPub돋움체 Light" panose="02020603020101020101" pitchFamily="18" charset="-127"/>
+                  <a:ea typeface="KoPub돋움체 Light" panose="02020603020101020101" pitchFamily="18" charset="-127"/>
+                </a:rPr>
+                <a:t>통증 조절</a:t>
+              </a:r>
+              <a:endParaRPr lang="en-US" altLang="ko-KR" sz="560" dirty="0">
+                <a:latin typeface="KoPub돋움체 Light" panose="02020603020101020101" pitchFamily="18" charset="-127"/>
+                <a:ea typeface="KoPub돋움체 Light" panose="02020603020101020101" pitchFamily="18" charset="-127"/>
+              </a:endParaRPr>
+            </a:p>
+            <a:p>
+              <a:r>
+                <a:rPr lang="en-US" altLang="ko-KR" sz="560" b="1" dirty="0">
+                  <a:latin typeface="KoPub돋움체 Light" panose="02020603020101020101" pitchFamily="18" charset="-127"/>
+                  <a:ea typeface="KoPub돋움체 Light" panose="02020603020101020101" pitchFamily="18" charset="-127"/>
+                </a:rPr>
+                <a:t>[OUT] </a:t>
+              </a:r>
+              <a:r>
+                <a:rPr lang="ko-KR" altLang="en-US" sz="560" dirty="0">
+                  <a:latin typeface="KoPub돋움체 Light" panose="02020603020101020101" pitchFamily="18" charset="-127"/>
+                  <a:ea typeface="KoPub돋움체 Light" panose="02020603020101020101" pitchFamily="18" charset="-127"/>
+                </a:rPr>
+                <a:t>퇴원</a:t>
+              </a:r>
+              <a:r>
+                <a:rPr lang="en-US" altLang="ko-KR" sz="560" dirty="0">
+                  <a:latin typeface="KoPub돋움체 Light" panose="02020603020101020101" pitchFamily="18" charset="-127"/>
+                  <a:ea typeface="KoPub돋움체 Light" panose="02020603020101020101" pitchFamily="18" charset="-127"/>
+                </a:rPr>
+                <a:t>/</a:t>
+              </a:r>
+              <a:r>
+                <a:rPr lang="ko-KR" altLang="en-US" sz="560" dirty="0">
+                  <a:latin typeface="KoPub돋움체 Light" panose="02020603020101020101" pitchFamily="18" charset="-127"/>
+                  <a:ea typeface="KoPub돋움체 Light" panose="02020603020101020101" pitchFamily="18" charset="-127"/>
+                </a:rPr>
+                <a:t>전과</a:t>
+              </a:r>
+              <a:r>
+                <a:rPr lang="en-US" altLang="ko-KR" sz="560" dirty="0">
+                  <a:latin typeface="KoPub돋움체 Light" panose="02020603020101020101" pitchFamily="18" charset="-127"/>
+                  <a:ea typeface="KoPub돋움체 Light" panose="02020603020101020101" pitchFamily="18" charset="-127"/>
+                </a:rPr>
+                <a:t>/</a:t>
+              </a:r>
+              <a:r>
+                <a:rPr lang="ko-KR" altLang="en-US" sz="560" dirty="0">
+                  <a:latin typeface="KoPub돋움체 Light" panose="02020603020101020101" pitchFamily="18" charset="-127"/>
+                  <a:ea typeface="KoPub돋움체 Light" panose="02020603020101020101" pitchFamily="18" charset="-127"/>
+                </a:rPr>
+                <a:t>사망</a:t>
+              </a:r>
+              <a:endParaRPr lang="en-US" altLang="ko-KR" sz="560" dirty="0">
+                <a:latin typeface="KoPub돋움체 Light" panose="02020603020101020101" pitchFamily="18" charset="-127"/>
+                <a:ea typeface="KoPub돋움체 Light" panose="02020603020101020101" pitchFamily="18" charset="-127"/>
+              </a:endParaRPr>
+            </a:p>
+          </p:txBody>
+        </p:sp>
+      </p:grpSp>
+      <p:sp>
+        <p:nvSpPr>
+          <p:cNvPr id="2" name="TextBox 1">
+            <a:extLst>
+              <a:ext uri="{FF2B5EF4-FFF2-40B4-BE49-F238E27FC236}">
+                <a16:creationId xmlns:a16="http://schemas.microsoft.com/office/drawing/2014/main" id="{5C7E232E-6B0D-4C30-967C-1D82B967BC1B}"/>
+              </a:ext>
+            </a:extLst>
+          </p:cNvPr>
+          <p:cNvSpPr txBox="1"/>
+          <p:nvPr/>
+        </p:nvSpPr>
+        <p:spPr>
+          <a:xfrm>
+            <a:off x="226149" y="308631"/>
+            <a:ext cx="897534" cy="307777"/>
+          </a:xfrm>
+          <a:prstGeom prst="rect">
+            <a:avLst/>
+          </a:prstGeom>
+          <a:noFill/>
+        </p:spPr>
+        <p:txBody>
+          <a:bodyPr wrap="square" rtlCol="0">
+            <a:spAutoFit/>
+          </a:bodyPr>
+          <a:lstStyle/>
+          <a:p>
+            <a:pPr algn="ctr"/>
+            <a:r>
+              <a:rPr lang="ko-KR" altLang="en-US" sz="700" b="1" dirty="0">
+                <a:latin typeface="KoPub돋움체 Light" panose="02020603020101020101" pitchFamily="18" charset="-127"/>
+                <a:ea typeface="KoPub돋움체 Light" panose="02020603020101020101" pitchFamily="18" charset="-127"/>
+              </a:rPr>
+              <a:t>하이패스 태그 </a:t>
+            </a:r>
+            <a:r>
+              <a:rPr lang="en-US" altLang="ko-KR" sz="700" b="1" dirty="0">
+                <a:latin typeface="KoPub돋움체 Light" panose="02020603020101020101" pitchFamily="18" charset="-127"/>
+                <a:ea typeface="KoPub돋움체 Light" panose="02020603020101020101" pitchFamily="18" charset="-127"/>
+              </a:rPr>
+              <a:t>10</a:t>
+            </a:r>
+            <a:r>
+              <a:rPr lang="ko-KR" altLang="en-US" sz="700" b="1" dirty="0">
+                <a:latin typeface="KoPub돋움체 Light" panose="02020603020101020101" pitchFamily="18" charset="-127"/>
+                <a:ea typeface="KoPub돋움체 Light" panose="02020603020101020101" pitchFamily="18" charset="-127"/>
+              </a:rPr>
+              <a:t>종</a:t>
+            </a:r>
+            <a:endParaRPr lang="en-US" altLang="ko-KR" sz="700" b="1" dirty="0">
+              <a:latin typeface="KoPub돋움체 Light" panose="02020603020101020101" pitchFamily="18" charset="-127"/>
+              <a:ea typeface="KoPub돋움체 Light" panose="02020603020101020101" pitchFamily="18" charset="-127"/>
+            </a:endParaRPr>
+          </a:p>
+        </p:txBody>
+      </p:sp>
+      <p:sp>
+        <p:nvSpPr>
+          <p:cNvPr id="8" name="TextBox 7">
+            <a:extLst>
+              <a:ext uri="{FF2B5EF4-FFF2-40B4-BE49-F238E27FC236}">
+                <a16:creationId xmlns:a16="http://schemas.microsoft.com/office/drawing/2014/main" id="{2D7FF5CD-F432-4D5C-924D-9C31E13C1988}"/>
+              </a:ext>
+            </a:extLst>
+          </p:cNvPr>
+          <p:cNvSpPr txBox="1"/>
+          <p:nvPr/>
+        </p:nvSpPr>
+        <p:spPr>
+          <a:xfrm>
+            <a:off x="1868409" y="550565"/>
+            <a:ext cx="995304" cy="350865"/>
+          </a:xfrm>
+          <a:prstGeom prst="rect">
+            <a:avLst/>
+          </a:prstGeom>
+          <a:noFill/>
+        </p:spPr>
+        <p:txBody>
+          <a:bodyPr wrap="square">
+            <a:spAutoFit/>
+          </a:bodyPr>
+          <a:lstStyle/>
+          <a:p>
+            <a:r>
+              <a:rPr lang="ko-KR" altLang="en-US" sz="560" dirty="0">
+                <a:latin typeface="KoPub돋움체 Light" panose="02020603020101020101" pitchFamily="18" charset="-127"/>
+                <a:ea typeface="KoPub돋움체 Light" panose="02020603020101020101" pitchFamily="18" charset="-127"/>
+              </a:rPr>
+              <a:t>근무 교대 시 미완료 건에 </a:t>
+            </a:r>
+            <a:r>
+              <a:rPr lang="en-US" altLang="ko-KR" sz="560" dirty="0">
+                <a:latin typeface="KoPub돋움체 Light" panose="02020603020101020101" pitchFamily="18" charset="-127"/>
+                <a:ea typeface="KoPub돋움체 Light" panose="02020603020101020101" pitchFamily="18" charset="-127"/>
+              </a:rPr>
+              <a:t>'</a:t>
+            </a:r>
+            <a:r>
+              <a:rPr lang="ko-KR" altLang="en-US" sz="560" dirty="0">
+                <a:latin typeface="KoPub돋움체 Light" panose="02020603020101020101" pitchFamily="18" charset="-127"/>
+                <a:ea typeface="KoPub돋움체 Light" panose="02020603020101020101" pitchFamily="18" charset="-127"/>
+              </a:rPr>
+              <a:t>답장</a:t>
+            </a:r>
+            <a:r>
+              <a:rPr lang="en-US" altLang="ko-KR" sz="560" dirty="0">
+                <a:latin typeface="KoPub돋움체 Light" panose="02020603020101020101" pitchFamily="18" charset="-127"/>
+                <a:ea typeface="KoPub돋움체 Light" panose="02020603020101020101" pitchFamily="18" charset="-127"/>
+              </a:rPr>
+              <a:t>'</a:t>
+            </a:r>
+            <a:r>
+              <a:rPr lang="ko-KR" altLang="en-US" sz="560" dirty="0">
+                <a:latin typeface="KoPub돋움체 Light" panose="02020603020101020101" pitchFamily="18" charset="-127"/>
+                <a:ea typeface="KoPub돋움체 Light" panose="02020603020101020101" pitchFamily="18" charset="-127"/>
+              </a:rPr>
+              <a:t>으로 인계 기록</a:t>
+            </a:r>
+            <a:endParaRPr lang="en-US" altLang="ko-KR" sz="560" dirty="0">
+              <a:latin typeface="KoPub돋움체 Light" panose="02020603020101020101" pitchFamily="18" charset="-127"/>
+              <a:ea typeface="KoPub돋움체 Light" panose="02020603020101020101" pitchFamily="18" charset="-127"/>
+            </a:endParaRPr>
+          </a:p>
+        </p:txBody>
+      </p:sp>
+      <p:sp>
+        <p:nvSpPr>
+          <p:cNvPr id="9" name="사각형: 둥근 모서리 8">
+            <a:extLst>
+              <a:ext uri="{FF2B5EF4-FFF2-40B4-BE49-F238E27FC236}">
+                <a16:creationId xmlns:a16="http://schemas.microsoft.com/office/drawing/2014/main" id="{81771CDF-B55B-4421-928F-D1D7D43CFAC8}"/>
+              </a:ext>
+            </a:extLst>
+          </p:cNvPr>
+          <p:cNvSpPr/>
+          <p:nvPr/>
+        </p:nvSpPr>
+        <p:spPr>
+          <a:xfrm>
+            <a:off x="1793399" y="488647"/>
+            <a:ext cx="1219597" cy="335942"/>
+          </a:xfrm>
+          <a:prstGeom prst="roundRect">
+            <a:avLst>
+              <a:gd name="adj" fmla="val 13824"/>
+            </a:avLst>
+          </a:prstGeom>
+          <a:noFill/>
+          <a:ln w="6350">
+            <a:solidFill>
+              <a:schemeClr val="bg1">
+                <a:lumMod val="85000"/>
+              </a:schemeClr>
+            </a:solidFill>
+          </a:ln>
+        </p:spPr>
+        <p:style>
+          <a:lnRef idx="2">
+            <a:schemeClr val="accent3">
+              <a:shade val="15000"/>
+            </a:schemeClr>
+          </a:lnRef>
+          <a:fillRef idx="1">
+            <a:schemeClr val="accent3"/>
+          </a:fillRef>
+          <a:effectRef idx="0">
+            <a:schemeClr val="accent3"/>
+          </a:effectRef>
+          <a:fontRef idx="minor">
+            <a:schemeClr val="lt1"/>
+          </a:fontRef>
+        </p:style>
+        <p:txBody>
+          <a:bodyPr rtlCol="0" anchor="ctr"/>
+          <a:lstStyle/>
+          <a:p>
+            <a:pPr algn="ctr"/>
+            <a:endParaRPr lang="ko-KR" altLang="en-US" sz="1778">
+              <a:latin typeface="KoPub돋움체 Medium" panose="02020603020101020101" pitchFamily="18" charset="-127"/>
+              <a:ea typeface="KoPub돋움체 Light" panose="02020603020101020101"/>
+            </a:endParaRPr>
+          </a:p>
+        </p:txBody>
+      </p:sp>
+      <p:sp>
+        <p:nvSpPr>
+          <p:cNvPr id="11" name="사각형: 둥근 모서리 10">
+            <a:extLst>
+              <a:ext uri="{FF2B5EF4-FFF2-40B4-BE49-F238E27FC236}">
+                <a16:creationId xmlns:a16="http://schemas.microsoft.com/office/drawing/2014/main" id="{A9BD57B0-0CB8-437B-91FF-358B1B271C52}"/>
+              </a:ext>
+            </a:extLst>
+          </p:cNvPr>
+          <p:cNvSpPr/>
+          <p:nvPr/>
+        </p:nvSpPr>
+        <p:spPr>
+          <a:xfrm>
+            <a:off x="1141463" y="490498"/>
+            <a:ext cx="634156" cy="334091"/>
+          </a:xfrm>
+          <a:prstGeom prst="roundRect">
+            <a:avLst>
+              <a:gd name="adj" fmla="val 13097"/>
+            </a:avLst>
+          </a:prstGeom>
+          <a:solidFill>
+            <a:schemeClr val="accent6">
+              <a:lumMod val="20000"/>
+              <a:lumOff val="80000"/>
+            </a:schemeClr>
+          </a:solidFill>
+          <a:ln>
+            <a:noFill/>
+          </a:ln>
+        </p:spPr>
+        <p:style>
+          <a:lnRef idx="2">
+            <a:schemeClr val="accent3">
+              <a:shade val="15000"/>
+            </a:schemeClr>
+          </a:lnRef>
+          <a:fillRef idx="1">
+            <a:schemeClr val="accent3"/>
+          </a:fillRef>
+          <a:effectRef idx="0">
+            <a:schemeClr val="accent3"/>
+          </a:effectRef>
+          <a:fontRef idx="minor">
+            <a:schemeClr val="lt1"/>
+          </a:fontRef>
+        </p:style>
+        <p:txBody>
+          <a:bodyPr rtlCol="0" anchor="ctr"/>
+          <a:lstStyle/>
+          <a:p>
+            <a:pPr algn="ctr"/>
+            <a:endParaRPr lang="ko-KR" altLang="en-US" sz="1778">
+              <a:latin typeface="KoPub돋움체 Medium" panose="02020603020101020101" pitchFamily="18" charset="-127"/>
+              <a:ea typeface="KoPub돋움체 Light" panose="02020603020101020101"/>
+            </a:endParaRPr>
+          </a:p>
+        </p:txBody>
+      </p:sp>
+      <p:sp>
+        <p:nvSpPr>
+          <p:cNvPr id="12" name="TextBox 11">
+            <a:extLst>
+              <a:ext uri="{FF2B5EF4-FFF2-40B4-BE49-F238E27FC236}">
+                <a16:creationId xmlns:a16="http://schemas.microsoft.com/office/drawing/2014/main" id="{3717CE27-01D2-4557-B697-30F1806A81B3}"/>
+              </a:ext>
+            </a:extLst>
+          </p:cNvPr>
+          <p:cNvSpPr txBox="1"/>
+          <p:nvPr/>
+        </p:nvSpPr>
+        <p:spPr>
+          <a:xfrm>
+            <a:off x="1209915" y="588879"/>
+            <a:ext cx="497252" cy="178510"/>
+          </a:xfrm>
+          <a:prstGeom prst="rect">
+            <a:avLst/>
+          </a:prstGeom>
+          <a:noFill/>
+        </p:spPr>
+        <p:txBody>
+          <a:bodyPr wrap="none" rtlCol="0">
+            <a:spAutoFit/>
+          </a:bodyPr>
+          <a:lstStyle/>
+          <a:p>
+            <a:pPr algn="ctr"/>
+            <a:r>
+              <a:rPr lang="en-US" altLang="ko-KR" sz="560" b="1" dirty="0">
+                <a:latin typeface="KoPub돋움체 Light" panose="02020603020101020101" pitchFamily="18" charset="-127"/>
+                <a:ea typeface="KoPub돋움체 Light" panose="02020603020101020101" pitchFamily="18" charset="-127"/>
+              </a:rPr>
+              <a:t>[IN-OUT]</a:t>
+            </a:r>
+          </a:p>
+        </p:txBody>
+      </p:sp>
+      <p:sp>
+        <p:nvSpPr>
+          <p:cNvPr id="4" name="직사각형 3">
+            <a:extLst>
+              <a:ext uri="{FF2B5EF4-FFF2-40B4-BE49-F238E27FC236}">
+                <a16:creationId xmlns:a16="http://schemas.microsoft.com/office/drawing/2014/main" id="{3306E135-233E-4999-A710-7E3C99EFDAEF}"/>
+              </a:ext>
+            </a:extLst>
+          </p:cNvPr>
+          <p:cNvSpPr/>
+          <p:nvPr/>
+        </p:nvSpPr>
+        <p:spPr>
+          <a:xfrm>
+            <a:off x="1546703" y="301181"/>
+            <a:ext cx="1088760" cy="200055"/>
+          </a:xfrm>
+          <a:prstGeom prst="rect">
+            <a:avLst/>
+          </a:prstGeom>
+        </p:spPr>
+        <p:txBody>
+          <a:bodyPr wrap="none">
+            <a:spAutoFit/>
+          </a:bodyPr>
+          <a:lstStyle/>
+          <a:p>
+            <a:r>
+              <a:rPr lang="ko-KR" altLang="en-US" sz="700" b="1" dirty="0">
+                <a:latin typeface="KoPub돋움체 Light" panose="02020603020101020101" pitchFamily="18" charset="-127"/>
+                <a:ea typeface="KoPub돋움체 Light" panose="02020603020101020101" pitchFamily="18" charset="-127"/>
+              </a:rPr>
+              <a:t>나를 지키는 방어 기록</a:t>
+            </a:r>
+            <a:endParaRPr lang="en-US" altLang="ko-KR" sz="700" b="1" dirty="0">
+              <a:latin typeface="KoPub돋움체 Light" panose="02020603020101020101" pitchFamily="18" charset="-127"/>
+              <a:ea typeface="KoPub돋움체 Light" panose="02020603020101020101" pitchFamily="18" charset="-127"/>
+            </a:endParaRPr>
+          </a:p>
+        </p:txBody>
+      </p:sp>
+      <p:sp>
+        <p:nvSpPr>
+          <p:cNvPr id="27" name="TextBox 26">
+            <a:extLst>
+              <a:ext uri="{FF2B5EF4-FFF2-40B4-BE49-F238E27FC236}">
+                <a16:creationId xmlns:a16="http://schemas.microsoft.com/office/drawing/2014/main" id="{6950ADB8-A755-4C4B-8102-F58976B5B6D4}"/>
+              </a:ext>
+            </a:extLst>
+          </p:cNvPr>
+          <p:cNvSpPr txBox="1"/>
+          <p:nvPr/>
+        </p:nvSpPr>
+        <p:spPr>
+          <a:xfrm>
+            <a:off x="1868409" y="1226341"/>
+            <a:ext cx="1091803" cy="350865"/>
+          </a:xfrm>
+          <a:prstGeom prst="rect">
+            <a:avLst/>
+          </a:prstGeom>
+          <a:noFill/>
+        </p:spPr>
+        <p:txBody>
+          <a:bodyPr wrap="square">
+            <a:spAutoFit/>
+          </a:bodyPr>
+          <a:lstStyle/>
+          <a:p>
+            <a:r>
+              <a:rPr lang="en-US" altLang="ko-KR" sz="560" dirty="0">
+                <a:latin typeface="KoPub돋움체 Light" panose="02020603020101020101" pitchFamily="18" charset="-127"/>
+                <a:ea typeface="KoPub돋움체 Light" panose="02020603020101020101" pitchFamily="18" charset="-127"/>
+              </a:rPr>
+              <a:t>PA </a:t>
+            </a:r>
+            <a:r>
+              <a:rPr lang="ko-KR" altLang="en-US" sz="560" dirty="0">
+                <a:latin typeface="KoPub돋움체 Light" panose="02020603020101020101" pitchFamily="18" charset="-127"/>
+                <a:ea typeface="KoPub돋움체 Light" panose="02020603020101020101" pitchFamily="18" charset="-127"/>
+              </a:rPr>
+              <a:t>지연 사유</a:t>
+            </a:r>
+            <a:r>
+              <a:rPr lang="en-US" altLang="ko-KR" sz="560" dirty="0">
+                <a:latin typeface="KoPub돋움체 Light" panose="02020603020101020101" pitchFamily="18" charset="-127"/>
+                <a:ea typeface="KoPub돋움체 Light" panose="02020603020101020101" pitchFamily="18" charset="-127"/>
+              </a:rPr>
+              <a:t>(</a:t>
+            </a:r>
+            <a:r>
+              <a:rPr lang="ko-KR" altLang="en-US" sz="560" dirty="0">
+                <a:latin typeface="KoPub돋움체 Light" panose="02020603020101020101" pitchFamily="18" charset="-127"/>
+                <a:ea typeface="KoPub돋움체 Light" panose="02020603020101020101" pitchFamily="18" charset="-127"/>
+              </a:rPr>
+              <a:t>응급</a:t>
+            </a:r>
+            <a:r>
+              <a:rPr lang="en-US" altLang="ko-KR" sz="560" dirty="0">
+                <a:latin typeface="KoPub돋움체 Light" panose="02020603020101020101" pitchFamily="18" charset="-127"/>
+                <a:ea typeface="KoPub돋움체 Light" panose="02020603020101020101" pitchFamily="18" charset="-127"/>
+              </a:rPr>
+              <a:t>·</a:t>
+            </a:r>
+            <a:r>
+              <a:rPr lang="ko-KR" altLang="en-US" sz="560" dirty="0">
+                <a:latin typeface="KoPub돋움체 Light" panose="02020603020101020101" pitchFamily="18" charset="-127"/>
+                <a:ea typeface="KoPub돋움체 Light" panose="02020603020101020101" pitchFamily="18" charset="-127"/>
+              </a:rPr>
+              <a:t>수술</a:t>
+            </a:r>
+            <a:r>
+              <a:rPr lang="en-US" altLang="ko-KR" sz="560" dirty="0">
+                <a:latin typeface="KoPub돋움체 Light" panose="02020603020101020101" pitchFamily="18" charset="-127"/>
+                <a:ea typeface="KoPub돋움체 Light" panose="02020603020101020101" pitchFamily="18" charset="-127"/>
+              </a:rPr>
+              <a:t>·</a:t>
+            </a:r>
+            <a:r>
+              <a:rPr lang="ko-KR" altLang="en-US" sz="560" dirty="0">
+                <a:latin typeface="KoPub돋움체 Light" panose="02020603020101020101" pitchFamily="18" charset="-127"/>
+                <a:ea typeface="KoPub돋움체 Light" panose="02020603020101020101" pitchFamily="18" charset="-127"/>
+              </a:rPr>
+              <a:t>대기</a:t>
+            </a:r>
+            <a:r>
+              <a:rPr lang="en-US" altLang="ko-KR" sz="560" dirty="0">
+                <a:latin typeface="KoPub돋움체 Light" panose="02020603020101020101" pitchFamily="18" charset="-127"/>
+                <a:ea typeface="KoPub돋움체 Light" panose="02020603020101020101" pitchFamily="18" charset="-127"/>
+              </a:rPr>
+              <a:t>·</a:t>
+            </a:r>
+            <a:r>
+              <a:rPr lang="ko-KR" altLang="en-US" sz="560" dirty="0" err="1">
+                <a:latin typeface="KoPub돋움체 Light" panose="02020603020101020101" pitchFamily="18" charset="-127"/>
+                <a:ea typeface="KoPub돋움체 Light" panose="02020603020101020101" pitchFamily="18" charset="-127"/>
+              </a:rPr>
+              <a:t>컨펌</a:t>
+            </a:r>
+            <a:r>
+              <a:rPr lang="en-US" altLang="ko-KR" sz="560" dirty="0">
+                <a:latin typeface="KoPub돋움체 Light" panose="02020603020101020101" pitchFamily="18" charset="-127"/>
+                <a:ea typeface="KoPub돋움체 Light" panose="02020603020101020101" pitchFamily="18" charset="-127"/>
+              </a:rPr>
+              <a:t>) </a:t>
+            </a:r>
+            <a:r>
+              <a:rPr lang="ko-KR" altLang="en-US" sz="560" dirty="0">
+                <a:latin typeface="KoPub돋움체 Light" panose="02020603020101020101" pitchFamily="18" charset="-127"/>
+                <a:ea typeface="KoPub돋움체 Light" panose="02020603020101020101" pitchFamily="18" charset="-127"/>
+              </a:rPr>
+              <a:t>명시</a:t>
+            </a:r>
+            <a:endParaRPr lang="en-US" altLang="ko-KR" sz="560" dirty="0">
+              <a:latin typeface="KoPub돋움체 Light" panose="02020603020101020101" pitchFamily="18" charset="-127"/>
+              <a:ea typeface="KoPub돋움체 Light" panose="02020603020101020101" pitchFamily="18" charset="-127"/>
+            </a:endParaRPr>
+          </a:p>
+        </p:txBody>
+      </p:sp>
+      <p:sp>
+        <p:nvSpPr>
+          <p:cNvPr id="28" name="사각형: 둥근 모서리 27">
+            <a:extLst>
+              <a:ext uri="{FF2B5EF4-FFF2-40B4-BE49-F238E27FC236}">
+                <a16:creationId xmlns:a16="http://schemas.microsoft.com/office/drawing/2014/main" id="{2A688FE5-A3E9-4A7D-9640-97D9C0317280}"/>
+              </a:ext>
+            </a:extLst>
+          </p:cNvPr>
+          <p:cNvSpPr/>
+          <p:nvPr/>
+        </p:nvSpPr>
+        <p:spPr>
+          <a:xfrm>
+            <a:off x="1793399" y="1181677"/>
+            <a:ext cx="1219597" cy="290297"/>
+          </a:xfrm>
+          <a:prstGeom prst="roundRect">
+            <a:avLst>
+              <a:gd name="adj" fmla="val 13824"/>
+            </a:avLst>
+          </a:prstGeom>
+          <a:noFill/>
+          <a:ln w="6350">
+            <a:solidFill>
+              <a:schemeClr val="bg1">
+                <a:lumMod val="85000"/>
+              </a:schemeClr>
+            </a:solidFill>
+          </a:ln>
+        </p:spPr>
+        <p:style>
+          <a:lnRef idx="2">
+            <a:schemeClr val="accent3">
+              <a:shade val="15000"/>
+            </a:schemeClr>
+          </a:lnRef>
+          <a:fillRef idx="1">
+            <a:schemeClr val="accent3"/>
+          </a:fillRef>
+          <a:effectRef idx="0">
+            <a:schemeClr val="accent3"/>
+          </a:effectRef>
+          <a:fontRef idx="minor">
+            <a:schemeClr val="lt1"/>
+          </a:fontRef>
+        </p:style>
+        <p:txBody>
+          <a:bodyPr rtlCol="0" anchor="ctr"/>
+          <a:lstStyle/>
+          <a:p>
+            <a:pPr algn="ctr"/>
+            <a:endParaRPr lang="ko-KR" altLang="en-US" sz="1778">
+              <a:latin typeface="KoPub돋움체 Medium" panose="02020603020101020101" pitchFamily="18" charset="-127"/>
+              <a:ea typeface="KoPub돋움체 Light" panose="02020603020101020101"/>
+            </a:endParaRPr>
+          </a:p>
+        </p:txBody>
+      </p:sp>
+      <p:sp>
+        <p:nvSpPr>
+          <p:cNvPr id="29" name="사각형: 둥근 모서리 28">
+            <a:extLst>
+              <a:ext uri="{FF2B5EF4-FFF2-40B4-BE49-F238E27FC236}">
+                <a16:creationId xmlns:a16="http://schemas.microsoft.com/office/drawing/2014/main" id="{64D39DA0-5EC6-4030-BC9A-5BA4D6820777}"/>
+              </a:ext>
+            </a:extLst>
+          </p:cNvPr>
+          <p:cNvSpPr/>
+          <p:nvPr/>
+        </p:nvSpPr>
+        <p:spPr>
+          <a:xfrm>
+            <a:off x="1141463" y="1183528"/>
+            <a:ext cx="634156" cy="290297"/>
+          </a:xfrm>
+          <a:prstGeom prst="roundRect">
+            <a:avLst>
+              <a:gd name="adj" fmla="val 13097"/>
+            </a:avLst>
+          </a:prstGeom>
+          <a:solidFill>
+            <a:schemeClr val="accent6">
+              <a:lumMod val="20000"/>
+              <a:lumOff val="80000"/>
+            </a:schemeClr>
+          </a:solidFill>
+          <a:ln>
+            <a:noFill/>
+          </a:ln>
+        </p:spPr>
+        <p:style>
+          <a:lnRef idx="2">
+            <a:schemeClr val="accent3">
+              <a:shade val="15000"/>
+            </a:schemeClr>
+          </a:lnRef>
+          <a:fillRef idx="1">
+            <a:schemeClr val="accent3"/>
+          </a:fillRef>
+          <a:effectRef idx="0">
+            <a:schemeClr val="accent3"/>
+          </a:effectRef>
+          <a:fontRef idx="minor">
+            <a:schemeClr val="lt1"/>
+          </a:fontRef>
+        </p:style>
+        <p:txBody>
+          <a:bodyPr rtlCol="0" anchor="ctr"/>
+          <a:lstStyle/>
+          <a:p>
+            <a:pPr algn="ctr"/>
+            <a:endParaRPr lang="ko-KR" altLang="en-US" sz="1778">
+              <a:latin typeface="KoPub돋움체 Medium" panose="02020603020101020101" pitchFamily="18" charset="-127"/>
+              <a:ea typeface="KoPub돋움체 Light" panose="02020603020101020101"/>
+            </a:endParaRPr>
+          </a:p>
+        </p:txBody>
+      </p:sp>
+      <p:sp>
+        <p:nvSpPr>
+          <p:cNvPr id="30" name="TextBox 29">
+            <a:extLst>
+              <a:ext uri="{FF2B5EF4-FFF2-40B4-BE49-F238E27FC236}">
+                <a16:creationId xmlns:a16="http://schemas.microsoft.com/office/drawing/2014/main" id="{3C4779CB-7AE4-4301-8B2E-ADD0772F1C8C}"/>
+              </a:ext>
+            </a:extLst>
+          </p:cNvPr>
+          <p:cNvSpPr txBox="1"/>
+          <p:nvPr/>
+        </p:nvSpPr>
+        <p:spPr>
+          <a:xfrm>
+            <a:off x="1239570" y="1269430"/>
+            <a:ext cx="437941" cy="178510"/>
+          </a:xfrm>
+          <a:prstGeom prst="rect">
+            <a:avLst/>
+          </a:prstGeom>
+          <a:noFill/>
+        </p:spPr>
+        <p:txBody>
+          <a:bodyPr wrap="none" rtlCol="0">
+            <a:spAutoFit/>
+          </a:bodyPr>
+          <a:lstStyle/>
+          <a:p>
+            <a:pPr algn="ctr"/>
+            <a:r>
+              <a:rPr lang="en-US" altLang="ko-KR" sz="560" b="1" dirty="0">
+                <a:latin typeface="KoPub돋움체 Light" panose="02020603020101020101" pitchFamily="18" charset="-127"/>
+                <a:ea typeface="KoPub돋움체 Light" panose="02020603020101020101" pitchFamily="18" charset="-127"/>
+              </a:rPr>
+              <a:t>C-Code</a:t>
+            </a:r>
+          </a:p>
+        </p:txBody>
+      </p:sp>
+      <p:sp>
+        <p:nvSpPr>
+          <p:cNvPr id="33" name="TextBox 32">
+            <a:extLst>
+              <a:ext uri="{FF2B5EF4-FFF2-40B4-BE49-F238E27FC236}">
+                <a16:creationId xmlns:a16="http://schemas.microsoft.com/office/drawing/2014/main" id="{CE2D936A-A45B-43D0-819F-2B99B59D02C1}"/>
+              </a:ext>
+            </a:extLst>
+          </p:cNvPr>
+          <p:cNvSpPr txBox="1"/>
+          <p:nvPr/>
+        </p:nvSpPr>
+        <p:spPr>
+          <a:xfrm>
+            <a:off x="607522" y="1499044"/>
+            <a:ext cx="2016899" cy="221599"/>
+          </a:xfrm>
+          <a:prstGeom prst="rect">
+            <a:avLst/>
+          </a:prstGeom>
+          <a:noFill/>
+        </p:spPr>
+        <p:txBody>
+          <a:bodyPr wrap="none" rtlCol="0">
+            <a:spAutoFit/>
+          </a:bodyPr>
+          <a:lstStyle/>
+          <a:p>
+            <a:pPr algn="ctr"/>
+            <a:r>
+              <a:rPr lang="en-US" altLang="ko-KR" sz="840" b="1" dirty="0">
+                <a:solidFill>
+                  <a:srgbClr val="7030A0"/>
+                </a:solidFill>
+                <a:latin typeface="KoPub돋움체 Light" panose="02020603020101020101" pitchFamily="18" charset="-127"/>
+                <a:ea typeface="KoPub돋움체 Light" panose="02020603020101020101" pitchFamily="18" charset="-127"/>
+              </a:rPr>
+              <a:t>“</a:t>
+            </a:r>
+            <a:r>
+              <a:rPr lang="ko-KR" altLang="en-US" sz="840" b="1" dirty="0">
+                <a:solidFill>
+                  <a:srgbClr val="7030A0"/>
+                </a:solidFill>
+                <a:latin typeface="KoPub돋움체 Light" panose="02020603020101020101" pitchFamily="18" charset="-127"/>
+                <a:ea typeface="KoPub돋움체 Light" panose="02020603020101020101" pitchFamily="18" charset="-127"/>
+              </a:rPr>
+              <a:t>기록은 메신저에서</a:t>
+            </a:r>
+            <a:r>
+              <a:rPr lang="en-US" altLang="ko-KR" sz="840" b="1" dirty="0">
+                <a:solidFill>
+                  <a:srgbClr val="7030A0"/>
+                </a:solidFill>
+                <a:latin typeface="KoPub돋움체 Light" panose="02020603020101020101" pitchFamily="18" charset="-127"/>
+                <a:ea typeface="KoPub돋움체 Light" panose="02020603020101020101" pitchFamily="18" charset="-127"/>
+              </a:rPr>
+              <a:t>, </a:t>
+            </a:r>
+            <a:r>
+              <a:rPr lang="ko-KR" altLang="en-US" sz="840" b="1" dirty="0">
+                <a:solidFill>
+                  <a:srgbClr val="7030A0"/>
+                </a:solidFill>
+                <a:latin typeface="KoPub돋움체 Light" panose="02020603020101020101" pitchFamily="18" charset="-127"/>
+                <a:ea typeface="KoPub돋움체 Light" panose="02020603020101020101" pitchFamily="18" charset="-127"/>
+              </a:rPr>
+              <a:t>정보는 </a:t>
+            </a:r>
+            <a:r>
+              <a:rPr lang="en-US" altLang="ko-KR" sz="840" b="1" dirty="0">
+                <a:solidFill>
+                  <a:srgbClr val="7030A0"/>
+                </a:solidFill>
+                <a:latin typeface="KoPub돋움체 Light" panose="02020603020101020101" pitchFamily="18" charset="-127"/>
+                <a:ea typeface="KoPub돋움체 Light" panose="02020603020101020101" pitchFamily="18" charset="-127"/>
+              </a:rPr>
+              <a:t>QR</a:t>
+            </a:r>
+            <a:r>
+              <a:rPr lang="ko-KR" altLang="en-US" sz="840" b="1" dirty="0">
+                <a:solidFill>
+                  <a:srgbClr val="7030A0"/>
+                </a:solidFill>
+                <a:latin typeface="KoPub돋움체 Light" panose="02020603020101020101" pitchFamily="18" charset="-127"/>
+                <a:ea typeface="KoPub돋움체 Light" panose="02020603020101020101" pitchFamily="18" charset="-127"/>
+              </a:rPr>
+              <a:t>에서</a:t>
+            </a:r>
+            <a:r>
+              <a:rPr lang="en-US" altLang="ko-KR" sz="840" b="1" dirty="0">
+                <a:solidFill>
+                  <a:srgbClr val="7030A0"/>
+                </a:solidFill>
+                <a:latin typeface="KoPub돋움체 Light" panose="02020603020101020101" pitchFamily="18" charset="-127"/>
+                <a:ea typeface="KoPub돋움체 Light" panose="02020603020101020101" pitchFamily="18" charset="-127"/>
+              </a:rPr>
+              <a:t>!”</a:t>
+            </a:r>
+          </a:p>
+        </p:txBody>
+      </p:sp>
+    </p:spTree>
+    <p:extLst>
+      <p:ext uri="{BB962C8B-B14F-4D97-AF65-F5344CB8AC3E}">
+        <p14:creationId xmlns:p14="http://schemas.microsoft.com/office/powerpoint/2010/main" val="1216328542"/>
       </p:ext>
     </p:extLst>
   </p:cSld>

--- a/documents/명함제작/4.  [2026 우리가치(WeValue) QI 활동 프로젝트 명함.pptx
+++ b/documents/명함제작/4.  [2026 우리가치(WeValue) QI 활동 프로젝트 명함.pptx
@@ -5,15 +5,16 @@
     <p:sldMasterId id="2147483870" r:id="rId1"/>
   </p:sldMasterIdLst>
   <p:notesMasterIdLst>
-    <p:notesMasterId r:id="rId8"/>
+    <p:notesMasterId r:id="rId9"/>
   </p:notesMasterIdLst>
   <p:sldIdLst>
-    <p:sldId id="257" r:id="rId2"/>
-    <p:sldId id="297" r:id="rId3"/>
-    <p:sldId id="262" r:id="rId4"/>
-    <p:sldId id="300" r:id="rId5"/>
-    <p:sldId id="306" r:id="rId6"/>
-    <p:sldId id="305" r:id="rId7"/>
+    <p:sldId id="265" r:id="rId2"/>
+    <p:sldId id="308" r:id="rId3"/>
+    <p:sldId id="307" r:id="rId4"/>
+    <p:sldId id="262" r:id="rId5"/>
+    <p:sldId id="300" r:id="rId6"/>
+    <p:sldId id="306" r:id="rId7"/>
+    <p:sldId id="305" r:id="rId8"/>
   </p:sldIdLst>
   <p:sldSz cx="3240088" cy="1800225"/>
   <p:notesSz cx="6858000" cy="9945688"/>
@@ -233,7 +234,7 @@
           <a:p>
             <a:fld id="{F929F65E-AEE7-45C5-814B-4468CAF1E537}" type="datetimeFigureOut">
               <a:rPr lang="ko-KR" altLang="en-US" smtClean="0"/>
-              <a:t>2026-03-11</a:t>
+              <a:t>2026-04-29</a:t>
             </a:fld>
             <a:endParaRPr lang="ko-KR" altLang="en-US"/>
           </a:p>
@@ -631,7 +632,7 @@
           <a:p>
             <a:fld id="{149F34B4-7175-41BD-B98B-2E7021201D7D}" type="datetimeFigureOut">
               <a:rPr lang="ko-KR" altLang="en-US" smtClean="0"/>
-              <a:t>2026-03-11</a:t>
+              <a:t>2026-04-29</a:t>
             </a:fld>
             <a:endParaRPr lang="ko-KR" altLang="en-US"/>
           </a:p>
@@ -801,7 +802,7 @@
           <a:p>
             <a:fld id="{149F34B4-7175-41BD-B98B-2E7021201D7D}" type="datetimeFigureOut">
               <a:rPr lang="ko-KR" altLang="en-US" smtClean="0"/>
-              <a:t>2026-03-11</a:t>
+              <a:t>2026-04-29</a:t>
             </a:fld>
             <a:endParaRPr lang="ko-KR" altLang="en-US"/>
           </a:p>
@@ -981,7 +982,7 @@
           <a:p>
             <a:fld id="{149F34B4-7175-41BD-B98B-2E7021201D7D}" type="datetimeFigureOut">
               <a:rPr lang="ko-KR" altLang="en-US" smtClean="0"/>
-              <a:t>2026-03-11</a:t>
+              <a:t>2026-04-29</a:t>
             </a:fld>
             <a:endParaRPr lang="ko-KR" altLang="en-US"/>
           </a:p>
@@ -1890,7 +1891,7 @@
           <a:p>
             <a:fld id="{149F34B4-7175-41BD-B98B-2E7021201D7D}" type="datetimeFigureOut">
               <a:rPr lang="ko-KR" altLang="en-US" smtClean="0"/>
-              <a:t>2026-03-11</a:t>
+              <a:t>2026-04-29</a:t>
             </a:fld>
             <a:endParaRPr lang="ko-KR" altLang="en-US"/>
           </a:p>
@@ -2136,7 +2137,7 @@
           <a:p>
             <a:fld id="{149F34B4-7175-41BD-B98B-2E7021201D7D}" type="datetimeFigureOut">
               <a:rPr lang="ko-KR" altLang="en-US" smtClean="0"/>
-              <a:t>2026-03-11</a:t>
+              <a:t>2026-04-29</a:t>
             </a:fld>
             <a:endParaRPr lang="ko-KR" altLang="en-US"/>
           </a:p>
@@ -2368,7 +2369,7 @@
           <a:p>
             <a:fld id="{149F34B4-7175-41BD-B98B-2E7021201D7D}" type="datetimeFigureOut">
               <a:rPr lang="ko-KR" altLang="en-US" smtClean="0"/>
-              <a:t>2026-03-11</a:t>
+              <a:t>2026-04-29</a:t>
             </a:fld>
             <a:endParaRPr lang="ko-KR" altLang="en-US"/>
           </a:p>
@@ -2735,7 +2736,7 @@
           <a:p>
             <a:fld id="{149F34B4-7175-41BD-B98B-2E7021201D7D}" type="datetimeFigureOut">
               <a:rPr lang="ko-KR" altLang="en-US" smtClean="0"/>
-              <a:t>2026-03-11</a:t>
+              <a:t>2026-04-29</a:t>
             </a:fld>
             <a:endParaRPr lang="ko-KR" altLang="en-US"/>
           </a:p>
@@ -2853,7 +2854,7 @@
           <a:p>
             <a:fld id="{149F34B4-7175-41BD-B98B-2E7021201D7D}" type="datetimeFigureOut">
               <a:rPr lang="ko-KR" altLang="en-US" smtClean="0"/>
-              <a:t>2026-03-11</a:t>
+              <a:t>2026-04-29</a:t>
             </a:fld>
             <a:endParaRPr lang="ko-KR" altLang="en-US"/>
           </a:p>
@@ -2948,7 +2949,7 @@
           <a:p>
             <a:fld id="{149F34B4-7175-41BD-B98B-2E7021201D7D}" type="datetimeFigureOut">
               <a:rPr lang="ko-KR" altLang="en-US" smtClean="0"/>
-              <a:t>2026-03-11</a:t>
+              <a:t>2026-04-29</a:t>
             </a:fld>
             <a:endParaRPr lang="ko-KR" altLang="en-US"/>
           </a:p>
@@ -3225,7 +3226,7 @@
           <a:p>
             <a:fld id="{149F34B4-7175-41BD-B98B-2E7021201D7D}" type="datetimeFigureOut">
               <a:rPr lang="ko-KR" altLang="en-US" smtClean="0"/>
-              <a:t>2026-03-11</a:t>
+              <a:t>2026-04-29</a:t>
             </a:fld>
             <a:endParaRPr lang="ko-KR" altLang="en-US"/>
           </a:p>
@@ -3482,7 +3483,7 @@
           <a:p>
             <a:fld id="{149F34B4-7175-41BD-B98B-2E7021201D7D}" type="datetimeFigureOut">
               <a:rPr lang="ko-KR" altLang="en-US" smtClean="0"/>
-              <a:t>2026-03-11</a:t>
+              <a:t>2026-04-29</a:t>
             </a:fld>
             <a:endParaRPr lang="ko-KR" altLang="en-US"/>
           </a:p>
@@ -3695,7 +3696,7 @@
           <a:p>
             <a:fld id="{149F34B4-7175-41BD-B98B-2E7021201D7D}" type="datetimeFigureOut">
               <a:rPr lang="ko-KR" altLang="en-US" smtClean="0"/>
-              <a:t>2026-03-11</a:t>
+              <a:t>2026-04-29</a:t>
             </a:fld>
             <a:endParaRPr lang="ko-KR" altLang="en-US"/>
           </a:p>
@@ -4121,226 +4122,6 @@
       </p:grpSpPr>
       <p:sp>
         <p:nvSpPr>
-          <p:cNvPr id="28" name="사각형: 둥근 모서리 27">
-            <a:extLst>
-              <a:ext uri="{FF2B5EF4-FFF2-40B4-BE49-F238E27FC236}">
-                <a16:creationId xmlns:a16="http://schemas.microsoft.com/office/drawing/2014/main" id="{F4CDCC63-1B49-E29D-2639-15C72FBF93D9}"/>
-              </a:ext>
-            </a:extLst>
-          </p:cNvPr>
-          <p:cNvSpPr/>
-          <p:nvPr/>
-        </p:nvSpPr>
-        <p:spPr>
-          <a:xfrm>
-            <a:off x="1616893" y="1043683"/>
-            <a:ext cx="1264364" cy="230832"/>
-          </a:xfrm>
-          <a:prstGeom prst="roundRect">
-            <a:avLst/>
-          </a:prstGeom>
-          <a:solidFill>
-            <a:schemeClr val="bg2"/>
-          </a:solidFill>
-          <a:ln>
-            <a:noFill/>
-          </a:ln>
-        </p:spPr>
-        <p:style>
-          <a:lnRef idx="2">
-            <a:schemeClr val="accent3">
-              <a:shade val="15000"/>
-            </a:schemeClr>
-          </a:lnRef>
-          <a:fillRef idx="1">
-            <a:schemeClr val="accent3"/>
-          </a:fillRef>
-          <a:effectRef idx="0">
-            <a:schemeClr val="accent3"/>
-          </a:effectRef>
-          <a:fontRef idx="minor">
-            <a:schemeClr val="lt1"/>
-          </a:fontRef>
-        </p:style>
-        <p:txBody>
-          <a:bodyPr rtlCol="0" anchor="ctr"/>
-          <a:lstStyle/>
-          <a:p>
-            <a:pPr algn="ctr"/>
-            <a:endParaRPr lang="ko-KR" altLang="en-US">
-              <a:latin typeface="KoPub돋움체 Light" panose="02020603020101020101" pitchFamily="18" charset="-127"/>
-              <a:ea typeface="KoPub돋움체 Light" panose="02020603020101020101" pitchFamily="18" charset="-127"/>
-            </a:endParaRPr>
-          </a:p>
-        </p:txBody>
-      </p:sp>
-      <p:sp>
-        <p:nvSpPr>
-          <p:cNvPr id="29" name="사각형: 둥근 모서리 28">
-            <a:extLst>
-              <a:ext uri="{FF2B5EF4-FFF2-40B4-BE49-F238E27FC236}">
-                <a16:creationId xmlns:a16="http://schemas.microsoft.com/office/drawing/2014/main" id="{4C331443-AF77-EA7C-A68D-1AF2C1938311}"/>
-              </a:ext>
-            </a:extLst>
-          </p:cNvPr>
-          <p:cNvSpPr/>
-          <p:nvPr/>
-        </p:nvSpPr>
-        <p:spPr>
-          <a:xfrm>
-            <a:off x="254362" y="1307925"/>
-            <a:ext cx="1264364" cy="230832"/>
-          </a:xfrm>
-          <a:prstGeom prst="roundRect">
-            <a:avLst/>
-          </a:prstGeom>
-          <a:solidFill>
-            <a:schemeClr val="bg2"/>
-          </a:solidFill>
-          <a:ln>
-            <a:noFill/>
-          </a:ln>
-        </p:spPr>
-        <p:style>
-          <a:lnRef idx="2">
-            <a:schemeClr val="accent3">
-              <a:shade val="15000"/>
-            </a:schemeClr>
-          </a:lnRef>
-          <a:fillRef idx="1">
-            <a:schemeClr val="accent3"/>
-          </a:fillRef>
-          <a:effectRef idx="0">
-            <a:schemeClr val="accent3"/>
-          </a:effectRef>
-          <a:fontRef idx="minor">
-            <a:schemeClr val="lt1"/>
-          </a:fontRef>
-        </p:style>
-        <p:txBody>
-          <a:bodyPr rtlCol="0" anchor="ctr"/>
-          <a:lstStyle/>
-          <a:p>
-            <a:pPr algn="ctr"/>
-            <a:endParaRPr lang="ko-KR" altLang="en-US">
-              <a:latin typeface="KoPub돋움체 Light" panose="02020603020101020101" pitchFamily="18" charset="-127"/>
-              <a:ea typeface="KoPub돋움체 Light" panose="02020603020101020101" pitchFamily="18" charset="-127"/>
-            </a:endParaRPr>
-          </a:p>
-        </p:txBody>
-      </p:sp>
-      <p:sp>
-        <p:nvSpPr>
-          <p:cNvPr id="30" name="사각형: 둥근 모서리 29">
-            <a:extLst>
-              <a:ext uri="{FF2B5EF4-FFF2-40B4-BE49-F238E27FC236}">
-                <a16:creationId xmlns:a16="http://schemas.microsoft.com/office/drawing/2014/main" id="{E9D0B6FB-F245-5CA5-01A2-7ECE70059B31}"/>
-              </a:ext>
-            </a:extLst>
-          </p:cNvPr>
-          <p:cNvSpPr/>
-          <p:nvPr/>
-        </p:nvSpPr>
-        <p:spPr>
-          <a:xfrm>
-            <a:off x="1616893" y="1307925"/>
-            <a:ext cx="1264364" cy="230832"/>
-          </a:xfrm>
-          <a:prstGeom prst="roundRect">
-            <a:avLst/>
-          </a:prstGeom>
-          <a:solidFill>
-            <a:schemeClr val="bg2"/>
-          </a:solidFill>
-          <a:ln>
-            <a:noFill/>
-          </a:ln>
-        </p:spPr>
-        <p:style>
-          <a:lnRef idx="2">
-            <a:schemeClr val="accent3">
-              <a:shade val="15000"/>
-            </a:schemeClr>
-          </a:lnRef>
-          <a:fillRef idx="1">
-            <a:schemeClr val="accent3"/>
-          </a:fillRef>
-          <a:effectRef idx="0">
-            <a:schemeClr val="accent3"/>
-          </a:effectRef>
-          <a:fontRef idx="minor">
-            <a:schemeClr val="lt1"/>
-          </a:fontRef>
-        </p:style>
-        <p:txBody>
-          <a:bodyPr rtlCol="0" anchor="ctr"/>
-          <a:lstStyle/>
-          <a:p>
-            <a:pPr algn="ctr"/>
-            <a:endParaRPr lang="ko-KR" altLang="en-US">
-              <a:latin typeface="KoPub돋움체 Light" panose="02020603020101020101" pitchFamily="18" charset="-127"/>
-              <a:ea typeface="KoPub돋움체 Light" panose="02020603020101020101" pitchFamily="18" charset="-127"/>
-            </a:endParaRPr>
-          </a:p>
-        </p:txBody>
-      </p:sp>
-      <p:sp>
-        <p:nvSpPr>
-          <p:cNvPr id="21" name="사각형: 둥근 모서리 20">
-            <a:extLst>
-              <a:ext uri="{FF2B5EF4-FFF2-40B4-BE49-F238E27FC236}">
-                <a16:creationId xmlns:a16="http://schemas.microsoft.com/office/drawing/2014/main" id="{2D25819D-DF75-2963-B40C-E9AD78F5AC89}"/>
-              </a:ext>
-            </a:extLst>
-          </p:cNvPr>
-          <p:cNvSpPr/>
-          <p:nvPr/>
-        </p:nvSpPr>
-        <p:spPr>
-          <a:xfrm>
-            <a:off x="254362" y="1043683"/>
-            <a:ext cx="1264364" cy="230832"/>
-          </a:xfrm>
-          <a:prstGeom prst="roundRect">
-            <a:avLst/>
-          </a:prstGeom>
-          <a:solidFill>
-            <a:schemeClr val="bg2"/>
-          </a:solidFill>
-          <a:ln>
-            <a:noFill/>
-          </a:ln>
-        </p:spPr>
-        <p:style>
-          <a:lnRef idx="2">
-            <a:schemeClr val="accent3">
-              <a:shade val="15000"/>
-            </a:schemeClr>
-          </a:lnRef>
-          <a:fillRef idx="1">
-            <a:schemeClr val="accent3"/>
-          </a:fillRef>
-          <a:effectRef idx="0">
-            <a:schemeClr val="accent3"/>
-          </a:effectRef>
-          <a:fontRef idx="minor">
-            <a:schemeClr val="lt1"/>
-          </a:fontRef>
-        </p:style>
-        <p:txBody>
-          <a:bodyPr rtlCol="0" anchor="ctr"/>
-          <a:lstStyle/>
-          <a:p>
-            <a:pPr algn="ctr"/>
-            <a:endParaRPr lang="ko-KR" altLang="en-US">
-              <a:latin typeface="KoPub돋움체 Light" panose="02020603020101020101" pitchFamily="18" charset="-127"/>
-              <a:ea typeface="KoPub돋움체 Light" panose="02020603020101020101" pitchFamily="18" charset="-127"/>
-            </a:endParaRPr>
-          </a:p>
-        </p:txBody>
-      </p:sp>
-      <p:sp>
-        <p:nvSpPr>
           <p:cNvPr id="3" name="TextBox 2">
             <a:extLst>
               <a:ext uri="{FF2B5EF4-FFF2-40B4-BE49-F238E27FC236}">
@@ -4353,8 +4134,8 @@
         </p:nvSpPr>
         <p:spPr>
           <a:xfrm>
-            <a:off x="61773" y="54245"/>
-            <a:ext cx="1180381" cy="169277"/>
+            <a:off x="43499" y="63223"/>
+            <a:ext cx="1403509" cy="184666"/>
           </a:xfrm>
           <a:prstGeom prst="rect">
             <a:avLst/>
@@ -4367,512 +4148,27 @@
           </a:bodyPr>
           <a:lstStyle/>
           <a:p>
-            <a:pPr algn="ctr"/>
-            <a:r>
-              <a:rPr lang="ko-KR" altLang="en-US" sz="500" spc="-11" dirty="0">
-                <a:latin typeface="KoPub돋움체 Light" panose="02020603020101020101" pitchFamily="18" charset="-127"/>
-                <a:ea typeface="KoPub돋움체 Light" panose="02020603020101020101" pitchFamily="18" charset="-127"/>
+            <a:r>
+              <a:rPr lang="ko-KR" altLang="en-US" sz="600" b="1" spc="-11" dirty="0">
+                <a:latin typeface="KoPub돋움체 Bold" panose="00000800000000000000" pitchFamily="2" charset="-127"/>
+                <a:ea typeface="KoPub돋움체 Bold" panose="00000800000000000000" pitchFamily="2" charset="-127"/>
               </a:rPr>
               <a:t>순천향대학교 천안병원 </a:t>
             </a:r>
             <a:r>
-              <a:rPr lang="en-US" altLang="ko-KR" sz="500" spc="-11" dirty="0">
-                <a:latin typeface="KoPub돋움체 Light" panose="02020603020101020101" pitchFamily="18" charset="-127"/>
-                <a:ea typeface="KoPub돋움체 Light" panose="02020603020101020101" pitchFamily="18" charset="-127"/>
+              <a:rPr lang="en-US" altLang="ko-KR" sz="600" b="1" spc="-11" dirty="0">
+                <a:latin typeface="KoPub돋움체 Bold" panose="00000800000000000000" pitchFamily="2" charset="-127"/>
+                <a:ea typeface="KoPub돋움체 Bold" panose="00000800000000000000" pitchFamily="2" charset="-127"/>
               </a:rPr>
               <a:t>| </a:t>
             </a:r>
             <a:r>
-              <a:rPr lang="ko-KR" altLang="en-US" sz="500" spc="-11" dirty="0">
-                <a:latin typeface="KoPub돋움체 Light" panose="02020603020101020101" pitchFamily="18" charset="-127"/>
-                <a:ea typeface="KoPub돋움체 Light" panose="02020603020101020101" pitchFamily="18" charset="-127"/>
+              <a:rPr lang="ko-KR" altLang="en-US" sz="600" b="1" spc="-11" dirty="0">
+                <a:latin typeface="KoPub돋움체 Bold" panose="00000800000000000000" pitchFamily="2" charset="-127"/>
+                <a:ea typeface="KoPub돋움체 Bold" panose="00000800000000000000" pitchFamily="2" charset="-127"/>
               </a:rPr>
               <a:t>진료지원간호팀 </a:t>
             </a:r>
-          </a:p>
-        </p:txBody>
-      </p:sp>
-      <p:grpSp>
-        <p:nvGrpSpPr>
-          <p:cNvPr id="20" name="그룹 19">
-            <a:extLst>
-              <a:ext uri="{FF2B5EF4-FFF2-40B4-BE49-F238E27FC236}">
-                <a16:creationId xmlns:a16="http://schemas.microsoft.com/office/drawing/2014/main" id="{FFD471BF-3E8B-E294-1EF7-7949D4D05762}"/>
-              </a:ext>
-            </a:extLst>
-          </p:cNvPr>
-          <p:cNvGrpSpPr/>
-          <p:nvPr/>
-        </p:nvGrpSpPr>
-        <p:grpSpPr>
-          <a:xfrm>
-            <a:off x="711096" y="331471"/>
-            <a:ext cx="2337499" cy="674473"/>
-            <a:chOff x="422852" y="312900"/>
-            <a:chExt cx="2337499" cy="674473"/>
-          </a:xfrm>
-        </p:grpSpPr>
-        <p:sp>
-          <p:nvSpPr>
-            <p:cNvPr id="4" name="TextBox 3">
-              <a:extLst>
-                <a:ext uri="{FF2B5EF4-FFF2-40B4-BE49-F238E27FC236}">
-                  <a16:creationId xmlns:a16="http://schemas.microsoft.com/office/drawing/2014/main" id="{1F0C02A7-D766-DD14-548E-2AE7955534F4}"/>
-                </a:ext>
-              </a:extLst>
-            </p:cNvPr>
-            <p:cNvSpPr txBox="1"/>
-            <p:nvPr/>
-          </p:nvSpPr>
-          <p:spPr>
-            <a:xfrm>
-              <a:off x="696163" y="312900"/>
-              <a:ext cx="1790875" cy="338554"/>
-            </a:xfrm>
-            <a:prstGeom prst="rect">
-              <a:avLst/>
-            </a:prstGeom>
-            <a:noFill/>
-          </p:spPr>
-          <p:txBody>
-            <a:bodyPr wrap="none">
-              <a:spAutoFit/>
-            </a:bodyPr>
-            <a:lstStyle/>
-            <a:p>
-              <a:pPr algn="ctr"/>
-              <a:r>
-                <a:rPr lang="ko-KR" altLang="en-US" sz="1600" dirty="0" err="1">
-                  <a:solidFill>
-                    <a:schemeClr val="accent1">
-                      <a:lumMod val="50000"/>
-                    </a:schemeClr>
-                  </a:solidFill>
-                  <a:latin typeface="KoPub돋움체 Bold" panose="02020603020101020101" pitchFamily="18" charset="-127"/>
-                  <a:ea typeface="KoPub돋움체 Bold" panose="02020603020101020101" pitchFamily="18" charset="-127"/>
-                </a:rPr>
-                <a:t>우리가치</a:t>
-              </a:r>
-              <a:r>
-                <a:rPr lang="ko-KR" altLang="en-US" sz="1600" dirty="0">
-                  <a:solidFill>
-                    <a:schemeClr val="accent1">
-                      <a:lumMod val="50000"/>
-                    </a:schemeClr>
-                  </a:solidFill>
-                  <a:latin typeface="KoPub돋움체 Bold" panose="02020603020101020101" pitchFamily="18" charset="-127"/>
-                  <a:ea typeface="KoPub돋움체 Bold" panose="02020603020101020101" pitchFamily="18" charset="-127"/>
-                </a:rPr>
-                <a:t> </a:t>
-              </a:r>
-              <a:r>
-                <a:rPr lang="en-US" altLang="ko-KR" sz="1600" dirty="0" err="1">
-                  <a:solidFill>
-                    <a:schemeClr val="accent1">
-                      <a:lumMod val="50000"/>
-                    </a:schemeClr>
-                  </a:solidFill>
-                  <a:latin typeface="KoPub돋움체 Bold" panose="02020603020101020101" pitchFamily="18" charset="-127"/>
-                  <a:ea typeface="KoPub돋움체 Bold" panose="02020603020101020101" pitchFamily="18" charset="-127"/>
-                </a:rPr>
-                <a:t>WeValue</a:t>
-              </a:r>
-              <a:endParaRPr lang="en-US" altLang="ko-KR" sz="1600" dirty="0">
-                <a:solidFill>
-                  <a:schemeClr val="accent1">
-                    <a:lumMod val="50000"/>
-                  </a:schemeClr>
-                </a:solidFill>
-                <a:latin typeface="KoPub돋움체 Bold" panose="02020603020101020101" pitchFamily="18" charset="-127"/>
-                <a:ea typeface="KoPub돋움체 Bold" panose="02020603020101020101" pitchFamily="18" charset="-127"/>
-              </a:endParaRPr>
-            </a:p>
-          </p:txBody>
-        </p:sp>
-        <p:sp>
-          <p:nvSpPr>
-            <p:cNvPr id="6" name="TextBox 5">
-              <a:extLst>
-                <a:ext uri="{FF2B5EF4-FFF2-40B4-BE49-F238E27FC236}">
-                  <a16:creationId xmlns:a16="http://schemas.microsoft.com/office/drawing/2014/main" id="{25F3C248-44C4-9D7A-C464-62D68C9890DC}"/>
-                </a:ext>
-              </a:extLst>
-            </p:cNvPr>
-            <p:cNvSpPr txBox="1"/>
-            <p:nvPr/>
-          </p:nvSpPr>
-          <p:spPr>
-            <a:xfrm>
-              <a:off x="422852" y="587263"/>
-              <a:ext cx="2337499" cy="400110"/>
-            </a:xfrm>
-            <a:prstGeom prst="rect">
-              <a:avLst/>
-            </a:prstGeom>
-            <a:noFill/>
-          </p:spPr>
-          <p:txBody>
-            <a:bodyPr wrap="none">
-              <a:spAutoFit/>
-            </a:bodyPr>
-            <a:lstStyle/>
-            <a:p>
-              <a:pPr algn="ctr"/>
-              <a:r>
-                <a:rPr lang="en-US" altLang="ko-KR" sz="1000" b="1" dirty="0">
-                  <a:latin typeface="KoPub돋움체 Light" panose="02020603020101020101" pitchFamily="18" charset="-127"/>
-                  <a:ea typeface="KoPub돋움체 Light" panose="02020603020101020101" pitchFamily="18" charset="-127"/>
-                </a:rPr>
-                <a:t>[</a:t>
-              </a:r>
-              <a:r>
-                <a:rPr lang="ko-KR" altLang="en-US" sz="1000" b="1" dirty="0">
-                  <a:latin typeface="KoPub돋움체 Light" panose="02020603020101020101" pitchFamily="18" charset="-127"/>
-                  <a:ea typeface="KoPub돋움체 Light" panose="02020603020101020101" pitchFamily="18" charset="-127"/>
-                </a:rPr>
-                <a:t>우리가 가치를 만드는 공간</a:t>
-              </a:r>
-              <a:r>
-                <a:rPr lang="en-US" altLang="ko-KR" sz="1000" b="1" dirty="0">
-                  <a:latin typeface="KoPub돋움체 Light" panose="02020603020101020101" pitchFamily="18" charset="-127"/>
-                  <a:ea typeface="KoPub돋움체 Light" panose="02020603020101020101" pitchFamily="18" charset="-127"/>
-                </a:rPr>
-                <a:t>, </a:t>
-              </a:r>
-              <a:r>
-                <a:rPr lang="ko-KR" altLang="en-US" sz="1000" b="1" dirty="0" err="1">
-                  <a:latin typeface="KoPub돋움체 Light" panose="02020603020101020101" pitchFamily="18" charset="-127"/>
-                  <a:ea typeface="KoPub돋움체 Light" panose="02020603020101020101" pitchFamily="18" charset="-127"/>
-                </a:rPr>
-                <a:t>우리가치</a:t>
-              </a:r>
-              <a:r>
-                <a:rPr lang="ko-KR" altLang="en-US" sz="1000" b="1" dirty="0">
-                  <a:latin typeface="KoPub돋움체 Light" panose="02020603020101020101" pitchFamily="18" charset="-127"/>
-                  <a:ea typeface="KoPub돋움체 Light" panose="02020603020101020101" pitchFamily="18" charset="-127"/>
-                </a:rPr>
-                <a:t> 허브</a:t>
-              </a:r>
-              <a:r>
-                <a:rPr lang="en-US" altLang="ko-KR" sz="1000" b="1" dirty="0">
-                  <a:latin typeface="KoPub돋움체 Light" panose="02020603020101020101" pitchFamily="18" charset="-127"/>
-                  <a:ea typeface="KoPub돋움체 Light" panose="02020603020101020101" pitchFamily="18" charset="-127"/>
-                </a:rPr>
-                <a:t>]</a:t>
-              </a:r>
-            </a:p>
-            <a:p>
-              <a:pPr algn="ctr"/>
-              <a:r>
-                <a:rPr lang="ko-KR" altLang="en-US" sz="1000" dirty="0"/>
-                <a:t>“</a:t>
-              </a:r>
-              <a:r>
-                <a:rPr lang="en-US" altLang="ko-KR" sz="800" dirty="0"/>
-                <a:t>QR </a:t>
-              </a:r>
-              <a:r>
-                <a:rPr lang="ko-KR" altLang="en-US" sz="800" dirty="0"/>
-                <a:t>하나로 기준</a:t>
-              </a:r>
-              <a:r>
-                <a:rPr lang="en-US" altLang="ko-KR" sz="800" dirty="0"/>
-                <a:t>·</a:t>
-              </a:r>
-              <a:r>
-                <a:rPr lang="ko-KR" altLang="en-US" sz="800" dirty="0"/>
-                <a:t>교육</a:t>
-              </a:r>
-              <a:r>
-                <a:rPr lang="en-US" altLang="ko-KR" sz="800" dirty="0"/>
-                <a:t>·</a:t>
-              </a:r>
-              <a:r>
-                <a:rPr lang="ko-KR" altLang="en-US" sz="800" dirty="0"/>
-                <a:t>제안</a:t>
-              </a:r>
-              <a:r>
-                <a:rPr lang="en-US" altLang="ko-KR" sz="800" dirty="0"/>
-                <a:t>·</a:t>
-              </a:r>
-              <a:r>
-                <a:rPr lang="ko-KR" altLang="en-US" sz="800" dirty="0"/>
-                <a:t>지표를 한 번에</a:t>
-              </a:r>
-              <a:r>
-                <a:rPr lang="en-US" altLang="ko-KR" sz="800" dirty="0"/>
-                <a:t>.”</a:t>
-              </a:r>
-              <a:endParaRPr lang="en-US" altLang="ko-KR" sz="800" b="1" dirty="0">
-                <a:solidFill>
-                  <a:schemeClr val="accent1">
-                    <a:lumMod val="50000"/>
-                  </a:schemeClr>
-                </a:solidFill>
-                <a:latin typeface="KoPub돋움체 Light" panose="02020603020101020101" pitchFamily="18" charset="-127"/>
-                <a:ea typeface="KoPub돋움체 Light" panose="02020603020101020101" pitchFamily="18" charset="-127"/>
-              </a:endParaRPr>
-            </a:p>
-          </p:txBody>
-        </p:sp>
-      </p:grpSp>
-      <p:sp>
-        <p:nvSpPr>
-          <p:cNvPr id="7" name="TextBox 6">
-            <a:extLst>
-              <a:ext uri="{FF2B5EF4-FFF2-40B4-BE49-F238E27FC236}">
-                <a16:creationId xmlns:a16="http://schemas.microsoft.com/office/drawing/2014/main" id="{6DCC158E-675F-C121-F60E-F44282305A18}"/>
-              </a:ext>
-            </a:extLst>
-          </p:cNvPr>
-          <p:cNvSpPr txBox="1"/>
-          <p:nvPr/>
-        </p:nvSpPr>
-        <p:spPr>
-          <a:xfrm>
-            <a:off x="318921" y="1074461"/>
-            <a:ext cx="1135247" cy="200055"/>
-          </a:xfrm>
-          <a:prstGeom prst="rect">
-            <a:avLst/>
-          </a:prstGeom>
-          <a:noFill/>
-        </p:spPr>
-        <p:txBody>
-          <a:bodyPr wrap="none">
-            <a:spAutoFit/>
-          </a:bodyPr>
-          <a:lstStyle/>
-          <a:p>
-            <a:pPr algn="ctr"/>
-            <a:r>
-              <a:rPr lang="ko-KR" altLang="en-US" sz="700" b="1" dirty="0">
-                <a:solidFill>
-                  <a:schemeClr val="tx2">
-                    <a:lumMod val="50000"/>
-                  </a:schemeClr>
-                </a:solidFill>
-                <a:latin typeface="KoPub돋움체 Light" panose="02020603020101020101" pitchFamily="18" charset="-127"/>
-                <a:ea typeface="KoPub돋움체 Light" panose="02020603020101020101" pitchFamily="18" charset="-127"/>
-              </a:rPr>
-              <a:t>소통의 광장</a:t>
-            </a:r>
-            <a:r>
-              <a:rPr lang="en-US" altLang="ko-KR" sz="700" b="1" dirty="0">
-                <a:solidFill>
-                  <a:schemeClr val="tx2">
-                    <a:lumMod val="50000"/>
-                  </a:schemeClr>
-                </a:solidFill>
-                <a:latin typeface="KoPub돋움체 Light" panose="02020603020101020101" pitchFamily="18" charset="-127"/>
-                <a:ea typeface="KoPub돋움체 Light" panose="02020603020101020101" pitchFamily="18" charset="-127"/>
-              </a:rPr>
-              <a:t> (Community)</a:t>
-            </a:r>
-            <a:endParaRPr lang="en-US" altLang="ko-KR" sz="600" dirty="0">
-              <a:solidFill>
-                <a:schemeClr val="tx2">
-                  <a:lumMod val="50000"/>
-                </a:schemeClr>
-              </a:solidFill>
-              <a:latin typeface="KoPub돋움체 Light" panose="02020603020101020101" pitchFamily="18" charset="-127"/>
-              <a:ea typeface="KoPub돋움체 Light" panose="02020603020101020101" pitchFamily="18" charset="-127"/>
-            </a:endParaRPr>
-          </a:p>
-        </p:txBody>
-      </p:sp>
-      <p:sp>
-        <p:nvSpPr>
-          <p:cNvPr id="8" name="TextBox 7">
-            <a:extLst>
-              <a:ext uri="{FF2B5EF4-FFF2-40B4-BE49-F238E27FC236}">
-                <a16:creationId xmlns:a16="http://schemas.microsoft.com/office/drawing/2014/main" id="{1D2DD8AC-667F-42B8-5265-B6ED7A4CC558}"/>
-              </a:ext>
-            </a:extLst>
-          </p:cNvPr>
-          <p:cNvSpPr txBox="1"/>
-          <p:nvPr/>
-        </p:nvSpPr>
-        <p:spPr>
-          <a:xfrm>
-            <a:off x="1699886" y="1074461"/>
-            <a:ext cx="1098379" cy="200055"/>
-          </a:xfrm>
-          <a:prstGeom prst="rect">
-            <a:avLst/>
-          </a:prstGeom>
-          <a:noFill/>
-        </p:spPr>
-        <p:txBody>
-          <a:bodyPr wrap="none">
-            <a:spAutoFit/>
-          </a:bodyPr>
-          <a:lstStyle/>
-          <a:p>
-            <a:pPr algn="ctr"/>
-            <a:r>
-              <a:rPr lang="ko-KR" altLang="en-US" sz="700" b="1" dirty="0">
-                <a:solidFill>
-                  <a:schemeClr val="tx2">
-                    <a:lumMod val="50000"/>
-                  </a:schemeClr>
-                </a:solidFill>
-                <a:latin typeface="KoPub돋움체 Light" panose="02020603020101020101" pitchFamily="18" charset="-127"/>
-                <a:ea typeface="KoPub돋움체 Light" panose="02020603020101020101" pitchFamily="18" charset="-127"/>
-              </a:rPr>
-              <a:t>업무의 기준  </a:t>
-            </a:r>
-            <a:r>
-              <a:rPr lang="en-US" altLang="ko-KR" sz="700" b="1" dirty="0">
-                <a:solidFill>
-                  <a:schemeClr val="tx2">
-                    <a:lumMod val="50000"/>
-                  </a:schemeClr>
-                </a:solidFill>
-                <a:latin typeface="KoPub돋움체 Light" panose="02020603020101020101" pitchFamily="18" charset="-127"/>
-                <a:ea typeface="KoPub돋움체 Light" panose="02020603020101020101" pitchFamily="18" charset="-127"/>
-              </a:rPr>
-              <a:t>(Standards)</a:t>
-            </a:r>
-            <a:endParaRPr lang="en-US" altLang="ko-KR" sz="600" dirty="0">
-              <a:solidFill>
-                <a:schemeClr val="tx2">
-                  <a:lumMod val="50000"/>
-                </a:schemeClr>
-              </a:solidFill>
-              <a:latin typeface="KoPub돋움체 Light" panose="02020603020101020101" pitchFamily="18" charset="-127"/>
-              <a:ea typeface="KoPub돋움체 Light" panose="02020603020101020101" pitchFamily="18" charset="-127"/>
-            </a:endParaRPr>
-          </a:p>
-        </p:txBody>
-      </p:sp>
-      <p:sp>
-        <p:nvSpPr>
-          <p:cNvPr id="9" name="TextBox 8">
-            <a:extLst>
-              <a:ext uri="{FF2B5EF4-FFF2-40B4-BE49-F238E27FC236}">
-                <a16:creationId xmlns:a16="http://schemas.microsoft.com/office/drawing/2014/main" id="{96577137-5AAD-FF43-5955-A6188CF122CB}"/>
-              </a:ext>
-            </a:extLst>
-          </p:cNvPr>
-          <p:cNvSpPr txBox="1"/>
-          <p:nvPr/>
-        </p:nvSpPr>
-        <p:spPr>
-          <a:xfrm>
-            <a:off x="353385" y="1338703"/>
-            <a:ext cx="1066319" cy="200055"/>
-          </a:xfrm>
-          <a:prstGeom prst="rect">
-            <a:avLst/>
-          </a:prstGeom>
-          <a:noFill/>
-        </p:spPr>
-        <p:txBody>
-          <a:bodyPr wrap="none">
-            <a:spAutoFit/>
-          </a:bodyPr>
-          <a:lstStyle/>
-          <a:p>
-            <a:pPr algn="ctr"/>
-            <a:r>
-              <a:rPr lang="ko-KR" altLang="en-US" sz="700" b="1" dirty="0">
-                <a:solidFill>
-                  <a:schemeClr val="tx2">
-                    <a:lumMod val="50000"/>
-                  </a:schemeClr>
-                </a:solidFill>
-                <a:latin typeface="KoPub돋움체 Light" panose="02020603020101020101" pitchFamily="18" charset="-127"/>
-                <a:ea typeface="KoPub돋움체 Light" panose="02020603020101020101" pitchFamily="18" charset="-127"/>
-              </a:rPr>
-              <a:t>배움의 창구 </a:t>
-            </a:r>
-            <a:r>
-              <a:rPr lang="en-US" altLang="ko-KR" sz="700" b="1" dirty="0">
-                <a:solidFill>
-                  <a:schemeClr val="tx2">
-                    <a:lumMod val="50000"/>
-                  </a:schemeClr>
-                </a:solidFill>
-                <a:latin typeface="KoPub돋움체 Light" panose="02020603020101020101" pitchFamily="18" charset="-127"/>
-                <a:ea typeface="KoPub돋움체 Light" panose="02020603020101020101" pitchFamily="18" charset="-127"/>
-              </a:rPr>
-              <a:t>(Education)</a:t>
-            </a:r>
-            <a:endParaRPr lang="ko-KR" altLang="en-US" sz="600" dirty="0">
-              <a:solidFill>
-                <a:schemeClr val="tx2">
-                  <a:lumMod val="50000"/>
-                </a:schemeClr>
-              </a:solidFill>
-              <a:latin typeface="KoPub돋움체 Light" panose="02020603020101020101" pitchFamily="18" charset="-127"/>
-              <a:ea typeface="KoPub돋움체 Light" panose="02020603020101020101" pitchFamily="18" charset="-127"/>
-            </a:endParaRPr>
-          </a:p>
-        </p:txBody>
-      </p:sp>
-      <p:sp>
-        <p:nvSpPr>
-          <p:cNvPr id="10" name="TextBox 9">
-            <a:extLst>
-              <a:ext uri="{FF2B5EF4-FFF2-40B4-BE49-F238E27FC236}">
-                <a16:creationId xmlns:a16="http://schemas.microsoft.com/office/drawing/2014/main" id="{E44756B4-A4F7-10F9-54F6-FD186916090A}"/>
-              </a:ext>
-            </a:extLst>
-          </p:cNvPr>
-          <p:cNvSpPr txBox="1"/>
-          <p:nvPr/>
-        </p:nvSpPr>
-        <p:spPr>
-          <a:xfrm>
-            <a:off x="1686261" y="1338703"/>
-            <a:ext cx="1125629" cy="200055"/>
-          </a:xfrm>
-          <a:prstGeom prst="rect">
-            <a:avLst/>
-          </a:prstGeom>
-          <a:noFill/>
-        </p:spPr>
-        <p:txBody>
-          <a:bodyPr wrap="none">
-            <a:spAutoFit/>
-          </a:bodyPr>
-          <a:lstStyle/>
-          <a:p>
-            <a:pPr algn="ctr"/>
-            <a:r>
-              <a:rPr lang="ko-KR" altLang="en-US" sz="700" b="1" dirty="0">
-                <a:solidFill>
-                  <a:schemeClr val="tx2">
-                    <a:lumMod val="50000"/>
-                  </a:schemeClr>
-                </a:solidFill>
-                <a:latin typeface="KoPub돋움체 Light" panose="02020603020101020101" pitchFamily="18" charset="-127"/>
-                <a:ea typeface="KoPub돋움체 Light" panose="02020603020101020101" pitchFamily="18" charset="-127"/>
-              </a:rPr>
-              <a:t>투명한 지표  </a:t>
-            </a:r>
-            <a:r>
-              <a:rPr lang="en-US" altLang="ko-KR" sz="700" b="1" dirty="0">
-                <a:solidFill>
-                  <a:schemeClr val="tx2">
-                    <a:lumMod val="50000"/>
-                  </a:schemeClr>
-                </a:solidFill>
-                <a:latin typeface="KoPub돋움체 Light" panose="02020603020101020101" pitchFamily="18" charset="-127"/>
-                <a:ea typeface="KoPub돋움체 Light" panose="02020603020101020101" pitchFamily="18" charset="-127"/>
-              </a:rPr>
-              <a:t>(Dashboard)</a:t>
-            </a:r>
-            <a:endParaRPr lang="ko-KR" altLang="en-US" sz="600" dirty="0">
-              <a:solidFill>
-                <a:schemeClr val="tx2">
-                  <a:lumMod val="50000"/>
-                </a:schemeClr>
-              </a:solidFill>
-              <a:latin typeface="KoPub돋움체 Light" panose="02020603020101020101" pitchFamily="18" charset="-127"/>
-              <a:ea typeface="KoPub돋움체 Light" panose="02020603020101020101" pitchFamily="18" charset="-127"/>
-            </a:endParaRPr>
           </a:p>
         </p:txBody>
       </p:sp>
@@ -4890,8 +4186,8 @@
         </p:nvGrpSpPr>
         <p:grpSpPr>
           <a:xfrm>
-            <a:off x="191493" y="377028"/>
-            <a:ext cx="538336" cy="538336"/>
+            <a:off x="608195" y="838920"/>
+            <a:ext cx="634026" cy="568432"/>
             <a:chOff x="777945" y="-736888"/>
             <a:chExt cx="663508" cy="663508"/>
           </a:xfrm>
@@ -5155,10 +4451,564 @@
           </p:txBody>
         </p:sp>
       </p:grpSp>
+      <p:grpSp>
+        <p:nvGrpSpPr>
+          <p:cNvPr id="18" name="그룹 17">
+            <a:extLst>
+              <a:ext uri="{FF2B5EF4-FFF2-40B4-BE49-F238E27FC236}">
+                <a16:creationId xmlns:a16="http://schemas.microsoft.com/office/drawing/2014/main" id="{360DDF2E-2289-473B-B5F6-77027118C993}"/>
+              </a:ext>
+            </a:extLst>
+          </p:cNvPr>
+          <p:cNvGrpSpPr/>
+          <p:nvPr/>
+        </p:nvGrpSpPr>
+        <p:grpSpPr>
+          <a:xfrm>
+            <a:off x="131326" y="274768"/>
+            <a:ext cx="1746464" cy="425416"/>
+            <a:chOff x="614240" y="226472"/>
+            <a:chExt cx="1746464" cy="425416"/>
+          </a:xfrm>
+        </p:grpSpPr>
+        <p:sp>
+          <p:nvSpPr>
+            <p:cNvPr id="4" name="TextBox 3">
+              <a:extLst>
+                <a:ext uri="{FF2B5EF4-FFF2-40B4-BE49-F238E27FC236}">
+                  <a16:creationId xmlns:a16="http://schemas.microsoft.com/office/drawing/2014/main" id="{1F0C02A7-D766-DD14-548E-2AE7955534F4}"/>
+                </a:ext>
+              </a:extLst>
+            </p:cNvPr>
+            <p:cNvSpPr txBox="1"/>
+            <p:nvPr/>
+          </p:nvSpPr>
+          <p:spPr>
+            <a:xfrm>
+              <a:off x="685077" y="226472"/>
+              <a:ext cx="1604991" cy="307777"/>
+            </a:xfrm>
+            <a:prstGeom prst="rect">
+              <a:avLst/>
+            </a:prstGeom>
+            <a:noFill/>
+          </p:spPr>
+          <p:txBody>
+            <a:bodyPr wrap="none">
+              <a:spAutoFit/>
+            </a:bodyPr>
+            <a:lstStyle/>
+            <a:p>
+              <a:pPr algn="ctr"/>
+              <a:r>
+                <a:rPr lang="ko-KR" altLang="en-US" sz="1400" dirty="0" err="1">
+                  <a:solidFill>
+                    <a:srgbClr val="00B0F0"/>
+                  </a:solidFill>
+                  <a:latin typeface="KoPub돋움체 Bold" panose="00000800000000000000" pitchFamily="2" charset="-127"/>
+                  <a:ea typeface="KoPub돋움체 Bold" panose="00000800000000000000" pitchFamily="2" charset="-127"/>
+                </a:rPr>
+                <a:t>우리가치</a:t>
+              </a:r>
+              <a:r>
+                <a:rPr lang="ko-KR" altLang="en-US" sz="1400" dirty="0">
+                  <a:solidFill>
+                    <a:schemeClr val="accent1">
+                      <a:lumMod val="50000"/>
+                    </a:schemeClr>
+                  </a:solidFill>
+                  <a:latin typeface="KoPub돋움체 Bold" panose="02020603020101020101" pitchFamily="18" charset="-127"/>
+                  <a:ea typeface="KoPub돋움체 Bold" panose="02020603020101020101" pitchFamily="18" charset="-127"/>
+                </a:rPr>
+                <a:t> </a:t>
+              </a:r>
+              <a:r>
+                <a:rPr lang="en-US" altLang="ko-KR" sz="1400" dirty="0" err="1">
+                  <a:solidFill>
+                    <a:schemeClr val="accent1">
+                      <a:lumMod val="50000"/>
+                    </a:schemeClr>
+                  </a:solidFill>
+                  <a:latin typeface="Franklin Gothic Heavy" panose="020B0903020102020204" pitchFamily="34" charset="0"/>
+                  <a:ea typeface="KoPub돋움체 Bold" panose="02020603020101020101" pitchFamily="18" charset="-127"/>
+                </a:rPr>
+                <a:t>WeValue</a:t>
+              </a:r>
+              <a:endParaRPr lang="en-US" altLang="ko-KR" sz="1400" dirty="0">
+                <a:solidFill>
+                  <a:schemeClr val="accent1">
+                    <a:lumMod val="50000"/>
+                  </a:schemeClr>
+                </a:solidFill>
+                <a:latin typeface="Franklin Gothic Heavy" panose="020B0903020102020204" pitchFamily="34" charset="0"/>
+                <a:ea typeface="KoPub돋움체 Bold" panose="02020603020101020101" pitchFamily="18" charset="-127"/>
+              </a:endParaRPr>
+            </a:p>
+          </p:txBody>
+        </p:sp>
+        <p:sp>
+          <p:nvSpPr>
+            <p:cNvPr id="6" name="TextBox 5">
+              <a:extLst>
+                <a:ext uri="{FF2B5EF4-FFF2-40B4-BE49-F238E27FC236}">
+                  <a16:creationId xmlns:a16="http://schemas.microsoft.com/office/drawing/2014/main" id="{25F3C248-44C4-9D7A-C464-62D68C9890DC}"/>
+                </a:ext>
+              </a:extLst>
+            </p:cNvPr>
+            <p:cNvSpPr txBox="1"/>
+            <p:nvPr/>
+          </p:nvSpPr>
+          <p:spPr>
+            <a:xfrm>
+              <a:off x="622591" y="451833"/>
+              <a:ext cx="1729962" cy="200055"/>
+            </a:xfrm>
+            <a:prstGeom prst="rect">
+              <a:avLst/>
+            </a:prstGeom>
+            <a:noFill/>
+          </p:spPr>
+          <p:txBody>
+            <a:bodyPr wrap="none">
+              <a:spAutoFit/>
+            </a:bodyPr>
+            <a:lstStyle/>
+            <a:p>
+              <a:pPr algn="ctr"/>
+              <a:r>
+                <a:rPr lang="en-US" altLang="ko-KR" sz="700" b="1" dirty="0">
+                  <a:latin typeface="KoPub돋움체 Bold" panose="00000800000000000000" pitchFamily="2" charset="-127"/>
+                  <a:ea typeface="KoPub돋움체 Bold" panose="00000800000000000000" pitchFamily="2" charset="-127"/>
+                </a:rPr>
+                <a:t>[</a:t>
+              </a:r>
+              <a:r>
+                <a:rPr lang="ko-KR" altLang="en-US" sz="700" b="1" dirty="0">
+                  <a:latin typeface="KoPub돋움체 Bold" panose="00000800000000000000" pitchFamily="2" charset="-127"/>
+                  <a:ea typeface="KoPub돋움체 Bold" panose="00000800000000000000" pitchFamily="2" charset="-127"/>
+                </a:rPr>
+                <a:t>우리가 가치를 만드는 공간</a:t>
+              </a:r>
+              <a:r>
+                <a:rPr lang="en-US" altLang="ko-KR" sz="700" b="1" dirty="0">
+                  <a:latin typeface="KoPub돋움체 Bold" panose="00000800000000000000" pitchFamily="2" charset="-127"/>
+                  <a:ea typeface="KoPub돋움체 Bold" panose="00000800000000000000" pitchFamily="2" charset="-127"/>
+                </a:rPr>
+                <a:t>, </a:t>
+              </a:r>
+              <a:r>
+                <a:rPr lang="ko-KR" altLang="en-US" sz="700" b="1" dirty="0" err="1">
+                  <a:latin typeface="KoPub돋움체 Bold" panose="00000800000000000000" pitchFamily="2" charset="-127"/>
+                  <a:ea typeface="KoPub돋움체 Bold" panose="00000800000000000000" pitchFamily="2" charset="-127"/>
+                </a:rPr>
+                <a:t>우리가치</a:t>
+              </a:r>
+              <a:r>
+                <a:rPr lang="ko-KR" altLang="en-US" sz="700" b="1" dirty="0">
+                  <a:latin typeface="KoPub돋움체 Bold" panose="00000800000000000000" pitchFamily="2" charset="-127"/>
+                  <a:ea typeface="KoPub돋움체 Bold" panose="00000800000000000000" pitchFamily="2" charset="-127"/>
+                </a:rPr>
+                <a:t> 허브</a:t>
+              </a:r>
+              <a:r>
+                <a:rPr lang="en-US" altLang="ko-KR" sz="700" b="1" dirty="0">
+                  <a:latin typeface="KoPub돋움체 Bold" panose="00000800000000000000" pitchFamily="2" charset="-127"/>
+                  <a:ea typeface="KoPub돋움체 Bold" panose="00000800000000000000" pitchFamily="2" charset="-127"/>
+                </a:rPr>
+                <a:t>]</a:t>
+              </a:r>
+            </a:p>
+          </p:txBody>
+        </p:sp>
+        <p:pic>
+          <p:nvPicPr>
+            <p:cNvPr id="10" name="그림 9">
+              <a:extLst>
+                <a:ext uri="{FF2B5EF4-FFF2-40B4-BE49-F238E27FC236}">
+                  <a16:creationId xmlns:a16="http://schemas.microsoft.com/office/drawing/2014/main" id="{EB1E9046-9340-4D3D-AA23-F89851FB0C3F}"/>
+                </a:ext>
+              </a:extLst>
+            </p:cNvPr>
+            <p:cNvPicPr>
+              <a:picLocks noChangeAspect="1"/>
+            </p:cNvPicPr>
+            <p:nvPr/>
+          </p:nvPicPr>
+          <p:blipFill>
+            <a:blip r:embed="rId3"/>
+            <a:stretch>
+              <a:fillRect/>
+            </a:stretch>
+          </p:blipFill>
+          <p:spPr>
+            <a:xfrm>
+              <a:off x="614240" y="271322"/>
+              <a:ext cx="147416" cy="128728"/>
+            </a:xfrm>
+            <a:prstGeom prst="rect">
+              <a:avLst/>
+            </a:prstGeom>
+          </p:spPr>
+        </p:pic>
+        <p:pic>
+          <p:nvPicPr>
+            <p:cNvPr id="29" name="그림 28">
+              <a:extLst>
+                <a:ext uri="{FF2B5EF4-FFF2-40B4-BE49-F238E27FC236}">
+                  <a16:creationId xmlns:a16="http://schemas.microsoft.com/office/drawing/2014/main" id="{799E618A-B635-413C-90D6-9BBB5F48E428}"/>
+                </a:ext>
+              </a:extLst>
+            </p:cNvPr>
+            <p:cNvPicPr>
+              <a:picLocks noChangeAspect="1"/>
+            </p:cNvPicPr>
+            <p:nvPr/>
+          </p:nvPicPr>
+          <p:blipFill>
+            <a:blip r:embed="rId3"/>
+            <a:stretch>
+              <a:fillRect/>
+            </a:stretch>
+          </p:blipFill>
+          <p:spPr>
+            <a:xfrm rot="10800000">
+              <a:off x="2181315" y="257361"/>
+              <a:ext cx="179389" cy="156650"/>
+            </a:xfrm>
+            <a:prstGeom prst="rect">
+              <a:avLst/>
+            </a:prstGeom>
+          </p:spPr>
+        </p:pic>
+        <p:pic>
+          <p:nvPicPr>
+            <p:cNvPr id="30" name="그림 29">
+              <a:extLst>
+                <a:ext uri="{FF2B5EF4-FFF2-40B4-BE49-F238E27FC236}">
+                  <a16:creationId xmlns:a16="http://schemas.microsoft.com/office/drawing/2014/main" id="{FCD9B137-9F07-4052-B76C-36D6AED25D86}"/>
+                </a:ext>
+              </a:extLst>
+            </p:cNvPr>
+            <p:cNvPicPr>
+              <a:picLocks noChangeAspect="1"/>
+            </p:cNvPicPr>
+            <p:nvPr/>
+          </p:nvPicPr>
+          <p:blipFill>
+            <a:blip r:embed="rId3"/>
+            <a:stretch>
+              <a:fillRect/>
+            </a:stretch>
+          </p:blipFill>
+          <p:spPr>
+            <a:xfrm rot="10800000">
+              <a:off x="2197302" y="276730"/>
+              <a:ext cx="147414" cy="128728"/>
+            </a:xfrm>
+            <a:prstGeom prst="rect">
+              <a:avLst/>
+            </a:prstGeom>
+          </p:spPr>
+        </p:pic>
+      </p:grpSp>
+      <p:grpSp>
+        <p:nvGrpSpPr>
+          <p:cNvPr id="12" name="그룹 11">
+            <a:extLst>
+              <a:ext uri="{FF2B5EF4-FFF2-40B4-BE49-F238E27FC236}">
+                <a16:creationId xmlns:a16="http://schemas.microsoft.com/office/drawing/2014/main" id="{6B2D700B-07E0-4E28-A7D2-0F4C62846EE3}"/>
+              </a:ext>
+            </a:extLst>
+          </p:cNvPr>
+          <p:cNvGrpSpPr/>
+          <p:nvPr/>
+        </p:nvGrpSpPr>
+        <p:grpSpPr>
+          <a:xfrm>
+            <a:off x="1506613" y="772187"/>
+            <a:ext cx="1564409" cy="707886"/>
+            <a:chOff x="796295" y="778765"/>
+            <a:chExt cx="1564409" cy="707886"/>
+          </a:xfrm>
+        </p:grpSpPr>
+        <p:sp>
+          <p:nvSpPr>
+            <p:cNvPr id="26" name="TextBox 25">
+              <a:extLst>
+                <a:ext uri="{FF2B5EF4-FFF2-40B4-BE49-F238E27FC236}">
+                  <a16:creationId xmlns:a16="http://schemas.microsoft.com/office/drawing/2014/main" id="{61921C24-9018-417C-966E-E56980F41166}"/>
+                </a:ext>
+              </a:extLst>
+            </p:cNvPr>
+            <p:cNvSpPr txBox="1"/>
+            <p:nvPr/>
+          </p:nvSpPr>
+          <p:spPr>
+            <a:xfrm>
+              <a:off x="1422627" y="778765"/>
+              <a:ext cx="938077" cy="707886"/>
+            </a:xfrm>
+            <a:prstGeom prst="rect">
+              <a:avLst/>
+            </a:prstGeom>
+            <a:noFill/>
+          </p:spPr>
+          <p:txBody>
+            <a:bodyPr wrap="none" rtlCol="0">
+              <a:spAutoFit/>
+            </a:bodyPr>
+            <a:lstStyle/>
+            <a:p>
+              <a:r>
+                <a:rPr lang="en-US" altLang="ko-KR" sz="800" dirty="0">
+                  <a:latin typeface="KoPub돋움체 Light" panose="00000300000000000000" pitchFamily="2" charset="-127"/>
+                  <a:ea typeface="KoPub돋움체 Light" panose="00000300000000000000" pitchFamily="2" charset="-127"/>
+                </a:rPr>
+                <a:t>"</a:t>
+              </a:r>
+              <a:r>
+                <a:rPr lang="ko-KR" altLang="en-US" sz="800" dirty="0">
+                  <a:latin typeface="KoPub돋움체 Light" panose="00000300000000000000" pitchFamily="2" charset="-127"/>
+                  <a:ea typeface="KoPub돋움체 Light" panose="00000300000000000000" pitchFamily="2" charset="-127"/>
+                </a:rPr>
+                <a:t>함께하는 즐거움</a:t>
+              </a:r>
+              <a:r>
+                <a:rPr lang="en-US" altLang="ko-KR" sz="800" dirty="0">
+                  <a:latin typeface="KoPub돋움체 Light" panose="00000300000000000000" pitchFamily="2" charset="-127"/>
+                  <a:ea typeface="KoPub돋움체 Light" panose="00000300000000000000" pitchFamily="2" charset="-127"/>
+                </a:rPr>
+                <a:t>“</a:t>
+              </a:r>
+            </a:p>
+            <a:p>
+              <a:r>
+                <a:rPr lang="en-US" altLang="ko-KR" sz="800" dirty="0">
+                  <a:latin typeface="KoPub돋움체 Light" panose="00000300000000000000" pitchFamily="2" charset="-127"/>
+                  <a:ea typeface="KoPub돋움체 Light" panose="00000300000000000000" pitchFamily="2" charset="-127"/>
+                </a:rPr>
+                <a:t>"</a:t>
+              </a:r>
+              <a:r>
+                <a:rPr lang="ko-KR" altLang="en-US" sz="800" dirty="0">
+                  <a:latin typeface="KoPub돋움체 Light" panose="00000300000000000000" pitchFamily="2" charset="-127"/>
+                  <a:ea typeface="KoPub돋움체 Light" panose="00000300000000000000" pitchFamily="2" charset="-127"/>
+                </a:rPr>
+                <a:t>명확한 약속</a:t>
+              </a:r>
+              <a:r>
+                <a:rPr lang="en-US" altLang="ko-KR" sz="800" dirty="0">
+                  <a:latin typeface="KoPub돋움체 Light" panose="00000300000000000000" pitchFamily="2" charset="-127"/>
+                  <a:ea typeface="KoPub돋움체 Light" panose="00000300000000000000" pitchFamily="2" charset="-127"/>
+                </a:rPr>
+                <a:t>"</a:t>
+              </a:r>
+              <a:endParaRPr lang="ko-KR" altLang="en-US" sz="800" dirty="0">
+                <a:latin typeface="KoPub돋움체 Light" panose="00000300000000000000" pitchFamily="2" charset="-127"/>
+                <a:ea typeface="KoPub돋움체 Light" panose="00000300000000000000" pitchFamily="2" charset="-127"/>
+              </a:endParaRPr>
+            </a:p>
+            <a:p>
+              <a:r>
+                <a:rPr lang="en-US" altLang="ko-KR" sz="800" dirty="0">
+                  <a:latin typeface="KoPub돋움체 Light" panose="00000300000000000000" pitchFamily="2" charset="-127"/>
+                  <a:ea typeface="KoPub돋움체 Light" panose="00000300000000000000" pitchFamily="2" charset="-127"/>
+                </a:rPr>
+                <a:t>"</a:t>
+              </a:r>
+              <a:r>
+                <a:rPr lang="ko-KR" altLang="en-US" sz="800" dirty="0">
+                  <a:latin typeface="KoPub돋움체 Light" panose="00000300000000000000" pitchFamily="2" charset="-127"/>
+                  <a:ea typeface="KoPub돋움체 Light" panose="00000300000000000000" pitchFamily="2" charset="-127"/>
+                </a:rPr>
+                <a:t>한눈에 보는 실무</a:t>
+              </a:r>
+              <a:r>
+                <a:rPr lang="en-US" altLang="ko-KR" sz="800" dirty="0">
+                  <a:latin typeface="KoPub돋움체 Light" panose="00000300000000000000" pitchFamily="2" charset="-127"/>
+                  <a:ea typeface="KoPub돋움체 Light" panose="00000300000000000000" pitchFamily="2" charset="-127"/>
+                </a:rPr>
+                <a:t>"</a:t>
+              </a:r>
+              <a:endParaRPr lang="ko-KR" altLang="en-US" sz="800" dirty="0">
+                <a:latin typeface="KoPub돋움체 Light" panose="00000300000000000000" pitchFamily="2" charset="-127"/>
+                <a:ea typeface="KoPub돋움체 Light" panose="00000300000000000000" pitchFamily="2" charset="-127"/>
+              </a:endParaRPr>
+            </a:p>
+            <a:p>
+              <a:r>
+                <a:rPr lang="en-US" altLang="ko-KR" sz="800" dirty="0">
+                  <a:latin typeface="KoPub돋움체 Light" panose="00000300000000000000" pitchFamily="2" charset="-127"/>
+                  <a:ea typeface="KoPub돋움체 Light" panose="00000300000000000000" pitchFamily="2" charset="-127"/>
+                </a:rPr>
+                <a:t>"</a:t>
+              </a:r>
+              <a:r>
+                <a:rPr lang="ko-KR" altLang="en-US" sz="800" dirty="0">
+                  <a:latin typeface="KoPub돋움체 Light" panose="00000300000000000000" pitchFamily="2" charset="-127"/>
+                  <a:ea typeface="KoPub돋움체 Light" panose="00000300000000000000" pitchFamily="2" charset="-127"/>
+                </a:rPr>
+                <a:t>현장 밀착형 지원</a:t>
+              </a:r>
+              <a:r>
+                <a:rPr lang="en-US" altLang="ko-KR" sz="800" dirty="0">
+                  <a:latin typeface="KoPub돋움체 Light" panose="00000300000000000000" pitchFamily="2" charset="-127"/>
+                  <a:ea typeface="KoPub돋움체 Light" panose="00000300000000000000" pitchFamily="2" charset="-127"/>
+                </a:rPr>
+                <a:t>"</a:t>
+              </a:r>
+              <a:endParaRPr lang="ko-KR" altLang="en-US" sz="800" dirty="0">
+                <a:latin typeface="KoPub돋움체 Light" panose="00000300000000000000" pitchFamily="2" charset="-127"/>
+                <a:ea typeface="KoPub돋움체 Light" panose="00000300000000000000" pitchFamily="2" charset="-127"/>
+              </a:endParaRPr>
+            </a:p>
+            <a:p>
+              <a:r>
+                <a:rPr lang="en-US" altLang="ko-KR" sz="800" dirty="0">
+                  <a:latin typeface="KoPub돋움체 Light" panose="00000300000000000000" pitchFamily="2" charset="-127"/>
+                  <a:ea typeface="KoPub돋움체 Light" panose="00000300000000000000" pitchFamily="2" charset="-127"/>
+                </a:rPr>
+                <a:t>"</a:t>
+              </a:r>
+              <a:r>
+                <a:rPr lang="ko-KR" altLang="en-US" sz="800" dirty="0">
+                  <a:latin typeface="KoPub돋움체 Light" panose="00000300000000000000" pitchFamily="2" charset="-127"/>
+                  <a:ea typeface="KoPub돋움체 Light" panose="00000300000000000000" pitchFamily="2" charset="-127"/>
+                </a:rPr>
+                <a:t>변화의 체감</a:t>
+              </a:r>
+              <a:r>
+                <a:rPr lang="en-US" altLang="ko-KR" sz="800" dirty="0">
+                  <a:latin typeface="KoPub돋움체 Light" panose="00000300000000000000" pitchFamily="2" charset="-127"/>
+                  <a:ea typeface="KoPub돋움체 Light" panose="00000300000000000000" pitchFamily="2" charset="-127"/>
+                </a:rPr>
+                <a:t>"</a:t>
+              </a:r>
+              <a:endParaRPr lang="ko-KR" altLang="en-US" sz="800" dirty="0">
+                <a:latin typeface="KoPub돋움체 Light" panose="00000300000000000000" pitchFamily="2" charset="-127"/>
+                <a:ea typeface="KoPub돋움체 Light" panose="00000300000000000000" pitchFamily="2" charset="-127"/>
+              </a:endParaRPr>
+            </a:p>
+          </p:txBody>
+        </p:sp>
+        <p:sp>
+          <p:nvSpPr>
+            <p:cNvPr id="31" name="TextBox 30">
+              <a:extLst>
+                <a:ext uri="{FF2B5EF4-FFF2-40B4-BE49-F238E27FC236}">
+                  <a16:creationId xmlns:a16="http://schemas.microsoft.com/office/drawing/2014/main" id="{62EAB35A-296C-468C-BCA0-D585048BF4E9}"/>
+                </a:ext>
+              </a:extLst>
+            </p:cNvPr>
+            <p:cNvSpPr txBox="1"/>
+            <p:nvPr/>
+          </p:nvSpPr>
+          <p:spPr>
+            <a:xfrm>
+              <a:off x="796295" y="778765"/>
+              <a:ext cx="753732" cy="707886"/>
+            </a:xfrm>
+            <a:prstGeom prst="rect">
+              <a:avLst/>
+            </a:prstGeom>
+            <a:noFill/>
+          </p:spPr>
+          <p:txBody>
+            <a:bodyPr wrap="none" rtlCol="0">
+              <a:spAutoFit/>
+            </a:bodyPr>
+            <a:lstStyle/>
+            <a:p>
+              <a:pPr marL="88900" indent="-88900">
+                <a:buClr>
+                  <a:srgbClr val="00B0F0"/>
+                </a:buClr>
+                <a:buFont typeface="Arial" panose="020B0604020202020204" pitchFamily="34" charset="0"/>
+                <a:buChar char="•"/>
+              </a:pPr>
+              <a:r>
+                <a:rPr lang="ko-KR" altLang="en-US" sz="800" b="1" dirty="0">
+                  <a:latin typeface="KoPub돋움체 Bold" panose="00000800000000000000" pitchFamily="2" charset="-127"/>
+                  <a:ea typeface="KoPub돋움체 Bold" panose="00000800000000000000" pitchFamily="2" charset="-127"/>
+                </a:rPr>
+                <a:t>소통의 광장</a:t>
+              </a:r>
+              <a:endParaRPr lang="en-US" altLang="ko-KR" sz="800" b="1" dirty="0">
+                <a:latin typeface="KoPub돋움체 Bold" panose="00000800000000000000" pitchFamily="2" charset="-127"/>
+                <a:ea typeface="KoPub돋움체 Bold" panose="00000800000000000000" pitchFamily="2" charset="-127"/>
+              </a:endParaRPr>
+            </a:p>
+            <a:p>
+              <a:pPr marL="88900" indent="-88900">
+                <a:buClr>
+                  <a:srgbClr val="00B0F0"/>
+                </a:buClr>
+                <a:buFont typeface="Arial" panose="020B0604020202020204" pitchFamily="34" charset="0"/>
+                <a:buChar char="•"/>
+              </a:pPr>
+              <a:r>
+                <a:rPr lang="ko-KR" altLang="en-US" sz="800" b="1" dirty="0">
+                  <a:latin typeface="KoPub돋움체 Bold" panose="00000800000000000000" pitchFamily="2" charset="-127"/>
+                  <a:ea typeface="KoPub돋움체 Bold" panose="00000800000000000000" pitchFamily="2" charset="-127"/>
+                </a:rPr>
+                <a:t>업무 기준</a:t>
+              </a:r>
+            </a:p>
+            <a:p>
+              <a:pPr marL="88900" indent="-88900">
+                <a:buClr>
+                  <a:srgbClr val="00B0F0"/>
+                </a:buClr>
+                <a:buFont typeface="Arial" panose="020B0604020202020204" pitchFamily="34" charset="0"/>
+                <a:buChar char="•"/>
+              </a:pPr>
+              <a:r>
+                <a:rPr lang="ko-KR" altLang="en-US" sz="800" b="1" dirty="0">
+                  <a:latin typeface="KoPub돋움체 Bold" panose="00000800000000000000" pitchFamily="2" charset="-127"/>
+                  <a:ea typeface="KoPub돋움체 Bold" panose="00000800000000000000" pitchFamily="2" charset="-127"/>
+                </a:rPr>
+                <a:t>교육자료</a:t>
+              </a:r>
+            </a:p>
+            <a:p>
+              <a:pPr marL="88900" indent="-88900">
+                <a:buClr>
+                  <a:srgbClr val="00B0F0"/>
+                </a:buClr>
+                <a:buFont typeface="Arial" panose="020B0604020202020204" pitchFamily="34" charset="0"/>
+                <a:buChar char="•"/>
+              </a:pPr>
+              <a:r>
+                <a:rPr lang="ko-KR" altLang="en-US" sz="800" b="1" dirty="0">
+                  <a:latin typeface="KoPub돋움체 Bold" panose="00000800000000000000" pitchFamily="2" charset="-127"/>
+                  <a:ea typeface="KoPub돋움체 Bold" panose="00000800000000000000" pitchFamily="2" charset="-127"/>
+                </a:rPr>
+                <a:t>요청</a:t>
+              </a:r>
+            </a:p>
+            <a:p>
+              <a:pPr marL="88900" indent="-88900">
+                <a:buClr>
+                  <a:srgbClr val="00B0F0"/>
+                </a:buClr>
+                <a:buFont typeface="Arial" panose="020B0604020202020204" pitchFamily="34" charset="0"/>
+                <a:buChar char="•"/>
+              </a:pPr>
+              <a:r>
+                <a:rPr lang="ko-KR" altLang="en-US" sz="800" b="1" dirty="0">
+                  <a:latin typeface="KoPub돋움체 Bold" panose="00000800000000000000" pitchFamily="2" charset="-127"/>
+                  <a:ea typeface="KoPub돋움체 Bold" panose="00000800000000000000" pitchFamily="2" charset="-127"/>
+                </a:rPr>
+                <a:t>지표</a:t>
+              </a:r>
+            </a:p>
+          </p:txBody>
+        </p:sp>
+      </p:grpSp>
     </p:spTree>
     <p:extLst>
       <p:ext uri="{BB962C8B-B14F-4D97-AF65-F5344CB8AC3E}">
-        <p14:creationId xmlns:p14="http://schemas.microsoft.com/office/powerpoint/2010/main" val="1275630205"/>
+        <p14:creationId xmlns:p14="http://schemas.microsoft.com/office/powerpoint/2010/main" val="1956204071"/>
       </p:ext>
     </p:extLst>
   </p:cSld>
@@ -5191,12 +5041,47 @@
           <a:chExt cx="0" cy="0"/>
         </a:xfrm>
       </p:grpSpPr>
-      <p:sp>
-        <p:nvSpPr>
-          <p:cNvPr id="3" name="TextBox 2">
+      <p:pic>
+        <p:nvPicPr>
+          <p:cNvPr id="4" name="Picture 1">
             <a:extLst>
               <a:ext uri="{FF2B5EF4-FFF2-40B4-BE49-F238E27FC236}">
-                <a16:creationId xmlns:a16="http://schemas.microsoft.com/office/drawing/2014/main" id="{0C74A5D6-3A56-B177-2B3C-9C02CC585860}"/>
+                <a16:creationId xmlns:a16="http://schemas.microsoft.com/office/drawing/2014/main" id="{480AF66F-CB5C-451A-847A-EB60BA58025A}"/>
+              </a:ext>
+            </a:extLst>
+          </p:cNvPr>
+          <p:cNvPicPr>
+            <a:picLocks noChangeAspect="1"/>
+          </p:cNvPicPr>
+          <p:nvPr/>
+        </p:nvPicPr>
+        <p:blipFill>
+          <a:blip r:embed="rId2"/>
+          <a:stretch>
+            <a:fillRect/>
+          </a:stretch>
+        </p:blipFill>
+        <p:spPr>
+          <a:xfrm>
+            <a:off x="844058" y="1020048"/>
+            <a:ext cx="359069" cy="203042"/>
+          </a:xfrm>
+          <a:prstGeom prst="rect">
+            <a:avLst/>
+          </a:prstGeom>
+          <a:noFill/>
+          <a:ln>
+            <a:noFill/>
+          </a:ln>
+          <a:effectLst/>
+        </p:spPr>
+      </p:pic>
+      <p:sp>
+        <p:nvSpPr>
+          <p:cNvPr id="5" name="TextBox 4">
+            <a:extLst>
+              <a:ext uri="{FF2B5EF4-FFF2-40B4-BE49-F238E27FC236}">
+                <a16:creationId xmlns:a16="http://schemas.microsoft.com/office/drawing/2014/main" id="{5D20D6DC-7FD8-414D-8D41-7397E6AB51D5}"/>
               </a:ext>
             </a:extLst>
           </p:cNvPr>
@@ -5205,8 +5090,8 @@
         </p:nvSpPr>
         <p:spPr>
           <a:xfrm>
-            <a:off x="-706687" y="54245"/>
-            <a:ext cx="2717302" cy="169277"/>
+            <a:off x="1151732" y="1036931"/>
+            <a:ext cx="1247775" cy="169277"/>
           </a:xfrm>
           <a:prstGeom prst="rect">
             <a:avLst/>
@@ -5214,42 +5099,58 @@
           <a:noFill/>
         </p:spPr>
         <p:txBody>
-          <a:bodyPr wrap="square">
+          <a:bodyPr wrap="square" rtlCol="0">
             <a:spAutoFit/>
           </a:bodyPr>
           <a:lstStyle/>
           <a:p>
             <a:pPr algn="ctr"/>
             <a:r>
-              <a:rPr lang="ko-KR" altLang="en-US" sz="500" spc="-11" dirty="0">
-                <a:latin typeface="KoPub돋움체 Light" panose="02020603020101020101" pitchFamily="18" charset="-127"/>
-                <a:ea typeface="KoPub돋움체 Light" panose="02020603020101020101" pitchFamily="18" charset="-127"/>
+              <a:rPr lang="ko-KR" altLang="en-US" sz="500" b="1" dirty="0">
+                <a:solidFill>
+                  <a:srgbClr val="4472C4"/>
+                </a:solidFill>
+                <a:latin typeface="KoPub돋움체 Bold" panose="02020603020101020101" pitchFamily="18" charset="-127"/>
+                <a:ea typeface="KoPub돋움체 Bold" panose="02020603020101020101" pitchFamily="18" charset="-127"/>
               </a:rPr>
               <a:t>순천향대학교 천안병원 </a:t>
             </a:r>
             <a:r>
-              <a:rPr lang="en-US" altLang="ko-KR" sz="500" spc="-11" dirty="0">
-                <a:latin typeface="KoPub돋움체 Light" panose="02020603020101020101" pitchFamily="18" charset="-127"/>
-                <a:ea typeface="KoPub돋움체 Light" panose="02020603020101020101" pitchFamily="18" charset="-127"/>
+              <a:rPr lang="en-US" altLang="ko-KR" sz="500" b="1" dirty="0">
+                <a:solidFill>
+                  <a:srgbClr val="4472C4"/>
+                </a:solidFill>
+                <a:latin typeface="KoPub돋움체 Bold" panose="02020603020101020101" pitchFamily="18" charset="-127"/>
+                <a:ea typeface="KoPub돋움체 Bold" panose="02020603020101020101" pitchFamily="18" charset="-127"/>
               </a:rPr>
               <a:t>| </a:t>
             </a:r>
             <a:r>
-              <a:rPr lang="ko-KR" altLang="en-US" sz="500" spc="-11" dirty="0">
-                <a:latin typeface="KoPub돋움체 Light" panose="02020603020101020101" pitchFamily="18" charset="-127"/>
-                <a:ea typeface="KoPub돋움체 Light" panose="02020603020101020101" pitchFamily="18" charset="-127"/>
-              </a:rPr>
-              <a:t>진료지원간호팀 </a:t>
-            </a:r>
-          </a:p>
-        </p:txBody>
-      </p:sp>
-      <p:sp>
-        <p:nvSpPr>
-          <p:cNvPr id="41" name="TextBox 40">
+              <a:rPr lang="ko-KR" altLang="en-US" sz="500" b="1" dirty="0">
+                <a:solidFill>
+                  <a:srgbClr val="4472C4"/>
+                </a:solidFill>
+                <a:latin typeface="KoPub돋움체 Bold" panose="02020603020101020101" pitchFamily="18" charset="-127"/>
+                <a:ea typeface="KoPub돋움체 Bold" panose="02020603020101020101" pitchFamily="18" charset="-127"/>
+              </a:rPr>
+              <a:t>진료지원간호팀</a:t>
+            </a:r>
+            <a:endParaRPr lang="ko-KR" altLang="en-US" sz="600" b="1" dirty="0">
+              <a:solidFill>
+                <a:srgbClr val="4472C4"/>
+              </a:solidFill>
+              <a:latin typeface="KoPub돋움체 Bold" panose="02020603020101020101" pitchFamily="18" charset="-127"/>
+              <a:ea typeface="KoPub돋움체 Bold" panose="02020603020101020101" pitchFamily="18" charset="-127"/>
+            </a:endParaRPr>
+          </a:p>
+        </p:txBody>
+      </p:sp>
+      <p:sp>
+        <p:nvSpPr>
+          <p:cNvPr id="7" name="TextBox 6">
             <a:extLst>
               <a:ext uri="{FF2B5EF4-FFF2-40B4-BE49-F238E27FC236}">
-                <a16:creationId xmlns:a16="http://schemas.microsoft.com/office/drawing/2014/main" id="{91474189-057B-B9B1-6224-A28E5BF62A39}"/>
+                <a16:creationId xmlns:a16="http://schemas.microsoft.com/office/drawing/2014/main" id="{568CE481-19EF-4F97-AF73-265FDB83283E}"/>
               </a:ext>
             </a:extLst>
           </p:cNvPr>
@@ -5258,8 +5159,8 @@
         </p:nvSpPr>
         <p:spPr>
           <a:xfrm>
-            <a:off x="173830" y="443776"/>
-            <a:ext cx="2797561" cy="954107"/>
+            <a:off x="1019010" y="669281"/>
+            <a:ext cx="1103187" cy="230832"/>
           </a:xfrm>
           <a:prstGeom prst="rect">
             <a:avLst/>
@@ -5272,235 +5173,187 @@
           </a:bodyPr>
           <a:lstStyle/>
           <a:p>
-            <a:pPr marL="171450" indent="-171450">
-              <a:buFont typeface="Wingdings" panose="05000000000000000000" pitchFamily="2" charset="2"/>
-              <a:buChar char="§"/>
-            </a:pPr>
-            <a:r>
-              <a:rPr lang="ko-KR" altLang="en-US" sz="800" dirty="0"/>
-              <a:t>응급</a:t>
-            </a:r>
-            <a:r>
-              <a:rPr lang="en-US" altLang="ko-KR" sz="800" dirty="0"/>
-              <a:t>(10): </a:t>
-            </a:r>
-            <a:r>
-              <a:rPr lang="ko-KR" altLang="en-US" sz="800" b="1" dirty="0"/>
-              <a:t>“</a:t>
-            </a:r>
-            <a:r>
-              <a:rPr lang="en-US" altLang="ko-KR" sz="800" b="1" dirty="0"/>
-              <a:t>10</a:t>
-            </a:r>
-            <a:r>
-              <a:rPr lang="ko-KR" altLang="en-US" sz="800" b="1" dirty="0"/>
-              <a:t>은 전화 먼저 → 끝나면 </a:t>
-            </a:r>
-            <a:r>
-              <a:rPr lang="en-US" altLang="ko-KR" sz="800" b="1" dirty="0"/>
-              <a:t>A 1</a:t>
-            </a:r>
-            <a:r>
-              <a:rPr lang="ko-KR" altLang="en-US" sz="800" b="1" dirty="0"/>
-              <a:t>줄 </a:t>
-            </a:r>
-            <a:r>
-              <a:rPr lang="en-US" altLang="ko-KR" sz="800" b="1" dirty="0"/>
-              <a:t>+ D 1</a:t>
-            </a:r>
-            <a:r>
-              <a:rPr lang="ko-KR" altLang="en-US" sz="800" b="1" dirty="0"/>
-              <a:t>줄”</a:t>
-            </a:r>
-            <a:endParaRPr lang="en-US" altLang="ko-KR" sz="800" b="1" dirty="0"/>
-          </a:p>
-          <a:p>
-            <a:pPr marL="171450" indent="-171450">
-              <a:buFont typeface="Wingdings" panose="05000000000000000000" pitchFamily="2" charset="2"/>
-              <a:buChar char="§"/>
-            </a:pPr>
-            <a:endParaRPr lang="ko-KR" altLang="en-US" sz="800" dirty="0">
-              <a:latin typeface="KoPub돋움체 Light" panose="02020603020101020101" pitchFamily="18" charset="-127"/>
-              <a:ea typeface="KoPub돋움체 Light" panose="02020603020101020101" pitchFamily="18" charset="-127"/>
+            <a:pPr algn="ctr"/>
+            <a:r>
+              <a:rPr lang="ko-KR" altLang="en-US" sz="900" dirty="0" err="1">
+                <a:solidFill>
+                  <a:srgbClr val="00B0F0"/>
+                </a:solidFill>
+                <a:latin typeface="KoPub돋움체 Bold" panose="00000800000000000000" pitchFamily="2" charset="-127"/>
+                <a:ea typeface="KoPub돋움체 Bold" panose="00000800000000000000" pitchFamily="2" charset="-127"/>
+              </a:rPr>
+              <a:t>우리가치</a:t>
+            </a:r>
+            <a:r>
+              <a:rPr lang="ko-KR" altLang="en-US" sz="900" dirty="0">
+                <a:solidFill>
+                  <a:schemeClr val="accent1">
+                    <a:lumMod val="50000"/>
+                  </a:schemeClr>
+                </a:solidFill>
+                <a:latin typeface="KoPub돋움체 Bold" panose="02020603020101020101" pitchFamily="18" charset="-127"/>
+                <a:ea typeface="KoPub돋움체 Bold" panose="02020603020101020101" pitchFamily="18" charset="-127"/>
+              </a:rPr>
+              <a:t> </a:t>
+            </a:r>
+            <a:r>
+              <a:rPr lang="en-US" altLang="ko-KR" sz="900" dirty="0" err="1">
+                <a:solidFill>
+                  <a:schemeClr val="accent1">
+                    <a:lumMod val="50000"/>
+                  </a:schemeClr>
+                </a:solidFill>
+                <a:latin typeface="Franklin Gothic Heavy" panose="020B0903020102020204" pitchFamily="34" charset="0"/>
+                <a:ea typeface="KoPub돋움체 Bold" panose="02020603020101020101" pitchFamily="18" charset="-127"/>
+              </a:rPr>
+              <a:t>WeValue</a:t>
+            </a:r>
+            <a:endParaRPr lang="en-US" altLang="ko-KR" sz="900" dirty="0">
+              <a:solidFill>
+                <a:schemeClr val="accent1">
+                  <a:lumMod val="50000"/>
+                </a:schemeClr>
+              </a:solidFill>
+              <a:latin typeface="Franklin Gothic Heavy" panose="020B0903020102020204" pitchFamily="34" charset="0"/>
+              <a:ea typeface="KoPub돋움체 Bold" panose="02020603020101020101" pitchFamily="18" charset="-127"/>
             </a:endParaRPr>
           </a:p>
-          <a:p>
-            <a:pPr marL="171450" indent="-171450">
-              <a:buFont typeface="Wingdings" panose="05000000000000000000" pitchFamily="2" charset="2"/>
-              <a:buChar char="§"/>
-            </a:pPr>
-            <a:r>
-              <a:rPr lang="ko-KR" altLang="en-US" sz="800" dirty="0" err="1"/>
-              <a:t>정보성</a:t>
-            </a:r>
-            <a:r>
-              <a:rPr lang="en-US" altLang="ko-KR" sz="800" dirty="0"/>
-              <a:t>(</a:t>
-            </a:r>
-            <a:r>
-              <a:rPr lang="ko-KR" altLang="en-US" sz="800" dirty="0"/>
-              <a:t>입원</a:t>
-            </a:r>
-            <a:r>
-              <a:rPr lang="en-US" altLang="ko-KR" sz="800" dirty="0"/>
-              <a:t>·</a:t>
-            </a:r>
-            <a:r>
-              <a:rPr lang="ko-KR" altLang="en-US" sz="800" dirty="0"/>
-              <a:t>검사</a:t>
-            </a:r>
-            <a:r>
-              <a:rPr lang="en-US" altLang="ko-KR" sz="800" dirty="0"/>
-              <a:t>·</a:t>
-            </a:r>
-            <a:r>
-              <a:rPr lang="ko-KR" altLang="en-US" sz="800" dirty="0" err="1"/>
-              <a:t>자가약</a:t>
-            </a:r>
-            <a:r>
-              <a:rPr lang="en-US" altLang="ko-KR" sz="800" dirty="0"/>
-              <a:t>): </a:t>
-            </a:r>
-            <a:r>
-              <a:rPr lang="ko-KR" altLang="en-US" sz="800" b="1" dirty="0"/>
-              <a:t>“</a:t>
-            </a:r>
-            <a:r>
-              <a:rPr lang="en-US" altLang="ko-KR" sz="800" b="1" dirty="0"/>
-              <a:t>A(</a:t>
-            </a:r>
-            <a:r>
-              <a:rPr lang="ko-KR" altLang="en-US" sz="800" b="1" dirty="0"/>
-              <a:t>보고</a:t>
-            </a:r>
-            <a:r>
-              <a:rPr lang="en-US" altLang="ko-KR" sz="800" b="1" dirty="0"/>
-              <a:t>)/12 → D(</a:t>
-            </a:r>
-            <a:r>
-              <a:rPr lang="ko-KR" altLang="en-US" sz="800" b="1" dirty="0"/>
-              <a:t>확인완료</a:t>
-            </a:r>
-            <a:r>
-              <a:rPr lang="en-US" altLang="ko-KR" sz="800" b="1" dirty="0"/>
-              <a:t>)”</a:t>
-            </a:r>
-          </a:p>
-          <a:p>
-            <a:pPr marL="171450" indent="-171450">
-              <a:buFont typeface="Wingdings" panose="05000000000000000000" pitchFamily="2" charset="2"/>
-              <a:buChar char="§"/>
-            </a:pPr>
-            <a:endParaRPr lang="ko-KR" altLang="en-US" sz="800" dirty="0">
-              <a:latin typeface="KoPub돋움체 Light" panose="02020603020101020101" pitchFamily="18" charset="-127"/>
-              <a:ea typeface="KoPub돋움체 Light" panose="02020603020101020101" pitchFamily="18" charset="-127"/>
-            </a:endParaRPr>
-          </a:p>
-          <a:p>
-            <a:pPr marL="171450" indent="-171450">
-              <a:buFont typeface="Wingdings" panose="05000000000000000000" pitchFamily="2" charset="2"/>
-              <a:buChar char="§"/>
-            </a:pPr>
-            <a:r>
-              <a:rPr lang="ko-KR" altLang="en-US" sz="800" dirty="0"/>
-              <a:t>도움</a:t>
-            </a:r>
-            <a:r>
-              <a:rPr lang="en-US" altLang="ko-KR" sz="800" dirty="0"/>
-              <a:t>·</a:t>
-            </a:r>
-            <a:r>
-              <a:rPr lang="ko-KR" altLang="en-US" sz="800" dirty="0"/>
-              <a:t>교육요청</a:t>
-            </a:r>
-            <a:r>
-              <a:rPr lang="en-US" altLang="ko-KR" sz="800" dirty="0"/>
-              <a:t>: </a:t>
-            </a:r>
-            <a:r>
-              <a:rPr lang="ko-KR" altLang="en-US" sz="800" b="1" dirty="0"/>
-              <a:t>“</a:t>
-            </a:r>
-            <a:r>
-              <a:rPr lang="en-US" altLang="ko-KR" sz="800" b="1" dirty="0"/>
-              <a:t>QR → </a:t>
-            </a:r>
-            <a:r>
-              <a:rPr lang="ko-KR" altLang="en-US" sz="800" b="1" dirty="0"/>
-              <a:t>배움의 창구</a:t>
-            </a:r>
-            <a:r>
-              <a:rPr lang="en-US" altLang="ko-KR" sz="800" b="1" dirty="0"/>
-              <a:t> (ON Demand)”</a:t>
-            </a:r>
-          </a:p>
-          <a:p>
-            <a:pPr marL="171450" indent="-171450">
-              <a:buFont typeface="Wingdings" panose="05000000000000000000" pitchFamily="2" charset="2"/>
-              <a:buChar char="§"/>
-            </a:pPr>
-            <a:endParaRPr lang="en-US" altLang="ko-KR" sz="800" b="1" dirty="0"/>
-          </a:p>
-          <a:p>
-            <a:pPr marL="171450" indent="-171450">
-              <a:buFont typeface="Wingdings" panose="05000000000000000000" pitchFamily="2" charset="2"/>
-              <a:buChar char="§"/>
-            </a:pPr>
-            <a:r>
-              <a:rPr lang="ko-KR" altLang="en-US" sz="800" dirty="0" err="1"/>
-              <a:t>익명함</a:t>
-            </a:r>
-            <a:r>
-              <a:rPr lang="en-US" altLang="ko-KR" sz="800" dirty="0"/>
-              <a:t>·</a:t>
-            </a:r>
-            <a:r>
-              <a:rPr lang="ko-KR" altLang="en-US" sz="800" dirty="0"/>
-              <a:t>칭찬</a:t>
-            </a:r>
-            <a:r>
-              <a:rPr lang="en-US" altLang="ko-KR" sz="800" dirty="0"/>
-              <a:t>: </a:t>
-            </a:r>
-            <a:r>
-              <a:rPr lang="ko-KR" altLang="en-US" sz="800" b="1" dirty="0"/>
-              <a:t>“제안</a:t>
-            </a:r>
-            <a:r>
-              <a:rPr lang="en-US" altLang="ko-KR" sz="800" b="1" dirty="0"/>
-              <a:t>·</a:t>
-            </a:r>
-            <a:r>
-              <a:rPr lang="ko-KR" altLang="en-US" sz="800" b="1" dirty="0"/>
-              <a:t>칭찬은 </a:t>
-            </a:r>
-            <a:r>
-              <a:rPr lang="en-US" altLang="ko-KR" sz="800" b="1" dirty="0"/>
-              <a:t>QR → </a:t>
-            </a:r>
-            <a:r>
-              <a:rPr lang="ko-KR" altLang="en-US" sz="800" b="1" dirty="0"/>
-              <a:t>소통의 광장</a:t>
-            </a:r>
-            <a:r>
-              <a:rPr lang="en-US" altLang="ko-KR" sz="800" b="1" dirty="0"/>
-              <a:t>(</a:t>
-            </a:r>
-            <a:r>
-              <a:rPr lang="ko-KR" altLang="en-US" sz="800" b="1" dirty="0"/>
-              <a:t>존중 톤</a:t>
-            </a:r>
-            <a:r>
-              <a:rPr lang="en-US" altLang="ko-KR" sz="800" b="1" dirty="0"/>
-              <a:t>)”</a:t>
-            </a:r>
-            <a:endParaRPr lang="ko-KR" altLang="en-US" sz="800" dirty="0">
-              <a:latin typeface="KoPub돋움체 Light" panose="02020603020101020101" pitchFamily="18" charset="-127"/>
-              <a:ea typeface="KoPub돋움체 Light" panose="02020603020101020101" pitchFamily="18" charset="-127"/>
-            </a:endParaRPr>
-          </a:p>
-        </p:txBody>
-      </p:sp>
+        </p:txBody>
+      </p:sp>
+      <p:sp>
+        <p:nvSpPr>
+          <p:cNvPr id="8" name="TextBox 7">
+            <a:extLst>
+              <a:ext uri="{FF2B5EF4-FFF2-40B4-BE49-F238E27FC236}">
+                <a16:creationId xmlns:a16="http://schemas.microsoft.com/office/drawing/2014/main" id="{DAA9A54C-F797-44FB-AB3D-27BD433EFBED}"/>
+              </a:ext>
+            </a:extLst>
+          </p:cNvPr>
+          <p:cNvSpPr txBox="1"/>
+          <p:nvPr/>
+        </p:nvSpPr>
+        <p:spPr>
+          <a:xfrm>
+            <a:off x="924433" y="816061"/>
+            <a:ext cx="1292341" cy="169277"/>
+          </a:xfrm>
+          <a:prstGeom prst="rect">
+            <a:avLst/>
+          </a:prstGeom>
+          <a:noFill/>
+        </p:spPr>
+        <p:txBody>
+          <a:bodyPr wrap="none">
+            <a:spAutoFit/>
+          </a:bodyPr>
+          <a:lstStyle/>
+          <a:p>
+            <a:pPr algn="ctr"/>
+            <a:r>
+              <a:rPr lang="en-US" altLang="ko-KR" sz="500" b="1" dirty="0">
+                <a:latin typeface="KoPub돋움체 Bold" panose="00000800000000000000" pitchFamily="2" charset="-127"/>
+                <a:ea typeface="KoPub돋움체 Bold" panose="00000800000000000000" pitchFamily="2" charset="-127"/>
+              </a:rPr>
+              <a:t>[</a:t>
+            </a:r>
+            <a:r>
+              <a:rPr lang="ko-KR" altLang="en-US" sz="500" b="1" dirty="0">
+                <a:latin typeface="KoPub돋움체 Bold" panose="00000800000000000000" pitchFamily="2" charset="-127"/>
+                <a:ea typeface="KoPub돋움체 Bold" panose="00000800000000000000" pitchFamily="2" charset="-127"/>
+              </a:rPr>
+              <a:t>우리가 가치를 만드는 공간</a:t>
+            </a:r>
+            <a:r>
+              <a:rPr lang="en-US" altLang="ko-KR" sz="500" b="1" dirty="0">
+                <a:latin typeface="KoPub돋움체 Bold" panose="00000800000000000000" pitchFamily="2" charset="-127"/>
+                <a:ea typeface="KoPub돋움체 Bold" panose="00000800000000000000" pitchFamily="2" charset="-127"/>
+              </a:rPr>
+              <a:t>, </a:t>
+            </a:r>
+            <a:r>
+              <a:rPr lang="ko-KR" altLang="en-US" sz="500" b="1" dirty="0" err="1">
+                <a:latin typeface="KoPub돋움체 Bold" panose="00000800000000000000" pitchFamily="2" charset="-127"/>
+                <a:ea typeface="KoPub돋움체 Bold" panose="00000800000000000000" pitchFamily="2" charset="-127"/>
+              </a:rPr>
+              <a:t>우리가치</a:t>
+            </a:r>
+            <a:r>
+              <a:rPr lang="ko-KR" altLang="en-US" sz="500" b="1" dirty="0">
+                <a:latin typeface="KoPub돋움체 Bold" panose="00000800000000000000" pitchFamily="2" charset="-127"/>
+                <a:ea typeface="KoPub돋움체 Bold" panose="00000800000000000000" pitchFamily="2" charset="-127"/>
+              </a:rPr>
+              <a:t> 허브</a:t>
+            </a:r>
+            <a:r>
+              <a:rPr lang="en-US" altLang="ko-KR" sz="500" b="1" dirty="0">
+                <a:latin typeface="KoPub돋움체 Bold" panose="00000800000000000000" pitchFamily="2" charset="-127"/>
+                <a:ea typeface="KoPub돋움체 Bold" panose="00000800000000000000" pitchFamily="2" charset="-127"/>
+              </a:rPr>
+              <a:t>]</a:t>
+            </a:r>
+          </a:p>
+        </p:txBody>
+      </p:sp>
+      <p:pic>
+        <p:nvPicPr>
+          <p:cNvPr id="9" name="그림 8">
+            <a:extLst>
+              <a:ext uri="{FF2B5EF4-FFF2-40B4-BE49-F238E27FC236}">
+                <a16:creationId xmlns:a16="http://schemas.microsoft.com/office/drawing/2014/main" id="{F3A7A373-FECD-4243-98D0-B228302974CA}"/>
+              </a:ext>
+            </a:extLst>
+          </p:cNvPr>
+          <p:cNvPicPr>
+            <a:picLocks noChangeAspect="1"/>
+          </p:cNvPicPr>
+          <p:nvPr/>
+        </p:nvPicPr>
+        <p:blipFill>
+          <a:blip r:embed="rId3"/>
+          <a:stretch>
+            <a:fillRect/>
+          </a:stretch>
+        </p:blipFill>
+        <p:spPr>
+          <a:xfrm>
+            <a:off x="906821" y="714131"/>
+            <a:ext cx="147416" cy="128728"/>
+          </a:xfrm>
+          <a:prstGeom prst="rect">
+            <a:avLst/>
+          </a:prstGeom>
+        </p:spPr>
+      </p:pic>
+      <p:pic>
+        <p:nvPicPr>
+          <p:cNvPr id="11" name="그림 10">
+            <a:extLst>
+              <a:ext uri="{FF2B5EF4-FFF2-40B4-BE49-F238E27FC236}">
+                <a16:creationId xmlns:a16="http://schemas.microsoft.com/office/drawing/2014/main" id="{25D16522-22F0-487F-BE90-3035E8C29235}"/>
+              </a:ext>
+            </a:extLst>
+          </p:cNvPr>
+          <p:cNvPicPr>
+            <a:picLocks noChangeAspect="1"/>
+          </p:cNvPicPr>
+          <p:nvPr/>
+        </p:nvPicPr>
+        <p:blipFill>
+          <a:blip r:embed="rId3"/>
+          <a:stretch>
+            <a:fillRect/>
+          </a:stretch>
+        </p:blipFill>
+        <p:spPr>
+          <a:xfrm rot="10800000">
+            <a:off x="2054114" y="719539"/>
+            <a:ext cx="147414" cy="128728"/>
+          </a:xfrm>
+          <a:prstGeom prst="rect">
+            <a:avLst/>
+          </a:prstGeom>
+        </p:spPr>
+      </p:pic>
     </p:spTree>
     <p:extLst>
       <p:ext uri="{BB962C8B-B14F-4D97-AF65-F5344CB8AC3E}">
@@ -5515,6 +5368,146 @@
 </file>
 
 <file path=ppt/slides/slide3.xml><?xml version="1.0" encoding="utf-8"?>
+<p:sld xmlns:a="http://schemas.openxmlformats.org/drawingml/2006/main" xmlns:r="http://schemas.openxmlformats.org/officeDocument/2006/relationships" xmlns:p="http://schemas.openxmlformats.org/presentationml/2006/main">
+  <p:cSld>
+    <p:spTree>
+      <p:nvGrpSpPr>
+        <p:cNvPr id="1" name="">
+          <a:extLst>
+            <a:ext uri="{FF2B5EF4-FFF2-40B4-BE49-F238E27FC236}">
+              <a16:creationId xmlns:a16="http://schemas.microsoft.com/office/drawing/2014/main" id="{4B91BF69-B73E-E52D-A273-34695C83C39D}"/>
+            </a:ext>
+          </a:extLst>
+        </p:cNvPr>
+        <p:cNvGrpSpPr/>
+        <p:nvPr/>
+      </p:nvGrpSpPr>
+      <p:grpSpPr>
+        <a:xfrm>
+          <a:off x="0" y="0"/>
+          <a:ext cx="0" cy="0"/>
+          <a:chOff x="0" y="0"/>
+          <a:chExt cx="0" cy="0"/>
+        </a:xfrm>
+      </p:grpSpPr>
+      <p:pic>
+        <p:nvPicPr>
+          <p:cNvPr id="4" name="Picture 1">
+            <a:extLst>
+              <a:ext uri="{FF2B5EF4-FFF2-40B4-BE49-F238E27FC236}">
+                <a16:creationId xmlns:a16="http://schemas.microsoft.com/office/drawing/2014/main" id="{480AF66F-CB5C-451A-847A-EB60BA58025A}"/>
+              </a:ext>
+            </a:extLst>
+          </p:cNvPr>
+          <p:cNvPicPr>
+            <a:picLocks noChangeAspect="1"/>
+          </p:cNvPicPr>
+          <p:nvPr/>
+        </p:nvPicPr>
+        <p:blipFill>
+          <a:blip r:embed="rId2"/>
+          <a:stretch>
+            <a:fillRect/>
+          </a:stretch>
+        </p:blipFill>
+        <p:spPr>
+          <a:xfrm>
+            <a:off x="844058" y="798592"/>
+            <a:ext cx="359069" cy="203042"/>
+          </a:xfrm>
+          <a:prstGeom prst="rect">
+            <a:avLst/>
+          </a:prstGeom>
+          <a:noFill/>
+          <a:ln>
+            <a:noFill/>
+          </a:ln>
+          <a:effectLst/>
+        </p:spPr>
+      </p:pic>
+      <p:sp>
+        <p:nvSpPr>
+          <p:cNvPr id="5" name="TextBox 4">
+            <a:extLst>
+              <a:ext uri="{FF2B5EF4-FFF2-40B4-BE49-F238E27FC236}">
+                <a16:creationId xmlns:a16="http://schemas.microsoft.com/office/drawing/2014/main" id="{5D20D6DC-7FD8-414D-8D41-7397E6AB51D5}"/>
+              </a:ext>
+            </a:extLst>
+          </p:cNvPr>
+          <p:cNvSpPr txBox="1"/>
+          <p:nvPr/>
+        </p:nvSpPr>
+        <p:spPr>
+          <a:xfrm>
+            <a:off x="1151732" y="815475"/>
+            <a:ext cx="1247775" cy="169277"/>
+          </a:xfrm>
+          <a:prstGeom prst="rect">
+            <a:avLst/>
+          </a:prstGeom>
+          <a:noFill/>
+        </p:spPr>
+        <p:txBody>
+          <a:bodyPr wrap="square" rtlCol="0">
+            <a:spAutoFit/>
+          </a:bodyPr>
+          <a:lstStyle/>
+          <a:p>
+            <a:pPr algn="ctr"/>
+            <a:r>
+              <a:rPr lang="ko-KR" altLang="en-US" sz="500" b="1" dirty="0">
+                <a:solidFill>
+                  <a:srgbClr val="4472C4"/>
+                </a:solidFill>
+                <a:latin typeface="KoPub돋움체 Bold" panose="02020603020101020101" pitchFamily="18" charset="-127"/>
+                <a:ea typeface="KoPub돋움체 Bold" panose="02020603020101020101" pitchFamily="18" charset="-127"/>
+              </a:rPr>
+              <a:t>순천향대학교 천안병원 </a:t>
+            </a:r>
+            <a:r>
+              <a:rPr lang="en-US" altLang="ko-KR" sz="500" b="1" dirty="0">
+                <a:solidFill>
+                  <a:srgbClr val="4472C4"/>
+                </a:solidFill>
+                <a:latin typeface="KoPub돋움체 Bold" panose="02020603020101020101" pitchFamily="18" charset="-127"/>
+                <a:ea typeface="KoPub돋움체 Bold" panose="02020603020101020101" pitchFamily="18" charset="-127"/>
+              </a:rPr>
+              <a:t>| </a:t>
+            </a:r>
+            <a:r>
+              <a:rPr lang="ko-KR" altLang="en-US" sz="500" b="1" dirty="0">
+                <a:solidFill>
+                  <a:srgbClr val="4472C4"/>
+                </a:solidFill>
+                <a:latin typeface="KoPub돋움체 Bold" panose="02020603020101020101" pitchFamily="18" charset="-127"/>
+                <a:ea typeface="KoPub돋움체 Bold" panose="02020603020101020101" pitchFamily="18" charset="-127"/>
+              </a:rPr>
+              <a:t>진료지원간호팀</a:t>
+            </a:r>
+            <a:endParaRPr lang="ko-KR" altLang="en-US" sz="600" b="1" dirty="0">
+              <a:solidFill>
+                <a:srgbClr val="4472C4"/>
+              </a:solidFill>
+              <a:latin typeface="KoPub돋움체 Bold" panose="02020603020101020101" pitchFamily="18" charset="-127"/>
+              <a:ea typeface="KoPub돋움체 Bold" panose="02020603020101020101" pitchFamily="18" charset="-127"/>
+            </a:endParaRPr>
+          </a:p>
+        </p:txBody>
+      </p:sp>
+    </p:spTree>
+    <p:extLst>
+      <p:ext uri="{BB962C8B-B14F-4D97-AF65-F5344CB8AC3E}">
+        <p14:creationId xmlns:p14="http://schemas.microsoft.com/office/powerpoint/2010/main" val="1389512356"/>
+      </p:ext>
+    </p:extLst>
+  </p:cSld>
+  <p:clrMapOvr>
+    <a:masterClrMapping/>
+  </p:clrMapOvr>
+</p:sld>
+</file>
+
+<file path=ppt/slides/slide4.xml><?xml version="1.0" encoding="utf-8"?>
 <p:sld xmlns:a="http://schemas.openxmlformats.org/drawingml/2006/main" xmlns:r="http://schemas.openxmlformats.org/officeDocument/2006/relationships" xmlns:p="http://schemas.openxmlformats.org/presentationml/2006/main">
   <p:cSld>
     <p:spTree>
@@ -6933,7 +6926,7 @@
 </p:sld>
 </file>
 
-<file path=ppt/slides/slide4.xml><?xml version="1.0" encoding="utf-8"?>
+<file path=ppt/slides/slide5.xml><?xml version="1.0" encoding="utf-8"?>
 <p:sld xmlns:a="http://schemas.openxmlformats.org/drawingml/2006/main" xmlns:r="http://schemas.openxmlformats.org/officeDocument/2006/relationships" xmlns:p="http://schemas.openxmlformats.org/presentationml/2006/main">
   <p:cSld>
     <p:spTree>
@@ -7368,7 +7361,7 @@
 </p:sld>
 </file>
 
-<file path=ppt/slides/slide5.xml><?xml version="1.0" encoding="utf-8"?>
+<file path=ppt/slides/slide6.xml><?xml version="1.0" encoding="utf-8"?>
 <p:sld xmlns:a="http://schemas.openxmlformats.org/drawingml/2006/main" xmlns:r="http://schemas.openxmlformats.org/officeDocument/2006/relationships" xmlns:p="http://schemas.openxmlformats.org/presentationml/2006/main">
   <p:cSld>
     <p:spTree>
@@ -8866,7 +8859,7 @@
 </p:sld>
 </file>
 
-<file path=ppt/slides/slide6.xml><?xml version="1.0" encoding="utf-8"?>
+<file path=ppt/slides/slide7.xml><?xml version="1.0" encoding="utf-8"?>
 <p:sld xmlns:a="http://schemas.openxmlformats.org/drawingml/2006/main" xmlns:r="http://schemas.openxmlformats.org/officeDocument/2006/relationships" xmlns:p="http://schemas.openxmlformats.org/presentationml/2006/main">
   <p:cSld>
     <p:spTree>

--- a/documents/명함제작/4.  [2026 우리가치(WeValue) QI 활동 프로젝트 명함.pptx
+++ b/documents/명함제작/4.  [2026 우리가치(WeValue) QI 활동 프로젝트 명함.pptx
@@ -5,7 +5,7 @@
     <p:sldMasterId id="2147483870" r:id="rId1"/>
   </p:sldMasterIdLst>
   <p:notesMasterIdLst>
-    <p:notesMasterId r:id="rId9"/>
+    <p:notesMasterId r:id="rId13"/>
   </p:notesMasterIdLst>
   <p:sldIdLst>
     <p:sldId id="265" r:id="rId2"/>
@@ -15,6 +15,10 @@
     <p:sldId id="300" r:id="rId6"/>
     <p:sldId id="306" r:id="rId7"/>
     <p:sldId id="305" r:id="rId8"/>
+    <p:sldId id="270" r:id="rId9"/>
+    <p:sldId id="309" r:id="rId10"/>
+    <p:sldId id="310" r:id="rId11"/>
+    <p:sldId id="313" r:id="rId12"/>
   </p:sldIdLst>
   <p:sldSz cx="3240088" cy="1800225"/>
   <p:notesSz cx="6858000" cy="9945688"/>
@@ -152,6 +156,48 @@
 </p:presentation>
 </file>
 
+<file path=ppt/changesInfos/changesInfo1.xml><?xml version="1.0" encoding="utf-8"?>
+<pc:chgInfo xmlns:a="http://schemas.openxmlformats.org/drawingml/2006/main" xmlns:r="http://schemas.openxmlformats.org/officeDocument/2006/relationships" xmlns:ac="http://schemas.microsoft.com/office/drawing/2013/main/command" xmlns:pc="http://schemas.microsoft.com/office/powerpoint/2013/main/command">
+  <pc:docChgLst>
+    <pc:chgData name="민민 성" userId="cf1f1df607fbac1a" providerId="LiveId" clId="{A06AD6E8-8300-471B-A0FD-B249065C404C}"/>
+    <pc:docChg chg="addSld modSld">
+      <pc:chgData name="민민 성" userId="cf1f1df607fbac1a" providerId="LiveId" clId="{A06AD6E8-8300-471B-A0FD-B249065C404C}" dt="2026-07-11T05:49:34.768" v="3"/>
+      <pc:docMkLst>
+        <pc:docMk/>
+      </pc:docMkLst>
+      <pc:sldChg chg="add">
+        <pc:chgData name="민민 성" userId="cf1f1df607fbac1a" providerId="LiveId" clId="{A06AD6E8-8300-471B-A0FD-B249065C404C}" dt="2026-07-11T05:49:00.696" v="0"/>
+        <pc:sldMkLst>
+          <pc:docMk/>
+          <pc:sldMk cId="4063746640" sldId="270"/>
+        </pc:sldMkLst>
+      </pc:sldChg>
+      <pc:sldChg chg="add">
+        <pc:chgData name="민민 성" userId="cf1f1df607fbac1a" providerId="LiveId" clId="{A06AD6E8-8300-471B-A0FD-B249065C404C}" dt="2026-07-11T05:49:09.602" v="1"/>
+        <pc:sldMkLst>
+          <pc:docMk/>
+          <pc:sldMk cId="3763487974" sldId="309"/>
+        </pc:sldMkLst>
+      </pc:sldChg>
+      <pc:sldChg chg="add">
+        <pc:chgData name="민민 성" userId="cf1f1df607fbac1a" providerId="LiveId" clId="{A06AD6E8-8300-471B-A0FD-B249065C404C}" dt="2026-07-11T05:49:26.121" v="2"/>
+        <pc:sldMkLst>
+          <pc:docMk/>
+          <pc:sldMk cId="800420621" sldId="310"/>
+        </pc:sldMkLst>
+      </pc:sldChg>
+      <pc:sldChg chg="add">
+        <pc:chgData name="민민 성" userId="cf1f1df607fbac1a" providerId="LiveId" clId="{A06AD6E8-8300-471B-A0FD-B249065C404C}" dt="2026-07-11T05:49:34.768" v="3"/>
+        <pc:sldMkLst>
+          <pc:docMk/>
+          <pc:sldMk cId="2147805790" sldId="313"/>
+        </pc:sldMkLst>
+      </pc:sldChg>
+    </pc:docChg>
+  </pc:docChgLst>
+</pc:chgInfo>
+</file>
+
 <file path=ppt/notesMasters/notesMaster1.xml><?xml version="1.0" encoding="utf-8"?>
 <p:notesMaster xmlns:a="http://schemas.openxmlformats.org/drawingml/2006/main" xmlns:r="http://schemas.openxmlformats.org/officeDocument/2006/relationships" xmlns:p="http://schemas.openxmlformats.org/presentationml/2006/main">
   <p:cSld>
@@ -234,7 +280,7 @@
           <a:p>
             <a:fld id="{F929F65E-AEE7-45C5-814B-4468CAF1E537}" type="datetimeFigureOut">
               <a:rPr lang="ko-KR" altLang="en-US" smtClean="0"/>
-              <a:t>2026-04-29</a:t>
+              <a:t>2026-07-11</a:t>
             </a:fld>
             <a:endParaRPr lang="ko-KR" altLang="en-US"/>
           </a:p>
@@ -632,7 +678,7 @@
           <a:p>
             <a:fld id="{149F34B4-7175-41BD-B98B-2E7021201D7D}" type="datetimeFigureOut">
               <a:rPr lang="ko-KR" altLang="en-US" smtClean="0"/>
-              <a:t>2026-04-29</a:t>
+              <a:t>2026-07-11</a:t>
             </a:fld>
             <a:endParaRPr lang="ko-KR" altLang="en-US"/>
           </a:p>
@@ -802,7 +848,7 @@
           <a:p>
             <a:fld id="{149F34B4-7175-41BD-B98B-2E7021201D7D}" type="datetimeFigureOut">
               <a:rPr lang="ko-KR" altLang="en-US" smtClean="0"/>
-              <a:t>2026-04-29</a:t>
+              <a:t>2026-07-11</a:t>
             </a:fld>
             <a:endParaRPr lang="ko-KR" altLang="en-US"/>
           </a:p>
@@ -982,7 +1028,7 @@
           <a:p>
             <a:fld id="{149F34B4-7175-41BD-B98B-2E7021201D7D}" type="datetimeFigureOut">
               <a:rPr lang="ko-KR" altLang="en-US" smtClean="0"/>
-              <a:t>2026-04-29</a:t>
+              <a:t>2026-07-11</a:t>
             </a:fld>
             <a:endParaRPr lang="ko-KR" altLang="en-US"/>
           </a:p>
@@ -1891,7 +1937,7 @@
           <a:p>
             <a:fld id="{149F34B4-7175-41BD-B98B-2E7021201D7D}" type="datetimeFigureOut">
               <a:rPr lang="ko-KR" altLang="en-US" smtClean="0"/>
-              <a:t>2026-04-29</a:t>
+              <a:t>2026-07-11</a:t>
             </a:fld>
             <a:endParaRPr lang="ko-KR" altLang="en-US"/>
           </a:p>
@@ -2137,7 +2183,7 @@
           <a:p>
             <a:fld id="{149F34B4-7175-41BD-B98B-2E7021201D7D}" type="datetimeFigureOut">
               <a:rPr lang="ko-KR" altLang="en-US" smtClean="0"/>
-              <a:t>2026-04-29</a:t>
+              <a:t>2026-07-11</a:t>
             </a:fld>
             <a:endParaRPr lang="ko-KR" altLang="en-US"/>
           </a:p>
@@ -2369,7 +2415,7 @@
           <a:p>
             <a:fld id="{149F34B4-7175-41BD-B98B-2E7021201D7D}" type="datetimeFigureOut">
               <a:rPr lang="ko-KR" altLang="en-US" smtClean="0"/>
-              <a:t>2026-04-29</a:t>
+              <a:t>2026-07-11</a:t>
             </a:fld>
             <a:endParaRPr lang="ko-KR" altLang="en-US"/>
           </a:p>
@@ -2736,7 +2782,7 @@
           <a:p>
             <a:fld id="{149F34B4-7175-41BD-B98B-2E7021201D7D}" type="datetimeFigureOut">
               <a:rPr lang="ko-KR" altLang="en-US" smtClean="0"/>
-              <a:t>2026-04-29</a:t>
+              <a:t>2026-07-11</a:t>
             </a:fld>
             <a:endParaRPr lang="ko-KR" altLang="en-US"/>
           </a:p>
@@ -2854,7 +2900,7 @@
           <a:p>
             <a:fld id="{149F34B4-7175-41BD-B98B-2E7021201D7D}" type="datetimeFigureOut">
               <a:rPr lang="ko-KR" altLang="en-US" smtClean="0"/>
-              <a:t>2026-04-29</a:t>
+              <a:t>2026-07-11</a:t>
             </a:fld>
             <a:endParaRPr lang="ko-KR" altLang="en-US"/>
           </a:p>
@@ -2949,7 +2995,7 @@
           <a:p>
             <a:fld id="{149F34B4-7175-41BD-B98B-2E7021201D7D}" type="datetimeFigureOut">
               <a:rPr lang="ko-KR" altLang="en-US" smtClean="0"/>
-              <a:t>2026-04-29</a:t>
+              <a:t>2026-07-11</a:t>
             </a:fld>
             <a:endParaRPr lang="ko-KR" altLang="en-US"/>
           </a:p>
@@ -3226,7 +3272,7 @@
           <a:p>
             <a:fld id="{149F34B4-7175-41BD-B98B-2E7021201D7D}" type="datetimeFigureOut">
               <a:rPr lang="ko-KR" altLang="en-US" smtClean="0"/>
-              <a:t>2026-04-29</a:t>
+              <a:t>2026-07-11</a:t>
             </a:fld>
             <a:endParaRPr lang="ko-KR" altLang="en-US"/>
           </a:p>
@@ -3483,7 +3529,7 @@
           <a:p>
             <a:fld id="{149F34B4-7175-41BD-B98B-2E7021201D7D}" type="datetimeFigureOut">
               <a:rPr lang="ko-KR" altLang="en-US" smtClean="0"/>
-              <a:t>2026-04-29</a:t>
+              <a:t>2026-07-11</a:t>
             </a:fld>
             <a:endParaRPr lang="ko-KR" altLang="en-US"/>
           </a:p>
@@ -3696,7 +3742,7 @@
           <a:p>
             <a:fld id="{149F34B4-7175-41BD-B98B-2E7021201D7D}" type="datetimeFigureOut">
               <a:rPr lang="ko-KR" altLang="en-US" smtClean="0"/>
-              <a:t>2026-04-29</a:t>
+              <a:t>2026-07-11</a:t>
             </a:fld>
             <a:endParaRPr lang="ko-KR" altLang="en-US"/>
           </a:p>
@@ -5018,6 +5064,1305 @@
 </p:sld>
 </file>
 
+<file path=ppt/slides/slide10.xml><?xml version="1.0" encoding="utf-8"?>
+<p:sld xmlns:a="http://schemas.openxmlformats.org/drawingml/2006/main" xmlns:r="http://schemas.openxmlformats.org/officeDocument/2006/relationships" xmlns:p="http://schemas.openxmlformats.org/presentationml/2006/main">
+  <p:cSld>
+    <p:spTree>
+      <p:nvGrpSpPr>
+        <p:cNvPr id="1" name="">
+          <a:extLst>
+            <a:ext uri="{FF2B5EF4-FFF2-40B4-BE49-F238E27FC236}">
+              <a16:creationId xmlns:a16="http://schemas.microsoft.com/office/drawing/2014/main" id="{EF66A5B3-163B-6F07-10F6-516CFF5236F4}"/>
+            </a:ext>
+          </a:extLst>
+        </p:cNvPr>
+        <p:cNvGrpSpPr/>
+        <p:nvPr/>
+      </p:nvGrpSpPr>
+      <p:grpSpPr>
+        <a:xfrm>
+          <a:off x="0" y="0"/>
+          <a:ext cx="0" cy="0"/>
+          <a:chOff x="0" y="0"/>
+          <a:chExt cx="0" cy="0"/>
+        </a:xfrm>
+      </p:grpSpPr>
+      <p:sp>
+        <p:nvSpPr>
+          <p:cNvPr id="3" name="TextBox 2">
+            <a:extLst>
+              <a:ext uri="{FF2B5EF4-FFF2-40B4-BE49-F238E27FC236}">
+                <a16:creationId xmlns:a16="http://schemas.microsoft.com/office/drawing/2014/main" id="{1A26FCE8-5EF0-0DF6-F8B5-C649DC205363}"/>
+              </a:ext>
+            </a:extLst>
+          </p:cNvPr>
+          <p:cNvSpPr txBox="1"/>
+          <p:nvPr/>
+        </p:nvSpPr>
+        <p:spPr>
+          <a:xfrm>
+            <a:off x="43499" y="63223"/>
+            <a:ext cx="1403509" cy="184666"/>
+          </a:xfrm>
+          <a:prstGeom prst="rect">
+            <a:avLst/>
+          </a:prstGeom>
+          <a:noFill/>
+        </p:spPr>
+        <p:txBody>
+          <a:bodyPr wrap="square">
+            <a:spAutoFit/>
+          </a:bodyPr>
+          <a:lstStyle/>
+          <a:p>
+            <a:r>
+              <a:rPr lang="ko-KR" altLang="en-US" sz="600" b="1" spc="-11" dirty="0">
+                <a:latin typeface="KoPub돋움체 Bold" panose="00000800000000000000" pitchFamily="2" charset="-127"/>
+                <a:ea typeface="KoPub돋움체 Bold" panose="00000800000000000000" pitchFamily="2" charset="-127"/>
+              </a:rPr>
+              <a:t>순천향대학교 천안병원</a:t>
+            </a:r>
+          </a:p>
+        </p:txBody>
+      </p:sp>
+      <p:grpSp>
+        <p:nvGrpSpPr>
+          <p:cNvPr id="17" name="그룹 16">
+            <a:extLst>
+              <a:ext uri="{FF2B5EF4-FFF2-40B4-BE49-F238E27FC236}">
+                <a16:creationId xmlns:a16="http://schemas.microsoft.com/office/drawing/2014/main" id="{1A49BD73-09B6-9576-4A99-AEFE0F7F42C3}"/>
+              </a:ext>
+            </a:extLst>
+          </p:cNvPr>
+          <p:cNvGrpSpPr/>
+          <p:nvPr/>
+        </p:nvGrpSpPr>
+        <p:grpSpPr>
+          <a:xfrm>
+            <a:off x="2316611" y="149770"/>
+            <a:ext cx="746131" cy="668940"/>
+            <a:chOff x="777945" y="-736888"/>
+            <a:chExt cx="663508" cy="663508"/>
+          </a:xfrm>
+        </p:grpSpPr>
+        <p:pic>
+          <p:nvPicPr>
+            <p:cNvPr id="5" name="그림 4" descr="패턴, 사각형, 예술, 직사각형이(가) 표시된 사진&#10;&#10;AI 생성 콘텐츠는 정확하지 않을 수 있습니다.">
+              <a:extLst>
+                <a:ext uri="{FF2B5EF4-FFF2-40B4-BE49-F238E27FC236}">
+                  <a16:creationId xmlns:a16="http://schemas.microsoft.com/office/drawing/2014/main" id="{237758EC-8039-A3EA-24AD-2B5B0B1F60A1}"/>
+                </a:ext>
+              </a:extLst>
+            </p:cNvPr>
+            <p:cNvPicPr>
+              <a:picLocks noChangeAspect="1"/>
+            </p:cNvPicPr>
+            <p:nvPr/>
+          </p:nvPicPr>
+          <p:blipFill>
+            <a:blip r:embed="rId2"/>
+            <a:stretch>
+              <a:fillRect/>
+            </a:stretch>
+          </p:blipFill>
+          <p:spPr>
+            <a:xfrm>
+              <a:off x="855432" y="-659401"/>
+              <a:ext cx="508534" cy="508534"/>
+            </a:xfrm>
+            <a:prstGeom prst="rect">
+              <a:avLst/>
+            </a:prstGeom>
+          </p:spPr>
+        </p:pic>
+        <p:sp>
+          <p:nvSpPr>
+            <p:cNvPr id="13" name="L 도형 12">
+              <a:extLst>
+                <a:ext uri="{FF2B5EF4-FFF2-40B4-BE49-F238E27FC236}">
+                  <a16:creationId xmlns:a16="http://schemas.microsoft.com/office/drawing/2014/main" id="{1386BAC4-C977-A7C2-6D4E-8D1313D44B3B}"/>
+                </a:ext>
+              </a:extLst>
+            </p:cNvPr>
+            <p:cNvSpPr/>
+            <p:nvPr/>
+          </p:nvSpPr>
+          <p:spPr>
+            <a:xfrm rot="5400000">
+              <a:off x="777945" y="-736887"/>
+              <a:ext cx="154974" cy="154974"/>
+            </a:xfrm>
+            <a:prstGeom prst="corner">
+              <a:avLst>
+                <a:gd name="adj1" fmla="val 24841"/>
+                <a:gd name="adj2" fmla="val 25627"/>
+              </a:avLst>
+            </a:prstGeom>
+            <a:solidFill>
+              <a:schemeClr val="accent1">
+                <a:lumMod val="75000"/>
+              </a:schemeClr>
+            </a:solidFill>
+            <a:ln>
+              <a:noFill/>
+            </a:ln>
+          </p:spPr>
+          <p:style>
+            <a:lnRef idx="2">
+              <a:schemeClr val="accent1">
+                <a:shade val="15000"/>
+              </a:schemeClr>
+            </a:lnRef>
+            <a:fillRef idx="1">
+              <a:schemeClr val="accent1"/>
+            </a:fillRef>
+            <a:effectRef idx="0">
+              <a:schemeClr val="accent1"/>
+            </a:effectRef>
+            <a:fontRef idx="minor">
+              <a:schemeClr val="lt1"/>
+            </a:fontRef>
+          </p:style>
+          <p:txBody>
+            <a:bodyPr rtlCol="0" anchor="ctr"/>
+            <a:lstStyle/>
+            <a:p>
+              <a:pPr algn="ctr"/>
+              <a:endParaRPr lang="ko-KR" altLang="en-US"/>
+            </a:p>
+          </p:txBody>
+        </p:sp>
+        <p:sp>
+          <p:nvSpPr>
+            <p:cNvPr id="14" name="L 도형 13">
+              <a:extLst>
+                <a:ext uri="{FF2B5EF4-FFF2-40B4-BE49-F238E27FC236}">
+                  <a16:creationId xmlns:a16="http://schemas.microsoft.com/office/drawing/2014/main" id="{925A8E91-1465-F155-CE7D-07F92B383DAE}"/>
+                </a:ext>
+              </a:extLst>
+            </p:cNvPr>
+            <p:cNvSpPr/>
+            <p:nvPr/>
+          </p:nvSpPr>
+          <p:spPr>
+            <a:xfrm rot="10800000">
+              <a:off x="1286479" y="-736888"/>
+              <a:ext cx="154974" cy="154974"/>
+            </a:xfrm>
+            <a:prstGeom prst="corner">
+              <a:avLst>
+                <a:gd name="adj1" fmla="val 24841"/>
+                <a:gd name="adj2" fmla="val 25627"/>
+              </a:avLst>
+            </a:prstGeom>
+            <a:solidFill>
+              <a:schemeClr val="accent1">
+                <a:lumMod val="75000"/>
+              </a:schemeClr>
+            </a:solidFill>
+            <a:ln>
+              <a:noFill/>
+            </a:ln>
+          </p:spPr>
+          <p:style>
+            <a:lnRef idx="2">
+              <a:schemeClr val="accent1">
+                <a:shade val="15000"/>
+              </a:schemeClr>
+            </a:lnRef>
+            <a:fillRef idx="1">
+              <a:schemeClr val="accent1"/>
+            </a:fillRef>
+            <a:effectRef idx="0">
+              <a:schemeClr val="accent1"/>
+            </a:effectRef>
+            <a:fontRef idx="minor">
+              <a:schemeClr val="lt1"/>
+            </a:fontRef>
+          </p:style>
+          <p:txBody>
+            <a:bodyPr rtlCol="0" anchor="ctr"/>
+            <a:lstStyle/>
+            <a:p>
+              <a:pPr algn="ctr"/>
+              <a:endParaRPr lang="ko-KR" altLang="en-US"/>
+            </a:p>
+          </p:txBody>
+        </p:sp>
+        <p:sp>
+          <p:nvSpPr>
+            <p:cNvPr id="15" name="L 도형 14">
+              <a:extLst>
+                <a:ext uri="{FF2B5EF4-FFF2-40B4-BE49-F238E27FC236}">
+                  <a16:creationId xmlns:a16="http://schemas.microsoft.com/office/drawing/2014/main" id="{C1BBBB1F-2080-F657-B9D3-EDC41813B5EF}"/>
+                </a:ext>
+              </a:extLst>
+            </p:cNvPr>
+            <p:cNvSpPr/>
+            <p:nvPr/>
+          </p:nvSpPr>
+          <p:spPr>
+            <a:xfrm>
+              <a:off x="777945" y="-228897"/>
+              <a:ext cx="154974" cy="154974"/>
+            </a:xfrm>
+            <a:prstGeom prst="corner">
+              <a:avLst>
+                <a:gd name="adj1" fmla="val 24841"/>
+                <a:gd name="adj2" fmla="val 25627"/>
+              </a:avLst>
+            </a:prstGeom>
+            <a:solidFill>
+              <a:schemeClr val="accent1">
+                <a:lumMod val="75000"/>
+              </a:schemeClr>
+            </a:solidFill>
+            <a:ln>
+              <a:noFill/>
+            </a:ln>
+          </p:spPr>
+          <p:style>
+            <a:lnRef idx="2">
+              <a:schemeClr val="accent1">
+                <a:shade val="15000"/>
+              </a:schemeClr>
+            </a:lnRef>
+            <a:fillRef idx="1">
+              <a:schemeClr val="accent1"/>
+            </a:fillRef>
+            <a:effectRef idx="0">
+              <a:schemeClr val="accent1"/>
+            </a:effectRef>
+            <a:fontRef idx="minor">
+              <a:schemeClr val="lt1"/>
+            </a:fontRef>
+          </p:style>
+          <p:txBody>
+            <a:bodyPr rtlCol="0" anchor="ctr"/>
+            <a:lstStyle/>
+            <a:p>
+              <a:pPr algn="ctr"/>
+              <a:endParaRPr lang="ko-KR" altLang="en-US"/>
+            </a:p>
+          </p:txBody>
+        </p:sp>
+        <p:sp>
+          <p:nvSpPr>
+            <p:cNvPr id="16" name="L 도형 15">
+              <a:extLst>
+                <a:ext uri="{FF2B5EF4-FFF2-40B4-BE49-F238E27FC236}">
+                  <a16:creationId xmlns:a16="http://schemas.microsoft.com/office/drawing/2014/main" id="{C255AB45-9E19-5135-2840-6E83A0CEA2B5}"/>
+                </a:ext>
+              </a:extLst>
+            </p:cNvPr>
+            <p:cNvSpPr/>
+            <p:nvPr/>
+          </p:nvSpPr>
+          <p:spPr>
+            <a:xfrm rot="16200000">
+              <a:off x="1286479" y="-228354"/>
+              <a:ext cx="154974" cy="154974"/>
+            </a:xfrm>
+            <a:prstGeom prst="corner">
+              <a:avLst>
+                <a:gd name="adj1" fmla="val 24841"/>
+                <a:gd name="adj2" fmla="val 25627"/>
+              </a:avLst>
+            </a:prstGeom>
+            <a:solidFill>
+              <a:schemeClr val="accent1">
+                <a:lumMod val="75000"/>
+              </a:schemeClr>
+            </a:solidFill>
+            <a:ln>
+              <a:noFill/>
+            </a:ln>
+          </p:spPr>
+          <p:style>
+            <a:lnRef idx="2">
+              <a:schemeClr val="accent1">
+                <a:shade val="15000"/>
+              </a:schemeClr>
+            </a:lnRef>
+            <a:fillRef idx="1">
+              <a:schemeClr val="accent1"/>
+            </a:fillRef>
+            <a:effectRef idx="0">
+              <a:schemeClr val="accent1"/>
+            </a:effectRef>
+            <a:fontRef idx="minor">
+              <a:schemeClr val="lt1"/>
+            </a:fontRef>
+          </p:style>
+          <p:txBody>
+            <a:bodyPr rtlCol="0" anchor="ctr"/>
+            <a:lstStyle/>
+            <a:p>
+              <a:pPr algn="ctr"/>
+              <a:endParaRPr lang="ko-KR" altLang="en-US"/>
+            </a:p>
+          </p:txBody>
+        </p:sp>
+      </p:grpSp>
+      <p:grpSp>
+        <p:nvGrpSpPr>
+          <p:cNvPr id="18" name="그룹 17">
+            <a:extLst>
+              <a:ext uri="{FF2B5EF4-FFF2-40B4-BE49-F238E27FC236}">
+                <a16:creationId xmlns:a16="http://schemas.microsoft.com/office/drawing/2014/main" id="{8C3E1EF8-8C3B-A192-11B5-BED425D3D79C}"/>
+              </a:ext>
+            </a:extLst>
+          </p:cNvPr>
+          <p:cNvGrpSpPr/>
+          <p:nvPr/>
+        </p:nvGrpSpPr>
+        <p:grpSpPr>
+          <a:xfrm>
+            <a:off x="131327" y="274768"/>
+            <a:ext cx="1755833" cy="425416"/>
+            <a:chOff x="614240" y="226472"/>
+            <a:chExt cx="1755833" cy="425416"/>
+          </a:xfrm>
+        </p:grpSpPr>
+        <p:sp>
+          <p:nvSpPr>
+            <p:cNvPr id="4" name="TextBox 3">
+              <a:extLst>
+                <a:ext uri="{FF2B5EF4-FFF2-40B4-BE49-F238E27FC236}">
+                  <a16:creationId xmlns:a16="http://schemas.microsoft.com/office/drawing/2014/main" id="{A9D039A7-DA18-313A-AF87-12621352F5CE}"/>
+                </a:ext>
+              </a:extLst>
+            </p:cNvPr>
+            <p:cNvSpPr txBox="1"/>
+            <p:nvPr/>
+          </p:nvSpPr>
+          <p:spPr>
+            <a:xfrm>
+              <a:off x="646605" y="226472"/>
+              <a:ext cx="1681935" cy="307777"/>
+            </a:xfrm>
+            <a:prstGeom prst="rect">
+              <a:avLst/>
+            </a:prstGeom>
+            <a:noFill/>
+          </p:spPr>
+          <p:txBody>
+            <a:bodyPr wrap="none">
+              <a:spAutoFit/>
+            </a:bodyPr>
+            <a:lstStyle/>
+            <a:p>
+              <a:pPr algn="ctr"/>
+              <a:r>
+                <a:rPr lang="ko-KR" altLang="en-US" sz="1400" b="1" dirty="0" err="1">
+                  <a:solidFill>
+                    <a:srgbClr val="00B0F0"/>
+                  </a:solidFill>
+                  <a:latin typeface="Noto Sans KR Black" panose="020B0200000000000000" pitchFamily="50" charset="-127"/>
+                  <a:ea typeface="Noto Sans KR Black" panose="020B0200000000000000" pitchFamily="50" charset="-127"/>
+                </a:rPr>
+                <a:t>우리가치</a:t>
+              </a:r>
+              <a:r>
+                <a:rPr lang="ko-KR" altLang="en-US" sz="1400" dirty="0">
+                  <a:solidFill>
+                    <a:schemeClr val="accent1">
+                      <a:lumMod val="50000"/>
+                    </a:schemeClr>
+                  </a:solidFill>
+                  <a:latin typeface="KoPub돋움체 Bold" panose="02020603020101020101" pitchFamily="18" charset="-127"/>
+                  <a:ea typeface="KoPub돋움체 Bold" panose="02020603020101020101" pitchFamily="18" charset="-127"/>
+                </a:rPr>
+                <a:t> </a:t>
+              </a:r>
+              <a:r>
+                <a:rPr lang="en-US" altLang="ko-KR" sz="1400" dirty="0" err="1">
+                  <a:solidFill>
+                    <a:schemeClr val="bg2">
+                      <a:lumMod val="10000"/>
+                    </a:schemeClr>
+                  </a:solidFill>
+                  <a:latin typeface="Franklin Gothic Heavy" panose="020B0903020102020204" pitchFamily="34" charset="0"/>
+                  <a:ea typeface="KoPub돋움체 Bold" panose="02020603020101020101" pitchFamily="18" charset="-127"/>
+                </a:rPr>
+                <a:t>WeValue</a:t>
+              </a:r>
+              <a:endParaRPr lang="en-US" altLang="ko-KR" sz="1400" dirty="0">
+                <a:solidFill>
+                  <a:schemeClr val="bg2">
+                    <a:lumMod val="10000"/>
+                  </a:schemeClr>
+                </a:solidFill>
+                <a:latin typeface="Franklin Gothic Heavy" panose="020B0903020102020204" pitchFamily="34" charset="0"/>
+                <a:ea typeface="KoPub돋움체 Bold" panose="02020603020101020101" pitchFamily="18" charset="-127"/>
+              </a:endParaRPr>
+            </a:p>
+          </p:txBody>
+        </p:sp>
+        <p:sp>
+          <p:nvSpPr>
+            <p:cNvPr id="6" name="TextBox 5">
+              <a:extLst>
+                <a:ext uri="{FF2B5EF4-FFF2-40B4-BE49-F238E27FC236}">
+                  <a16:creationId xmlns:a16="http://schemas.microsoft.com/office/drawing/2014/main" id="{DEEE7C7E-6934-B627-6EC0-48367D0769B1}"/>
+                </a:ext>
+              </a:extLst>
+            </p:cNvPr>
+            <p:cNvSpPr txBox="1"/>
+            <p:nvPr/>
+          </p:nvSpPr>
+          <p:spPr>
+            <a:xfrm>
+              <a:off x="660262" y="451833"/>
+              <a:ext cx="1654620" cy="200055"/>
+            </a:xfrm>
+            <a:prstGeom prst="rect">
+              <a:avLst/>
+            </a:prstGeom>
+            <a:noFill/>
+          </p:spPr>
+          <p:txBody>
+            <a:bodyPr wrap="none">
+              <a:spAutoFit/>
+            </a:bodyPr>
+            <a:lstStyle/>
+            <a:p>
+              <a:pPr algn="ctr"/>
+              <a:r>
+                <a:rPr lang="en-US" altLang="ko-KR" sz="700" b="1" dirty="0">
+                  <a:latin typeface="KoPub돋움체 Bold" panose="00000800000000000000" pitchFamily="2" charset="-127"/>
+                  <a:ea typeface="KoPub돋움체 Bold" panose="00000800000000000000" pitchFamily="2" charset="-127"/>
+                </a:rPr>
+                <a:t>[</a:t>
+              </a:r>
+              <a:r>
+                <a:rPr lang="ko-KR" altLang="en-US" sz="700" b="1" dirty="0">
+                  <a:latin typeface="KoPub돋움체 Bold" panose="00000800000000000000" pitchFamily="2" charset="-127"/>
+                  <a:ea typeface="KoPub돋움체 Bold" panose="00000800000000000000" pitchFamily="2" charset="-127"/>
+                </a:rPr>
+                <a:t>스마트 소통 약속</a:t>
+              </a:r>
+              <a:r>
+                <a:rPr lang="en-US" altLang="ko-KR" sz="700" b="1" dirty="0">
+                  <a:latin typeface="KoPub돋움체 Bold" panose="00000800000000000000" pitchFamily="2" charset="-127"/>
+                  <a:ea typeface="KoPub돋움체 Bold" panose="00000800000000000000" pitchFamily="2" charset="-127"/>
+                </a:rPr>
+                <a:t>(</a:t>
+              </a:r>
+              <a:r>
+                <a:rPr lang="en-US" altLang="ko-KR" sz="700" b="1" dirty="0" err="1">
+                  <a:latin typeface="KoPub돋움체 Bold" panose="00000800000000000000" pitchFamily="2" charset="-127"/>
+                  <a:ea typeface="KoPub돋움체 Bold" panose="00000800000000000000" pitchFamily="2" charset="-127"/>
+                </a:rPr>
+                <a:t>WeValue</a:t>
+              </a:r>
+              <a:r>
+                <a:rPr lang="en-US" altLang="ko-KR" sz="700" b="1" dirty="0">
+                  <a:latin typeface="KoPub돋움체 Bold" panose="00000800000000000000" pitchFamily="2" charset="-127"/>
+                  <a:ea typeface="KoPub돋움체 Bold" panose="00000800000000000000" pitchFamily="2" charset="-127"/>
+                </a:rPr>
+                <a:t> Promises)]</a:t>
+              </a:r>
+            </a:p>
+          </p:txBody>
+        </p:sp>
+        <p:pic>
+          <p:nvPicPr>
+            <p:cNvPr id="10" name="그림 9">
+              <a:extLst>
+                <a:ext uri="{FF2B5EF4-FFF2-40B4-BE49-F238E27FC236}">
+                  <a16:creationId xmlns:a16="http://schemas.microsoft.com/office/drawing/2014/main" id="{22CDF7ED-65DD-B2AB-0D3A-2876557659C7}"/>
+                </a:ext>
+              </a:extLst>
+            </p:cNvPr>
+            <p:cNvPicPr>
+              <a:picLocks noChangeAspect="1"/>
+            </p:cNvPicPr>
+            <p:nvPr/>
+          </p:nvPicPr>
+          <p:blipFill>
+            <a:blip r:embed="rId3"/>
+            <a:stretch>
+              <a:fillRect/>
+            </a:stretch>
+          </p:blipFill>
+          <p:spPr>
+            <a:xfrm>
+              <a:off x="614240" y="271322"/>
+              <a:ext cx="147416" cy="128728"/>
+            </a:xfrm>
+            <a:prstGeom prst="rect">
+              <a:avLst/>
+            </a:prstGeom>
+          </p:spPr>
+        </p:pic>
+        <p:pic>
+          <p:nvPicPr>
+            <p:cNvPr id="30" name="그림 29">
+              <a:extLst>
+                <a:ext uri="{FF2B5EF4-FFF2-40B4-BE49-F238E27FC236}">
+                  <a16:creationId xmlns:a16="http://schemas.microsoft.com/office/drawing/2014/main" id="{CACE4F19-6C03-B4A0-12DF-B80E74EF21DC}"/>
+                </a:ext>
+              </a:extLst>
+            </p:cNvPr>
+            <p:cNvPicPr>
+              <a:picLocks noChangeAspect="1"/>
+            </p:cNvPicPr>
+            <p:nvPr/>
+          </p:nvPicPr>
+          <p:blipFill>
+            <a:blip r:embed="rId3"/>
+            <a:stretch>
+              <a:fillRect/>
+            </a:stretch>
+          </p:blipFill>
+          <p:spPr>
+            <a:xfrm rot="10800000">
+              <a:off x="2222659" y="276730"/>
+              <a:ext cx="147414" cy="128728"/>
+            </a:xfrm>
+            <a:prstGeom prst="rect">
+              <a:avLst/>
+            </a:prstGeom>
+          </p:spPr>
+        </p:pic>
+      </p:grpSp>
+      <p:sp>
+        <p:nvSpPr>
+          <p:cNvPr id="31" name="TextBox 30">
+            <a:extLst>
+              <a:ext uri="{FF2B5EF4-FFF2-40B4-BE49-F238E27FC236}">
+                <a16:creationId xmlns:a16="http://schemas.microsoft.com/office/drawing/2014/main" id="{8286C7F5-77BB-B584-5E2E-82705B55B19B}"/>
+              </a:ext>
+            </a:extLst>
+          </p:cNvPr>
+          <p:cNvSpPr txBox="1"/>
+          <p:nvPr/>
+        </p:nvSpPr>
+        <p:spPr>
+          <a:xfrm>
+            <a:off x="101100" y="781989"/>
+            <a:ext cx="2258952" cy="786882"/>
+          </a:xfrm>
+          <a:prstGeom prst="rect">
+            <a:avLst/>
+          </a:prstGeom>
+          <a:noFill/>
+        </p:spPr>
+        <p:txBody>
+          <a:bodyPr wrap="none" rtlCol="0">
+            <a:spAutoFit/>
+          </a:bodyPr>
+          <a:lstStyle/>
+          <a:p>
+            <a:pPr marL="88900" indent="-88900">
+              <a:lnSpc>
+                <a:spcPts val="1100"/>
+              </a:lnSpc>
+              <a:buClr>
+                <a:srgbClr val="00B0F0"/>
+              </a:buClr>
+              <a:buFont typeface="Arial" panose="020B0604020202020204" pitchFamily="34" charset="0"/>
+              <a:buChar char="•"/>
+            </a:pPr>
+            <a:r>
+              <a:rPr lang="en-US" altLang="ko-KR" sz="700" b="1" dirty="0">
+                <a:latin typeface="KoPub돋움체 Light" panose="02020603020101020101" pitchFamily="18" charset="-127"/>
+                <a:ea typeface="KoPub돋움체 Light" panose="02020603020101020101" pitchFamily="18" charset="-127"/>
+              </a:rPr>
+              <a:t>[</a:t>
+            </a:r>
+            <a:r>
+              <a:rPr lang="ko-KR" altLang="en-US" sz="700" b="1" dirty="0">
+                <a:latin typeface="KoPub돋움체 Light" panose="02020603020101020101" pitchFamily="18" charset="-127"/>
+                <a:ea typeface="KoPub돋움체 Light" panose="02020603020101020101" pitchFamily="18" charset="-127"/>
+              </a:rPr>
+              <a:t>식별</a:t>
+            </a:r>
+            <a:r>
+              <a:rPr lang="en-US" altLang="ko-KR" sz="700" b="1" dirty="0">
+                <a:latin typeface="KoPub돋움체 Light" panose="02020603020101020101" pitchFamily="18" charset="-127"/>
+                <a:ea typeface="KoPub돋움체 Light" panose="02020603020101020101" pitchFamily="18" charset="-127"/>
+              </a:rPr>
+              <a:t>] </a:t>
+            </a:r>
+            <a:r>
+              <a:rPr lang="ko-KR" altLang="en-US" sz="700" b="1" dirty="0">
+                <a:latin typeface="KoPub돋움체 Light" panose="02020603020101020101" pitchFamily="18" charset="-127"/>
+                <a:ea typeface="KoPub돋움체 Light" panose="02020603020101020101" pitchFamily="18" charset="-127"/>
+              </a:rPr>
+              <a:t>첫머리 </a:t>
+            </a:r>
+            <a:r>
+              <a:rPr lang="en-US" altLang="ko-KR" sz="700" b="1" dirty="0">
+                <a:latin typeface="KoPub돋움체 Light" panose="02020603020101020101" pitchFamily="18" charset="-127"/>
+                <a:ea typeface="KoPub돋움체 Light" panose="02020603020101020101" pitchFamily="18" charset="-127"/>
+              </a:rPr>
+              <a:t>[</a:t>
+            </a:r>
+            <a:r>
+              <a:rPr lang="ko-KR" altLang="en-US" sz="700" b="1" dirty="0">
+                <a:latin typeface="KoPub돋움체 Light" panose="02020603020101020101" pitchFamily="18" charset="-127"/>
+                <a:ea typeface="KoPub돋움체 Light" panose="02020603020101020101" pitchFamily="18" charset="-127"/>
+              </a:rPr>
+              <a:t>병실</a:t>
+            </a:r>
+            <a:r>
+              <a:rPr lang="en-US" altLang="ko-KR" sz="700" b="1" dirty="0">
+                <a:latin typeface="KoPub돋움체 Light" panose="02020603020101020101" pitchFamily="18" charset="-127"/>
+                <a:ea typeface="KoPub돋움체 Light" panose="02020603020101020101" pitchFamily="18" charset="-127"/>
+              </a:rPr>
+              <a:t>/</a:t>
+            </a:r>
+            <a:r>
+              <a:rPr lang="ko-KR" altLang="en-US" sz="700" b="1" dirty="0">
+                <a:latin typeface="KoPub돋움체 Light" panose="02020603020101020101" pitchFamily="18" charset="-127"/>
+                <a:ea typeface="KoPub돋움체 Light" panose="02020603020101020101" pitchFamily="18" charset="-127"/>
+              </a:rPr>
+              <a:t>성함</a:t>
+            </a:r>
+            <a:r>
+              <a:rPr lang="en-US" altLang="ko-KR" sz="700" b="1" dirty="0">
+                <a:latin typeface="KoPub돋움체 Light" panose="02020603020101020101" pitchFamily="18" charset="-127"/>
+                <a:ea typeface="KoPub돋움체 Light" panose="02020603020101020101" pitchFamily="18" charset="-127"/>
+              </a:rPr>
+              <a:t>/</a:t>
+            </a:r>
+            <a:r>
+              <a:rPr lang="ko-KR" altLang="en-US" sz="700" b="1" dirty="0">
+                <a:latin typeface="KoPub돋움체 Light" panose="02020603020101020101" pitchFamily="18" charset="-127"/>
+                <a:ea typeface="KoPub돋움체 Light" panose="02020603020101020101" pitchFamily="18" charset="-127"/>
+              </a:rPr>
+              <a:t>사유</a:t>
+            </a:r>
+            <a:r>
+              <a:rPr lang="en-US" altLang="ko-KR" sz="700" b="1" dirty="0">
+                <a:latin typeface="KoPub돋움체 Light" panose="02020603020101020101" pitchFamily="18" charset="-127"/>
+                <a:ea typeface="KoPub돋움체 Light" panose="02020603020101020101" pitchFamily="18" charset="-127"/>
+              </a:rPr>
+              <a:t>]</a:t>
+            </a:r>
+            <a:r>
+              <a:rPr lang="ko-KR" altLang="en-US" sz="700" b="1" dirty="0">
+                <a:latin typeface="KoPub돋움체 Light" panose="02020603020101020101" pitchFamily="18" charset="-127"/>
+                <a:ea typeface="KoPub돋움체 Light" panose="02020603020101020101" pitchFamily="18" charset="-127"/>
+              </a:rPr>
+              <a:t>필수 기재</a:t>
+            </a:r>
+          </a:p>
+          <a:p>
+            <a:pPr marL="88900" indent="-88900">
+              <a:lnSpc>
+                <a:spcPts val="1100"/>
+              </a:lnSpc>
+              <a:buClr>
+                <a:srgbClr val="00B0F0"/>
+              </a:buClr>
+              <a:buFont typeface="Arial" panose="020B0604020202020204" pitchFamily="34" charset="0"/>
+              <a:buChar char="•"/>
+            </a:pPr>
+            <a:r>
+              <a:rPr lang="en-US" altLang="ko-KR" sz="700" b="1" dirty="0">
+                <a:latin typeface="KoPub돋움체 Light" panose="02020603020101020101" pitchFamily="18" charset="-127"/>
+                <a:ea typeface="KoPub돋움체 Light" panose="02020603020101020101" pitchFamily="18" charset="-127"/>
+              </a:rPr>
+              <a:t>[</a:t>
+            </a:r>
+            <a:r>
+              <a:rPr lang="ko-KR" altLang="en-US" sz="700" b="1" dirty="0">
+                <a:latin typeface="KoPub돋움체 Light" panose="02020603020101020101" pitchFamily="18" charset="-127"/>
+                <a:ea typeface="KoPub돋움체 Light" panose="02020603020101020101" pitchFamily="18" charset="-127"/>
+              </a:rPr>
+              <a:t>공유</a:t>
+            </a:r>
+            <a:r>
+              <a:rPr lang="en-US" altLang="ko-KR" sz="700" b="1" dirty="0">
+                <a:latin typeface="KoPub돋움체 Light" panose="02020603020101020101" pitchFamily="18" charset="-127"/>
+                <a:ea typeface="KoPub돋움체 Light" panose="02020603020101020101" pitchFamily="18" charset="-127"/>
+              </a:rPr>
+              <a:t>] </a:t>
+            </a:r>
+            <a:r>
+              <a:rPr lang="ko-KR" altLang="en-US" sz="700" b="1" dirty="0">
+                <a:latin typeface="KoPub돋움체 Light" panose="02020603020101020101" pitchFamily="18" charset="-127"/>
+                <a:ea typeface="KoPub돋움체 Light" panose="02020603020101020101" pitchFamily="18" charset="-127"/>
+              </a:rPr>
+              <a:t>결정 사항의 </a:t>
+            </a:r>
+            <a:r>
+              <a:rPr lang="ko-KR" altLang="en-US" sz="700" b="1" dirty="0" err="1">
+                <a:latin typeface="KoPub돋움체 Light" panose="02020603020101020101" pitchFamily="18" charset="-127"/>
+                <a:ea typeface="KoPub돋움체 Light" panose="02020603020101020101" pitchFamily="18" charset="-127"/>
+              </a:rPr>
+              <a:t>선제적</a:t>
+            </a:r>
+            <a:r>
+              <a:rPr lang="ko-KR" altLang="en-US" sz="700" b="1" dirty="0">
+                <a:latin typeface="KoPub돋움체 Light" panose="02020603020101020101" pitchFamily="18" charset="-127"/>
+                <a:ea typeface="KoPub돋움체 Light" panose="02020603020101020101" pitchFamily="18" charset="-127"/>
+              </a:rPr>
+              <a:t> 알림 </a:t>
+            </a:r>
+            <a:r>
+              <a:rPr lang="en-US" altLang="ko-KR" sz="700" b="1" dirty="0">
+                <a:latin typeface="KoPub돋움체 Light" panose="02020603020101020101" pitchFamily="18" charset="-127"/>
+                <a:ea typeface="KoPub돋움체 Light" panose="02020603020101020101" pitchFamily="18" charset="-127"/>
+              </a:rPr>
+              <a:t>(PA ↔ </a:t>
+            </a:r>
+            <a:r>
+              <a:rPr lang="ko-KR" altLang="en-US" sz="700" b="1" dirty="0">
+                <a:latin typeface="KoPub돋움체 Light" panose="02020603020101020101" pitchFamily="18" charset="-127"/>
+                <a:ea typeface="KoPub돋움체 Light" panose="02020603020101020101" pitchFamily="18" charset="-127"/>
+              </a:rPr>
+              <a:t>병동</a:t>
+            </a:r>
+            <a:r>
+              <a:rPr lang="en-US" altLang="ko-KR" sz="700" b="1" dirty="0">
+                <a:latin typeface="KoPub돋움체 Light" panose="02020603020101020101" pitchFamily="18" charset="-127"/>
+                <a:ea typeface="KoPub돋움체 Light" panose="02020603020101020101" pitchFamily="18" charset="-127"/>
+              </a:rPr>
+              <a:t>)</a:t>
+            </a:r>
+          </a:p>
+          <a:p>
+            <a:pPr marL="88900" indent="-88900">
+              <a:lnSpc>
+                <a:spcPts val="1100"/>
+              </a:lnSpc>
+              <a:buClr>
+                <a:srgbClr val="00B0F0"/>
+              </a:buClr>
+              <a:buFont typeface="Arial" panose="020B0604020202020204" pitchFamily="34" charset="0"/>
+              <a:buChar char="•"/>
+            </a:pPr>
+            <a:r>
+              <a:rPr lang="en-US" altLang="ko-KR" sz="700" b="1" dirty="0">
+                <a:latin typeface="KoPub돋움체 Light" panose="02020603020101020101" pitchFamily="18" charset="-127"/>
+                <a:ea typeface="KoPub돋움체 Light" panose="02020603020101020101" pitchFamily="18" charset="-127"/>
+              </a:rPr>
+              <a:t>[</a:t>
+            </a:r>
+            <a:r>
+              <a:rPr lang="ko-KR" altLang="en-US" sz="700" b="1" dirty="0">
+                <a:latin typeface="KoPub돋움체 Light" panose="02020603020101020101" pitchFamily="18" charset="-127"/>
+                <a:ea typeface="KoPub돋움체 Light" panose="02020603020101020101" pitchFamily="18" charset="-127"/>
+              </a:rPr>
+              <a:t>원칙</a:t>
+            </a:r>
+            <a:r>
+              <a:rPr lang="en-US" altLang="ko-KR" sz="700" b="1" dirty="0">
+                <a:latin typeface="KoPub돋움체 Light" panose="02020603020101020101" pitchFamily="18" charset="-127"/>
+                <a:ea typeface="KoPub돋움체 Light" panose="02020603020101020101" pitchFamily="18" charset="-127"/>
+              </a:rPr>
+              <a:t>] </a:t>
+            </a:r>
+            <a:r>
+              <a:rPr lang="ko-KR" altLang="en-US" sz="700" b="1" dirty="0">
+                <a:latin typeface="KoPub돋움체 Light" panose="02020603020101020101" pitchFamily="18" charset="-127"/>
+                <a:ea typeface="KoPub돋움체 Light" panose="02020603020101020101" pitchFamily="18" charset="-127"/>
+              </a:rPr>
+              <a:t>공식 채널</a:t>
+            </a:r>
+            <a:r>
+              <a:rPr lang="en-US" altLang="ko-KR" sz="700" b="1" dirty="0">
+                <a:latin typeface="KoPub돋움체 Light" panose="02020603020101020101" pitchFamily="18" charset="-127"/>
+                <a:ea typeface="KoPub돋움체 Light" panose="02020603020101020101" pitchFamily="18" charset="-127"/>
+              </a:rPr>
+              <a:t>(EMR/</a:t>
+            </a:r>
+            <a:r>
+              <a:rPr lang="ko-KR" altLang="en-US" sz="700" b="1" dirty="0">
+                <a:latin typeface="KoPub돋움체 Light" panose="02020603020101020101" pitchFamily="18" charset="-127"/>
+                <a:ea typeface="KoPub돋움체 Light" panose="02020603020101020101" pitchFamily="18" charset="-127"/>
+              </a:rPr>
+              <a:t>유선</a:t>
+            </a:r>
+            <a:r>
+              <a:rPr lang="en-US" altLang="ko-KR" sz="700" b="1" dirty="0">
+                <a:latin typeface="KoPub돋움체 Light" panose="02020603020101020101" pitchFamily="18" charset="-127"/>
+                <a:ea typeface="KoPub돋움체 Light" panose="02020603020101020101" pitchFamily="18" charset="-127"/>
+              </a:rPr>
+              <a:t>) </a:t>
+            </a:r>
+            <a:r>
+              <a:rPr lang="ko-KR" altLang="en-US" sz="700" b="1" dirty="0">
+                <a:latin typeface="KoPub돋움체 Light" panose="02020603020101020101" pitchFamily="18" charset="-127"/>
+                <a:ea typeface="KoPub돋움체 Light" panose="02020603020101020101" pitchFamily="18" charset="-127"/>
+              </a:rPr>
+              <a:t>활용 </a:t>
+            </a:r>
+            <a:r>
+              <a:rPr lang="en-US" altLang="ko-KR" sz="700" b="1" dirty="0">
+                <a:latin typeface="KoPub돋움체 Light" panose="02020603020101020101" pitchFamily="18" charset="-127"/>
+                <a:ea typeface="KoPub돋움체 Light" panose="02020603020101020101" pitchFamily="18" charset="-127"/>
+              </a:rPr>
+              <a:t>(</a:t>
+            </a:r>
+            <a:r>
+              <a:rPr lang="ko-KR" altLang="en-US" sz="700" b="1" dirty="0">
+                <a:latin typeface="KoPub돋움체 Light" panose="02020603020101020101" pitchFamily="18" charset="-127"/>
+                <a:ea typeface="KoPub돋움체 Light" panose="02020603020101020101" pitchFamily="18" charset="-127"/>
+              </a:rPr>
+              <a:t>수술</a:t>
+            </a:r>
+            <a:r>
+              <a:rPr lang="en-US" altLang="ko-KR" sz="700" b="1" dirty="0">
+                <a:latin typeface="KoPub돋움체 Light" panose="02020603020101020101" pitchFamily="18" charset="-127"/>
+                <a:ea typeface="KoPub돋움체 Light" panose="02020603020101020101" pitchFamily="18" charset="-127"/>
+              </a:rPr>
+              <a:t>, </a:t>
+            </a:r>
+            <a:r>
+              <a:rPr lang="ko-KR" altLang="en-US" sz="700" b="1" dirty="0">
+                <a:latin typeface="KoPub돋움체 Light" panose="02020603020101020101" pitchFamily="18" charset="-127"/>
+                <a:ea typeface="KoPub돋움체 Light" panose="02020603020101020101" pitchFamily="18" charset="-127"/>
+              </a:rPr>
+              <a:t>검사 결과 보고</a:t>
+            </a:r>
+            <a:r>
+              <a:rPr lang="en-US" altLang="ko-KR" sz="700" b="1" dirty="0">
+                <a:latin typeface="KoPub돋움체 Light" panose="02020603020101020101" pitchFamily="18" charset="-127"/>
+                <a:ea typeface="KoPub돋움체 Light" panose="02020603020101020101" pitchFamily="18" charset="-127"/>
+              </a:rPr>
+              <a:t>)</a:t>
+            </a:r>
+          </a:p>
+          <a:p>
+            <a:pPr marL="88900" indent="-88900">
+              <a:lnSpc>
+                <a:spcPts val="1100"/>
+              </a:lnSpc>
+              <a:buClr>
+                <a:srgbClr val="00B0F0"/>
+              </a:buClr>
+              <a:buFont typeface="Arial" panose="020B0604020202020204" pitchFamily="34" charset="0"/>
+              <a:buChar char="•"/>
+            </a:pPr>
+            <a:r>
+              <a:rPr lang="en-US" altLang="ko-KR" sz="700" b="1" dirty="0">
+                <a:latin typeface="KoPub돋움체 Light" panose="02020603020101020101" pitchFamily="18" charset="-127"/>
+                <a:ea typeface="KoPub돋움체 Light" panose="02020603020101020101" pitchFamily="18" charset="-127"/>
+              </a:rPr>
+              <a:t>[</a:t>
+            </a:r>
+            <a:r>
+              <a:rPr lang="ko-KR" altLang="en-US" sz="700" b="1" dirty="0">
+                <a:latin typeface="KoPub돋움체 Light" panose="02020603020101020101" pitchFamily="18" charset="-127"/>
+                <a:ea typeface="KoPub돋움체 Light" panose="02020603020101020101" pitchFamily="18" charset="-127"/>
+              </a:rPr>
+              <a:t>완결</a:t>
+            </a:r>
+            <a:r>
+              <a:rPr lang="en-US" altLang="ko-KR" sz="700" b="1" dirty="0">
+                <a:latin typeface="KoPub돋움체 Light" panose="02020603020101020101" pitchFamily="18" charset="-127"/>
+                <a:ea typeface="KoPub돋움체 Light" panose="02020603020101020101" pitchFamily="18" charset="-127"/>
+              </a:rPr>
+              <a:t>] [</a:t>
+            </a:r>
+            <a:r>
+              <a:rPr lang="ko-KR" altLang="en-US" sz="700" b="1" dirty="0">
+                <a:latin typeface="KoPub돋움체 Light" panose="02020603020101020101" pitchFamily="18" charset="-127"/>
+                <a:ea typeface="KoPub돋움체 Light" panose="02020603020101020101" pitchFamily="18" charset="-127"/>
+              </a:rPr>
+              <a:t>답장</a:t>
+            </a:r>
+            <a:r>
+              <a:rPr lang="en-US" altLang="ko-KR" sz="700" b="1" dirty="0">
+                <a:latin typeface="KoPub돋움체 Light" panose="02020603020101020101" pitchFamily="18" charset="-127"/>
+                <a:ea typeface="KoPub돋움체 Light" panose="02020603020101020101" pitchFamily="18" charset="-127"/>
+              </a:rPr>
+              <a:t>(Reply)]</a:t>
+            </a:r>
+            <a:r>
+              <a:rPr lang="ko-KR" altLang="en-US" sz="700" b="1" dirty="0">
+                <a:latin typeface="KoPub돋움체 Light" panose="02020603020101020101" pitchFamily="18" charset="-127"/>
+                <a:ea typeface="KoPub돋움체 Light" panose="02020603020101020101" pitchFamily="18" charset="-127"/>
+              </a:rPr>
+              <a:t>기능 필수 활용</a:t>
+            </a:r>
+          </a:p>
+          <a:p>
+            <a:pPr marL="88900" indent="-88900">
+              <a:lnSpc>
+                <a:spcPts val="1100"/>
+              </a:lnSpc>
+              <a:buClr>
+                <a:srgbClr val="00B0F0"/>
+              </a:buClr>
+              <a:buFont typeface="Arial" panose="020B0604020202020204" pitchFamily="34" charset="0"/>
+              <a:buChar char="•"/>
+            </a:pPr>
+            <a:r>
+              <a:rPr lang="en-US" altLang="ko-KR" sz="700" b="1" dirty="0">
+                <a:latin typeface="KoPub돋움체 Light" panose="02020603020101020101" pitchFamily="18" charset="-127"/>
+                <a:ea typeface="KoPub돋움체 Light" panose="02020603020101020101" pitchFamily="18" charset="-127"/>
+              </a:rPr>
+              <a:t>[</a:t>
+            </a:r>
+            <a:r>
+              <a:rPr lang="ko-KR" altLang="en-US" sz="700" b="1" dirty="0">
+                <a:latin typeface="KoPub돋움체 Light" panose="02020603020101020101" pitchFamily="18" charset="-127"/>
+                <a:ea typeface="KoPub돋움체 Light" panose="02020603020101020101" pitchFamily="18" charset="-127"/>
+              </a:rPr>
+              <a:t>대응</a:t>
+            </a:r>
+            <a:r>
+              <a:rPr lang="en-US" altLang="ko-KR" sz="700" b="1" dirty="0">
+                <a:latin typeface="KoPub돋움체 Light" panose="02020603020101020101" pitchFamily="18" charset="-127"/>
+                <a:ea typeface="KoPub돋움체 Light" panose="02020603020101020101" pitchFamily="18" charset="-127"/>
+              </a:rPr>
+              <a:t>] </a:t>
+            </a:r>
+            <a:r>
+              <a:rPr lang="ko-KR" altLang="en-US" sz="700" b="1" dirty="0">
+                <a:latin typeface="KoPub돋움체 Light" panose="02020603020101020101" pitchFamily="18" charset="-127"/>
+                <a:ea typeface="KoPub돋움체 Light" panose="02020603020101020101" pitchFamily="18" charset="-127"/>
+              </a:rPr>
+              <a:t>메신저 응답 </a:t>
+            </a:r>
+            <a:r>
+              <a:rPr lang="en-US" altLang="ko-KR" sz="700" b="1" dirty="0">
+                <a:latin typeface="KoPub돋움체 Light" panose="02020603020101020101" pitchFamily="18" charset="-127"/>
+                <a:ea typeface="KoPub돋움체 Light" panose="02020603020101020101" pitchFamily="18" charset="-127"/>
+              </a:rPr>
+              <a:t>'10</a:t>
+            </a:r>
+            <a:r>
+              <a:rPr lang="ko-KR" altLang="en-US" sz="700" b="1" dirty="0">
+                <a:latin typeface="KoPub돋움체 Light" panose="02020603020101020101" pitchFamily="18" charset="-127"/>
+                <a:ea typeface="KoPub돋움체 Light" panose="02020603020101020101" pitchFamily="18" charset="-127"/>
+              </a:rPr>
+              <a:t>분 룰</a:t>
+            </a:r>
+            <a:r>
+              <a:rPr lang="en-US" altLang="ko-KR" sz="700" b="1" dirty="0">
+                <a:latin typeface="KoPub돋움체 Light" panose="02020603020101020101" pitchFamily="18" charset="-127"/>
+                <a:ea typeface="KoPub돋움체 Light" panose="02020603020101020101" pitchFamily="18" charset="-127"/>
+              </a:rPr>
+              <a:t>(Rule)' </a:t>
+            </a:r>
+            <a:r>
+              <a:rPr lang="ko-KR" altLang="en-US" sz="700" b="1" dirty="0">
+                <a:latin typeface="KoPub돋움체 Light" panose="02020603020101020101" pitchFamily="18" charset="-127"/>
+                <a:ea typeface="KoPub돋움체 Light" panose="02020603020101020101" pitchFamily="18" charset="-127"/>
+              </a:rPr>
+              <a:t>적용</a:t>
+            </a:r>
+          </a:p>
+        </p:txBody>
+      </p:sp>
+    </p:spTree>
+    <p:extLst>
+      <p:ext uri="{BB962C8B-B14F-4D97-AF65-F5344CB8AC3E}">
+        <p14:creationId xmlns:p14="http://schemas.microsoft.com/office/powerpoint/2010/main" val="800420621"/>
+      </p:ext>
+    </p:extLst>
+  </p:cSld>
+  <p:clrMapOvr>
+    <a:masterClrMapping/>
+  </p:clrMapOvr>
+</p:sld>
+</file>
+
+<file path=ppt/slides/slide11.xml><?xml version="1.0" encoding="utf-8"?>
+<p:sld xmlns:a="http://schemas.openxmlformats.org/drawingml/2006/main" xmlns:r="http://schemas.openxmlformats.org/officeDocument/2006/relationships" xmlns:p="http://schemas.openxmlformats.org/presentationml/2006/main">
+  <p:cSld>
+    <p:spTree>
+      <p:nvGrpSpPr>
+        <p:cNvPr id="1" name="">
+          <a:extLst>
+            <a:ext uri="{FF2B5EF4-FFF2-40B4-BE49-F238E27FC236}">
+              <a16:creationId xmlns:a16="http://schemas.microsoft.com/office/drawing/2014/main" id="{8EC986D4-BAF5-DEE8-7F99-1274EA61B13A}"/>
+            </a:ext>
+          </a:extLst>
+        </p:cNvPr>
+        <p:cNvGrpSpPr/>
+        <p:nvPr/>
+      </p:nvGrpSpPr>
+      <p:grpSpPr>
+        <a:xfrm>
+          <a:off x="0" y="0"/>
+          <a:ext cx="0" cy="0"/>
+          <a:chOff x="0" y="0"/>
+          <a:chExt cx="0" cy="0"/>
+        </a:xfrm>
+      </p:grpSpPr>
+      <p:sp>
+        <p:nvSpPr>
+          <p:cNvPr id="5" name="TextBox 4">
+            <a:extLst>
+              <a:ext uri="{FF2B5EF4-FFF2-40B4-BE49-F238E27FC236}">
+                <a16:creationId xmlns:a16="http://schemas.microsoft.com/office/drawing/2014/main" id="{D380C6B7-6760-F865-BECF-4D4E1585194B}"/>
+              </a:ext>
+            </a:extLst>
+          </p:cNvPr>
+          <p:cNvSpPr txBox="1"/>
+          <p:nvPr/>
+        </p:nvSpPr>
+        <p:spPr>
+          <a:xfrm>
+            <a:off x="2276994" y="1475899"/>
+            <a:ext cx="734495" cy="200055"/>
+          </a:xfrm>
+          <a:prstGeom prst="rect">
+            <a:avLst/>
+          </a:prstGeom>
+          <a:noFill/>
+        </p:spPr>
+        <p:txBody>
+          <a:bodyPr wrap="none" rtlCol="0">
+            <a:spAutoFit/>
+          </a:bodyPr>
+          <a:lstStyle/>
+          <a:p>
+            <a:pPr algn="r"/>
+            <a:r>
+              <a:rPr lang="ko-KR" altLang="en-US" sz="700" b="1" dirty="0">
+                <a:solidFill>
+                  <a:schemeClr val="accent1">
+                    <a:lumMod val="50000"/>
+                  </a:schemeClr>
+                </a:solidFill>
+                <a:latin typeface="KoPub돋움체 Bold" panose="02020603020101020101" pitchFamily="18" charset="-127"/>
+                <a:ea typeface="KoPub돋움체 Bold" panose="02020603020101020101" pitchFamily="18" charset="-127"/>
+              </a:rPr>
+              <a:t>진료지원간호팀</a:t>
+            </a:r>
+            <a:endParaRPr lang="ko-KR" altLang="en-US" sz="800" b="1" dirty="0">
+              <a:solidFill>
+                <a:schemeClr val="accent1">
+                  <a:lumMod val="50000"/>
+                </a:schemeClr>
+              </a:solidFill>
+              <a:latin typeface="KoPub돋움체 Bold" panose="02020603020101020101" pitchFamily="18" charset="-127"/>
+              <a:ea typeface="KoPub돋움체 Bold" panose="02020603020101020101" pitchFamily="18" charset="-127"/>
+            </a:endParaRPr>
+          </a:p>
+        </p:txBody>
+      </p:sp>
+      <p:sp>
+        <p:nvSpPr>
+          <p:cNvPr id="7" name="TextBox 6">
+            <a:extLst>
+              <a:ext uri="{FF2B5EF4-FFF2-40B4-BE49-F238E27FC236}">
+                <a16:creationId xmlns:a16="http://schemas.microsoft.com/office/drawing/2014/main" id="{D28D80AE-03D3-F2B8-8A05-3F7A1BA6DCF9}"/>
+              </a:ext>
+            </a:extLst>
+          </p:cNvPr>
+          <p:cNvSpPr txBox="1"/>
+          <p:nvPr/>
+        </p:nvSpPr>
+        <p:spPr>
+          <a:xfrm>
+            <a:off x="694074" y="642967"/>
+            <a:ext cx="1845506" cy="338554"/>
+          </a:xfrm>
+          <a:prstGeom prst="rect">
+            <a:avLst/>
+          </a:prstGeom>
+          <a:noFill/>
+        </p:spPr>
+        <p:txBody>
+          <a:bodyPr wrap="none">
+            <a:spAutoFit/>
+          </a:bodyPr>
+          <a:lstStyle/>
+          <a:p>
+            <a:pPr algn="ctr"/>
+            <a:r>
+              <a:rPr lang="ko-KR" altLang="en-US" sz="1600" dirty="0" err="1">
+                <a:solidFill>
+                  <a:srgbClr val="00B0F0"/>
+                </a:solidFill>
+                <a:latin typeface="Noto Sans KR Black" panose="020B0200000000000000" pitchFamily="50" charset="-127"/>
+                <a:ea typeface="Noto Sans KR Black" panose="020B0200000000000000" pitchFamily="50" charset="-127"/>
+              </a:rPr>
+              <a:t>우리가치</a:t>
+            </a:r>
+            <a:r>
+              <a:rPr lang="ko-KR" altLang="en-US" sz="1600" dirty="0">
+                <a:solidFill>
+                  <a:schemeClr val="accent1">
+                    <a:lumMod val="50000"/>
+                  </a:schemeClr>
+                </a:solidFill>
+                <a:latin typeface="KoPub돋움체 Bold" panose="02020603020101020101" pitchFamily="18" charset="-127"/>
+                <a:ea typeface="KoPub돋움체 Bold" panose="02020603020101020101" pitchFamily="18" charset="-127"/>
+              </a:rPr>
+              <a:t> </a:t>
+            </a:r>
+            <a:r>
+              <a:rPr lang="en-US" altLang="ko-KR" sz="1600" dirty="0" err="1">
+                <a:solidFill>
+                  <a:schemeClr val="accent1">
+                    <a:lumMod val="50000"/>
+                  </a:schemeClr>
+                </a:solidFill>
+                <a:latin typeface="Franklin Gothic Heavy" panose="020B0903020102020204" pitchFamily="34" charset="0"/>
+                <a:ea typeface="KoPub돋움체 Bold" panose="02020603020101020101" pitchFamily="18" charset="-127"/>
+              </a:rPr>
+              <a:t>WeValue</a:t>
+            </a:r>
+            <a:endParaRPr lang="en-US" altLang="ko-KR" sz="1600" dirty="0">
+              <a:solidFill>
+                <a:schemeClr val="accent1">
+                  <a:lumMod val="50000"/>
+                </a:schemeClr>
+              </a:solidFill>
+              <a:latin typeface="Franklin Gothic Heavy" panose="020B0903020102020204" pitchFamily="34" charset="0"/>
+              <a:ea typeface="KoPub돋움체 Bold" panose="02020603020101020101" pitchFamily="18" charset="-127"/>
+            </a:endParaRPr>
+          </a:p>
+        </p:txBody>
+      </p:sp>
+      <p:sp>
+        <p:nvSpPr>
+          <p:cNvPr id="8" name="TextBox 7">
+            <a:extLst>
+              <a:ext uri="{FF2B5EF4-FFF2-40B4-BE49-F238E27FC236}">
+                <a16:creationId xmlns:a16="http://schemas.microsoft.com/office/drawing/2014/main" id="{52DDB2F9-FF05-08A5-57BD-1D2DD06502A8}"/>
+              </a:ext>
+            </a:extLst>
+          </p:cNvPr>
+          <p:cNvSpPr txBox="1"/>
+          <p:nvPr/>
+        </p:nvSpPr>
+        <p:spPr>
+          <a:xfrm>
+            <a:off x="638034" y="900112"/>
+            <a:ext cx="1957587" cy="215444"/>
+          </a:xfrm>
+          <a:prstGeom prst="rect">
+            <a:avLst/>
+          </a:prstGeom>
+          <a:noFill/>
+        </p:spPr>
+        <p:txBody>
+          <a:bodyPr wrap="none">
+            <a:spAutoFit/>
+          </a:bodyPr>
+          <a:lstStyle/>
+          <a:p>
+            <a:pPr algn="ctr"/>
+            <a:r>
+              <a:rPr lang="en-US" altLang="ko-KR" sz="800" b="1" dirty="0">
+                <a:latin typeface="KoPub돋움체 Bold" panose="00000800000000000000" pitchFamily="2" charset="-127"/>
+                <a:ea typeface="KoPub돋움체 Bold" panose="00000800000000000000" pitchFamily="2" charset="-127"/>
+              </a:rPr>
+              <a:t>[</a:t>
+            </a:r>
+            <a:r>
+              <a:rPr lang="ko-KR" altLang="en-US" sz="800" b="1" dirty="0">
+                <a:latin typeface="KoPub돋움체 Bold" panose="00000800000000000000" pitchFamily="2" charset="-127"/>
+                <a:ea typeface="KoPub돋움체 Bold" panose="00000800000000000000" pitchFamily="2" charset="-127"/>
+              </a:rPr>
+              <a:t>우리가 가치를 만드는 공간</a:t>
+            </a:r>
+            <a:r>
+              <a:rPr lang="en-US" altLang="ko-KR" sz="800" b="1" dirty="0">
+                <a:latin typeface="KoPub돋움체 Bold" panose="00000800000000000000" pitchFamily="2" charset="-127"/>
+                <a:ea typeface="KoPub돋움체 Bold" panose="00000800000000000000" pitchFamily="2" charset="-127"/>
+              </a:rPr>
+              <a:t>, </a:t>
+            </a:r>
+            <a:r>
+              <a:rPr lang="ko-KR" altLang="en-US" sz="800" b="1" dirty="0" err="1">
+                <a:latin typeface="KoPub돋움체 Bold" panose="00000800000000000000" pitchFamily="2" charset="-127"/>
+                <a:ea typeface="KoPub돋움체 Bold" panose="00000800000000000000" pitchFamily="2" charset="-127"/>
+              </a:rPr>
+              <a:t>우리가치</a:t>
+            </a:r>
+            <a:r>
+              <a:rPr lang="ko-KR" altLang="en-US" sz="800" b="1" dirty="0">
+                <a:latin typeface="KoPub돋움체 Bold" panose="00000800000000000000" pitchFamily="2" charset="-127"/>
+                <a:ea typeface="KoPub돋움체 Bold" panose="00000800000000000000" pitchFamily="2" charset="-127"/>
+              </a:rPr>
+              <a:t> 허브</a:t>
+            </a:r>
+            <a:r>
+              <a:rPr lang="en-US" altLang="ko-KR" sz="800" b="1" dirty="0">
+                <a:latin typeface="KoPub돋움체 Bold" panose="00000800000000000000" pitchFamily="2" charset="-127"/>
+                <a:ea typeface="KoPub돋움체 Bold" panose="00000800000000000000" pitchFamily="2" charset="-127"/>
+              </a:rPr>
+              <a:t>]</a:t>
+            </a:r>
+          </a:p>
+        </p:txBody>
+      </p:sp>
+      <p:pic>
+        <p:nvPicPr>
+          <p:cNvPr id="9" name="그림 8">
+            <a:extLst>
+              <a:ext uri="{FF2B5EF4-FFF2-40B4-BE49-F238E27FC236}">
+                <a16:creationId xmlns:a16="http://schemas.microsoft.com/office/drawing/2014/main" id="{FCD1B85C-B062-B8A7-819F-32DA94B53AA1}"/>
+              </a:ext>
+            </a:extLst>
+          </p:cNvPr>
+          <p:cNvPicPr>
+            <a:picLocks noChangeAspect="1"/>
+          </p:cNvPicPr>
+          <p:nvPr/>
+        </p:nvPicPr>
+        <p:blipFill>
+          <a:blip r:embed="rId2"/>
+          <a:stretch>
+            <a:fillRect/>
+          </a:stretch>
+        </p:blipFill>
+        <p:spPr>
+          <a:xfrm>
+            <a:off x="621981" y="642969"/>
+            <a:ext cx="175906" cy="153604"/>
+          </a:xfrm>
+          <a:prstGeom prst="rect">
+            <a:avLst/>
+          </a:prstGeom>
+        </p:spPr>
+      </p:pic>
+      <p:pic>
+        <p:nvPicPr>
+          <p:cNvPr id="11" name="그림 10">
+            <a:extLst>
+              <a:ext uri="{FF2B5EF4-FFF2-40B4-BE49-F238E27FC236}">
+                <a16:creationId xmlns:a16="http://schemas.microsoft.com/office/drawing/2014/main" id="{D353123D-53AF-85A4-0726-2067D1069614}"/>
+              </a:ext>
+            </a:extLst>
+          </p:cNvPr>
+          <p:cNvPicPr>
+            <a:picLocks noChangeAspect="1"/>
+          </p:cNvPicPr>
+          <p:nvPr/>
+        </p:nvPicPr>
+        <p:blipFill>
+          <a:blip r:embed="rId2"/>
+          <a:stretch>
+            <a:fillRect/>
+          </a:stretch>
+        </p:blipFill>
+        <p:spPr>
+          <a:xfrm rot="10800000">
+            <a:off x="2442205" y="642967"/>
+            <a:ext cx="175902" cy="153606"/>
+          </a:xfrm>
+          <a:prstGeom prst="rect">
+            <a:avLst/>
+          </a:prstGeom>
+        </p:spPr>
+      </p:pic>
+    </p:spTree>
+    <p:extLst>
+      <p:ext uri="{BB962C8B-B14F-4D97-AF65-F5344CB8AC3E}">
+        <p14:creationId xmlns:p14="http://schemas.microsoft.com/office/powerpoint/2010/main" val="2147805790"/>
+      </p:ext>
+    </p:extLst>
+  </p:cSld>
+  <p:clrMapOvr>
+    <a:masterClrMapping/>
+  </p:clrMapOvr>
+</p:sld>
+</file>
+
 <file path=ppt/slides/slide2.xml><?xml version="1.0" encoding="utf-8"?>
 <p:sld xmlns:a="http://schemas.openxmlformats.org/drawingml/2006/main" xmlns:r="http://schemas.openxmlformats.org/officeDocument/2006/relationships" xmlns:p="http://schemas.openxmlformats.org/presentationml/2006/main">
   <p:cSld>
@@ -10348,6 +11693,1118 @@
     <p:extLst>
       <p:ext uri="{BB962C8B-B14F-4D97-AF65-F5344CB8AC3E}">
         <p14:creationId xmlns:p14="http://schemas.microsoft.com/office/powerpoint/2010/main" val="1216328542"/>
+      </p:ext>
+    </p:extLst>
+  </p:cSld>
+  <p:clrMapOvr>
+    <a:masterClrMapping/>
+  </p:clrMapOvr>
+</p:sld>
+</file>
+
+<file path=ppt/slides/slide8.xml><?xml version="1.0" encoding="utf-8"?>
+<p:sld xmlns:a="http://schemas.openxmlformats.org/drawingml/2006/main" xmlns:r="http://schemas.openxmlformats.org/officeDocument/2006/relationships" xmlns:p="http://schemas.openxmlformats.org/presentationml/2006/main">
+  <p:cSld>
+    <p:spTree>
+      <p:nvGrpSpPr>
+        <p:cNvPr id="1" name="">
+          <a:extLst>
+            <a:ext uri="{FF2B5EF4-FFF2-40B4-BE49-F238E27FC236}">
+              <a16:creationId xmlns:a16="http://schemas.microsoft.com/office/drawing/2014/main" id="{EF66A5B3-163B-6F07-10F6-516CFF5236F4}"/>
+            </a:ext>
+          </a:extLst>
+        </p:cNvPr>
+        <p:cNvGrpSpPr/>
+        <p:nvPr/>
+      </p:nvGrpSpPr>
+      <p:grpSpPr>
+        <a:xfrm>
+          <a:off x="0" y="0"/>
+          <a:ext cx="0" cy="0"/>
+          <a:chOff x="0" y="0"/>
+          <a:chExt cx="0" cy="0"/>
+        </a:xfrm>
+      </p:grpSpPr>
+      <p:sp>
+        <p:nvSpPr>
+          <p:cNvPr id="3" name="TextBox 2">
+            <a:extLst>
+              <a:ext uri="{FF2B5EF4-FFF2-40B4-BE49-F238E27FC236}">
+                <a16:creationId xmlns:a16="http://schemas.microsoft.com/office/drawing/2014/main" id="{1A26FCE8-5EF0-0DF6-F8B5-C649DC205363}"/>
+              </a:ext>
+            </a:extLst>
+          </p:cNvPr>
+          <p:cNvSpPr txBox="1"/>
+          <p:nvPr/>
+        </p:nvSpPr>
+        <p:spPr>
+          <a:xfrm>
+            <a:off x="43499" y="63223"/>
+            <a:ext cx="1403509" cy="184666"/>
+          </a:xfrm>
+          <a:prstGeom prst="rect">
+            <a:avLst/>
+          </a:prstGeom>
+          <a:noFill/>
+        </p:spPr>
+        <p:txBody>
+          <a:bodyPr wrap="square">
+            <a:spAutoFit/>
+          </a:bodyPr>
+          <a:lstStyle/>
+          <a:p>
+            <a:r>
+              <a:rPr lang="ko-KR" altLang="en-US" sz="600" b="1" spc="-11" dirty="0">
+                <a:latin typeface="KoPub돋움체 Bold" panose="00000800000000000000" pitchFamily="2" charset="-127"/>
+                <a:ea typeface="KoPub돋움체 Bold" panose="00000800000000000000" pitchFamily="2" charset="-127"/>
+              </a:rPr>
+              <a:t>순천향대학교 천안병원</a:t>
+            </a:r>
+          </a:p>
+        </p:txBody>
+      </p:sp>
+      <p:grpSp>
+        <p:nvGrpSpPr>
+          <p:cNvPr id="17" name="그룹 16">
+            <a:extLst>
+              <a:ext uri="{FF2B5EF4-FFF2-40B4-BE49-F238E27FC236}">
+                <a16:creationId xmlns:a16="http://schemas.microsoft.com/office/drawing/2014/main" id="{1A49BD73-09B6-9576-4A99-AEFE0F7F42C3}"/>
+              </a:ext>
+            </a:extLst>
+          </p:cNvPr>
+          <p:cNvGrpSpPr/>
+          <p:nvPr/>
+        </p:nvGrpSpPr>
+        <p:grpSpPr>
+          <a:xfrm>
+            <a:off x="2102603" y="565642"/>
+            <a:ext cx="746131" cy="668940"/>
+            <a:chOff x="777945" y="-736888"/>
+            <a:chExt cx="663508" cy="663508"/>
+          </a:xfrm>
+        </p:grpSpPr>
+        <p:pic>
+          <p:nvPicPr>
+            <p:cNvPr id="5" name="그림 4" descr="패턴, 사각형, 예술, 직사각형이(가) 표시된 사진&#10;&#10;AI 생성 콘텐츠는 정확하지 않을 수 있습니다.">
+              <a:extLst>
+                <a:ext uri="{FF2B5EF4-FFF2-40B4-BE49-F238E27FC236}">
+                  <a16:creationId xmlns:a16="http://schemas.microsoft.com/office/drawing/2014/main" id="{237758EC-8039-A3EA-24AD-2B5B0B1F60A1}"/>
+                </a:ext>
+              </a:extLst>
+            </p:cNvPr>
+            <p:cNvPicPr>
+              <a:picLocks noChangeAspect="1"/>
+            </p:cNvPicPr>
+            <p:nvPr/>
+          </p:nvPicPr>
+          <p:blipFill>
+            <a:blip r:embed="rId2"/>
+            <a:stretch>
+              <a:fillRect/>
+            </a:stretch>
+          </p:blipFill>
+          <p:spPr>
+            <a:xfrm>
+              <a:off x="855432" y="-659401"/>
+              <a:ext cx="508534" cy="508534"/>
+            </a:xfrm>
+            <a:prstGeom prst="rect">
+              <a:avLst/>
+            </a:prstGeom>
+          </p:spPr>
+        </p:pic>
+        <p:sp>
+          <p:nvSpPr>
+            <p:cNvPr id="13" name="L 도형 12">
+              <a:extLst>
+                <a:ext uri="{FF2B5EF4-FFF2-40B4-BE49-F238E27FC236}">
+                  <a16:creationId xmlns:a16="http://schemas.microsoft.com/office/drawing/2014/main" id="{1386BAC4-C977-A7C2-6D4E-8D1313D44B3B}"/>
+                </a:ext>
+              </a:extLst>
+            </p:cNvPr>
+            <p:cNvSpPr/>
+            <p:nvPr/>
+          </p:nvSpPr>
+          <p:spPr>
+            <a:xfrm rot="5400000">
+              <a:off x="777945" y="-736887"/>
+              <a:ext cx="154974" cy="154974"/>
+            </a:xfrm>
+            <a:prstGeom prst="corner">
+              <a:avLst>
+                <a:gd name="adj1" fmla="val 24841"/>
+                <a:gd name="adj2" fmla="val 25627"/>
+              </a:avLst>
+            </a:prstGeom>
+            <a:solidFill>
+              <a:schemeClr val="accent1">
+                <a:lumMod val="75000"/>
+              </a:schemeClr>
+            </a:solidFill>
+            <a:ln>
+              <a:noFill/>
+            </a:ln>
+          </p:spPr>
+          <p:style>
+            <a:lnRef idx="2">
+              <a:schemeClr val="accent1">
+                <a:shade val="15000"/>
+              </a:schemeClr>
+            </a:lnRef>
+            <a:fillRef idx="1">
+              <a:schemeClr val="accent1"/>
+            </a:fillRef>
+            <a:effectRef idx="0">
+              <a:schemeClr val="accent1"/>
+            </a:effectRef>
+            <a:fontRef idx="minor">
+              <a:schemeClr val="lt1"/>
+            </a:fontRef>
+          </p:style>
+          <p:txBody>
+            <a:bodyPr rtlCol="0" anchor="ctr"/>
+            <a:lstStyle/>
+            <a:p>
+              <a:pPr algn="ctr"/>
+              <a:endParaRPr lang="ko-KR" altLang="en-US"/>
+            </a:p>
+          </p:txBody>
+        </p:sp>
+        <p:sp>
+          <p:nvSpPr>
+            <p:cNvPr id="14" name="L 도형 13">
+              <a:extLst>
+                <a:ext uri="{FF2B5EF4-FFF2-40B4-BE49-F238E27FC236}">
+                  <a16:creationId xmlns:a16="http://schemas.microsoft.com/office/drawing/2014/main" id="{925A8E91-1465-F155-CE7D-07F92B383DAE}"/>
+                </a:ext>
+              </a:extLst>
+            </p:cNvPr>
+            <p:cNvSpPr/>
+            <p:nvPr/>
+          </p:nvSpPr>
+          <p:spPr>
+            <a:xfrm rot="10800000">
+              <a:off x="1286479" y="-736888"/>
+              <a:ext cx="154974" cy="154974"/>
+            </a:xfrm>
+            <a:prstGeom prst="corner">
+              <a:avLst>
+                <a:gd name="adj1" fmla="val 24841"/>
+                <a:gd name="adj2" fmla="val 25627"/>
+              </a:avLst>
+            </a:prstGeom>
+            <a:solidFill>
+              <a:schemeClr val="accent1">
+                <a:lumMod val="75000"/>
+              </a:schemeClr>
+            </a:solidFill>
+            <a:ln>
+              <a:noFill/>
+            </a:ln>
+          </p:spPr>
+          <p:style>
+            <a:lnRef idx="2">
+              <a:schemeClr val="accent1">
+                <a:shade val="15000"/>
+              </a:schemeClr>
+            </a:lnRef>
+            <a:fillRef idx="1">
+              <a:schemeClr val="accent1"/>
+            </a:fillRef>
+            <a:effectRef idx="0">
+              <a:schemeClr val="accent1"/>
+            </a:effectRef>
+            <a:fontRef idx="minor">
+              <a:schemeClr val="lt1"/>
+            </a:fontRef>
+          </p:style>
+          <p:txBody>
+            <a:bodyPr rtlCol="0" anchor="ctr"/>
+            <a:lstStyle/>
+            <a:p>
+              <a:pPr algn="ctr"/>
+              <a:endParaRPr lang="ko-KR" altLang="en-US"/>
+            </a:p>
+          </p:txBody>
+        </p:sp>
+        <p:sp>
+          <p:nvSpPr>
+            <p:cNvPr id="15" name="L 도형 14">
+              <a:extLst>
+                <a:ext uri="{FF2B5EF4-FFF2-40B4-BE49-F238E27FC236}">
+                  <a16:creationId xmlns:a16="http://schemas.microsoft.com/office/drawing/2014/main" id="{C1BBBB1F-2080-F657-B9D3-EDC41813B5EF}"/>
+                </a:ext>
+              </a:extLst>
+            </p:cNvPr>
+            <p:cNvSpPr/>
+            <p:nvPr/>
+          </p:nvSpPr>
+          <p:spPr>
+            <a:xfrm>
+              <a:off x="777945" y="-228897"/>
+              <a:ext cx="154974" cy="154974"/>
+            </a:xfrm>
+            <a:prstGeom prst="corner">
+              <a:avLst>
+                <a:gd name="adj1" fmla="val 24841"/>
+                <a:gd name="adj2" fmla="val 25627"/>
+              </a:avLst>
+            </a:prstGeom>
+            <a:solidFill>
+              <a:schemeClr val="accent1">
+                <a:lumMod val="75000"/>
+              </a:schemeClr>
+            </a:solidFill>
+            <a:ln>
+              <a:noFill/>
+            </a:ln>
+          </p:spPr>
+          <p:style>
+            <a:lnRef idx="2">
+              <a:schemeClr val="accent1">
+                <a:shade val="15000"/>
+              </a:schemeClr>
+            </a:lnRef>
+            <a:fillRef idx="1">
+              <a:schemeClr val="accent1"/>
+            </a:fillRef>
+            <a:effectRef idx="0">
+              <a:schemeClr val="accent1"/>
+            </a:effectRef>
+            <a:fontRef idx="minor">
+              <a:schemeClr val="lt1"/>
+            </a:fontRef>
+          </p:style>
+          <p:txBody>
+            <a:bodyPr rtlCol="0" anchor="ctr"/>
+            <a:lstStyle/>
+            <a:p>
+              <a:pPr algn="ctr"/>
+              <a:endParaRPr lang="ko-KR" altLang="en-US"/>
+            </a:p>
+          </p:txBody>
+        </p:sp>
+        <p:sp>
+          <p:nvSpPr>
+            <p:cNvPr id="16" name="L 도형 15">
+              <a:extLst>
+                <a:ext uri="{FF2B5EF4-FFF2-40B4-BE49-F238E27FC236}">
+                  <a16:creationId xmlns:a16="http://schemas.microsoft.com/office/drawing/2014/main" id="{C255AB45-9E19-5135-2840-6E83A0CEA2B5}"/>
+                </a:ext>
+              </a:extLst>
+            </p:cNvPr>
+            <p:cNvSpPr/>
+            <p:nvPr/>
+          </p:nvSpPr>
+          <p:spPr>
+            <a:xfrm rot="16200000">
+              <a:off x="1286479" y="-228354"/>
+              <a:ext cx="154974" cy="154974"/>
+            </a:xfrm>
+            <a:prstGeom prst="corner">
+              <a:avLst>
+                <a:gd name="adj1" fmla="val 24841"/>
+                <a:gd name="adj2" fmla="val 25627"/>
+              </a:avLst>
+            </a:prstGeom>
+            <a:solidFill>
+              <a:schemeClr val="accent1">
+                <a:lumMod val="75000"/>
+              </a:schemeClr>
+            </a:solidFill>
+            <a:ln>
+              <a:noFill/>
+            </a:ln>
+          </p:spPr>
+          <p:style>
+            <a:lnRef idx="2">
+              <a:schemeClr val="accent1">
+                <a:shade val="15000"/>
+              </a:schemeClr>
+            </a:lnRef>
+            <a:fillRef idx="1">
+              <a:schemeClr val="accent1"/>
+            </a:fillRef>
+            <a:effectRef idx="0">
+              <a:schemeClr val="accent1"/>
+            </a:effectRef>
+            <a:fontRef idx="minor">
+              <a:schemeClr val="lt1"/>
+            </a:fontRef>
+          </p:style>
+          <p:txBody>
+            <a:bodyPr rtlCol="0" anchor="ctr"/>
+            <a:lstStyle/>
+            <a:p>
+              <a:pPr algn="ctr"/>
+              <a:endParaRPr lang="ko-KR" altLang="en-US"/>
+            </a:p>
+          </p:txBody>
+        </p:sp>
+      </p:grpSp>
+      <p:grpSp>
+        <p:nvGrpSpPr>
+          <p:cNvPr id="18" name="그룹 17">
+            <a:extLst>
+              <a:ext uri="{FF2B5EF4-FFF2-40B4-BE49-F238E27FC236}">
+                <a16:creationId xmlns:a16="http://schemas.microsoft.com/office/drawing/2014/main" id="{8C3E1EF8-8C3B-A192-11B5-BED425D3D79C}"/>
+              </a:ext>
+            </a:extLst>
+          </p:cNvPr>
+          <p:cNvGrpSpPr/>
+          <p:nvPr/>
+        </p:nvGrpSpPr>
+        <p:grpSpPr>
+          <a:xfrm>
+            <a:off x="131327" y="274768"/>
+            <a:ext cx="1755833" cy="425416"/>
+            <a:chOff x="614240" y="226472"/>
+            <a:chExt cx="1755833" cy="425416"/>
+          </a:xfrm>
+        </p:grpSpPr>
+        <p:sp>
+          <p:nvSpPr>
+            <p:cNvPr id="4" name="TextBox 3">
+              <a:extLst>
+                <a:ext uri="{FF2B5EF4-FFF2-40B4-BE49-F238E27FC236}">
+                  <a16:creationId xmlns:a16="http://schemas.microsoft.com/office/drawing/2014/main" id="{A9D039A7-DA18-313A-AF87-12621352F5CE}"/>
+                </a:ext>
+              </a:extLst>
+            </p:cNvPr>
+            <p:cNvSpPr txBox="1"/>
+            <p:nvPr/>
+          </p:nvSpPr>
+          <p:spPr>
+            <a:xfrm>
+              <a:off x="646605" y="226472"/>
+              <a:ext cx="1681935" cy="307777"/>
+            </a:xfrm>
+            <a:prstGeom prst="rect">
+              <a:avLst/>
+            </a:prstGeom>
+            <a:noFill/>
+          </p:spPr>
+          <p:txBody>
+            <a:bodyPr wrap="none">
+              <a:spAutoFit/>
+            </a:bodyPr>
+            <a:lstStyle/>
+            <a:p>
+              <a:pPr algn="ctr"/>
+              <a:r>
+                <a:rPr lang="ko-KR" altLang="en-US" sz="1400" b="1" dirty="0" err="1">
+                  <a:solidFill>
+                    <a:srgbClr val="00B0F0"/>
+                  </a:solidFill>
+                  <a:latin typeface="Noto Sans KR Black" panose="020B0200000000000000" pitchFamily="50" charset="-127"/>
+                  <a:ea typeface="Noto Sans KR Black" panose="020B0200000000000000" pitchFamily="50" charset="-127"/>
+                </a:rPr>
+                <a:t>우리가치</a:t>
+              </a:r>
+              <a:r>
+                <a:rPr lang="ko-KR" altLang="en-US" sz="1400" dirty="0">
+                  <a:solidFill>
+                    <a:schemeClr val="accent1">
+                      <a:lumMod val="50000"/>
+                    </a:schemeClr>
+                  </a:solidFill>
+                  <a:latin typeface="KoPub돋움체 Bold" panose="02020603020101020101" pitchFamily="18" charset="-127"/>
+                  <a:ea typeface="KoPub돋움체 Bold" panose="02020603020101020101" pitchFamily="18" charset="-127"/>
+                </a:rPr>
+                <a:t> </a:t>
+              </a:r>
+              <a:r>
+                <a:rPr lang="en-US" altLang="ko-KR" sz="1400" dirty="0" err="1">
+                  <a:solidFill>
+                    <a:schemeClr val="bg2">
+                      <a:lumMod val="10000"/>
+                    </a:schemeClr>
+                  </a:solidFill>
+                  <a:latin typeface="Franklin Gothic Heavy" panose="020B0903020102020204" pitchFamily="34" charset="0"/>
+                  <a:ea typeface="KoPub돋움체 Bold" panose="02020603020101020101" pitchFamily="18" charset="-127"/>
+                </a:rPr>
+                <a:t>WeValue</a:t>
+              </a:r>
+              <a:endParaRPr lang="en-US" altLang="ko-KR" sz="1400" dirty="0">
+                <a:solidFill>
+                  <a:schemeClr val="bg2">
+                    <a:lumMod val="10000"/>
+                  </a:schemeClr>
+                </a:solidFill>
+                <a:latin typeface="Franklin Gothic Heavy" panose="020B0903020102020204" pitchFamily="34" charset="0"/>
+                <a:ea typeface="KoPub돋움체 Bold" panose="02020603020101020101" pitchFamily="18" charset="-127"/>
+              </a:endParaRPr>
+            </a:p>
+          </p:txBody>
+        </p:sp>
+        <p:sp>
+          <p:nvSpPr>
+            <p:cNvPr id="6" name="TextBox 5">
+              <a:extLst>
+                <a:ext uri="{FF2B5EF4-FFF2-40B4-BE49-F238E27FC236}">
+                  <a16:creationId xmlns:a16="http://schemas.microsoft.com/office/drawing/2014/main" id="{DEEE7C7E-6934-B627-6EC0-48367D0769B1}"/>
+                </a:ext>
+              </a:extLst>
+            </p:cNvPr>
+            <p:cNvSpPr txBox="1"/>
+            <p:nvPr/>
+          </p:nvSpPr>
+          <p:spPr>
+            <a:xfrm>
+              <a:off x="707551" y="451833"/>
+              <a:ext cx="1560042" cy="200055"/>
+            </a:xfrm>
+            <a:prstGeom prst="rect">
+              <a:avLst/>
+            </a:prstGeom>
+            <a:noFill/>
+          </p:spPr>
+          <p:txBody>
+            <a:bodyPr wrap="none">
+              <a:spAutoFit/>
+            </a:bodyPr>
+            <a:lstStyle/>
+            <a:p>
+              <a:pPr algn="ctr"/>
+              <a:r>
+                <a:rPr lang="en-US" altLang="ko-KR" sz="700" b="1" dirty="0">
+                  <a:latin typeface="KoPub돋움체 Bold" panose="00000800000000000000" pitchFamily="2" charset="-127"/>
+                  <a:ea typeface="KoPub돋움체 Bold" panose="00000800000000000000" pitchFamily="2" charset="-127"/>
+                </a:rPr>
+                <a:t>[</a:t>
+              </a:r>
+              <a:r>
+                <a:rPr lang="ko-KR" altLang="en-US" sz="700" b="1" dirty="0">
+                  <a:latin typeface="KoPub돋움체 Bold" panose="00000800000000000000" pitchFamily="2" charset="-127"/>
+                  <a:ea typeface="KoPub돋움체 Bold" panose="00000800000000000000" pitchFamily="2" charset="-127"/>
+                </a:rPr>
+                <a:t>안전 </a:t>
+              </a:r>
+              <a:r>
+                <a:rPr lang="en-US" altLang="ko-KR" sz="700" b="1" dirty="0">
+                  <a:latin typeface="KoPub돋움체 Bold" panose="00000800000000000000" pitchFamily="2" charset="-127"/>
+                  <a:ea typeface="KoPub돋움체 Bold" panose="00000800000000000000" pitchFamily="2" charset="-127"/>
+                </a:rPr>
+                <a:t>&amp; </a:t>
+              </a:r>
+              <a:r>
+                <a:rPr lang="ko-KR" altLang="en-US" sz="700" b="1" dirty="0">
+                  <a:latin typeface="KoPub돋움체 Bold" panose="00000800000000000000" pitchFamily="2" charset="-127"/>
+                  <a:ea typeface="KoPub돋움체 Bold" panose="00000800000000000000" pitchFamily="2" charset="-127"/>
+                </a:rPr>
+                <a:t>보안 수칙 </a:t>
+              </a:r>
+              <a:r>
+                <a:rPr lang="en-US" altLang="ko-KR" sz="700" b="1" dirty="0">
+                  <a:latin typeface="KoPub돋움체 Bold" panose="00000800000000000000" pitchFamily="2" charset="-127"/>
+                  <a:ea typeface="KoPub돋움체 Bold" panose="00000800000000000000" pitchFamily="2" charset="-127"/>
+                </a:rPr>
+                <a:t>(</a:t>
+              </a:r>
+              <a:r>
+                <a:rPr lang="ko-KR" altLang="en-US" sz="700" b="1" dirty="0">
+                  <a:latin typeface="KoPub돋움체 Bold" panose="00000800000000000000" pitchFamily="2" charset="-127"/>
+                  <a:ea typeface="KoPub돋움체 Bold" panose="00000800000000000000" pitchFamily="2" charset="-127"/>
+                </a:rPr>
+                <a:t>단계별 대응 지침</a:t>
+              </a:r>
+              <a:r>
+                <a:rPr lang="en-US" altLang="ko-KR" sz="700" b="1" dirty="0">
+                  <a:latin typeface="KoPub돋움체 Bold" panose="00000800000000000000" pitchFamily="2" charset="-127"/>
+                  <a:ea typeface="KoPub돋움체 Bold" panose="00000800000000000000" pitchFamily="2" charset="-127"/>
+                </a:rPr>
+                <a:t>)]</a:t>
+              </a:r>
+            </a:p>
+          </p:txBody>
+        </p:sp>
+        <p:pic>
+          <p:nvPicPr>
+            <p:cNvPr id="10" name="그림 9">
+              <a:extLst>
+                <a:ext uri="{FF2B5EF4-FFF2-40B4-BE49-F238E27FC236}">
+                  <a16:creationId xmlns:a16="http://schemas.microsoft.com/office/drawing/2014/main" id="{22CDF7ED-65DD-B2AB-0D3A-2876557659C7}"/>
+                </a:ext>
+              </a:extLst>
+            </p:cNvPr>
+            <p:cNvPicPr>
+              <a:picLocks noChangeAspect="1"/>
+            </p:cNvPicPr>
+            <p:nvPr/>
+          </p:nvPicPr>
+          <p:blipFill>
+            <a:blip r:embed="rId3"/>
+            <a:stretch>
+              <a:fillRect/>
+            </a:stretch>
+          </p:blipFill>
+          <p:spPr>
+            <a:xfrm>
+              <a:off x="614240" y="271322"/>
+              <a:ext cx="147416" cy="128728"/>
+            </a:xfrm>
+            <a:prstGeom prst="rect">
+              <a:avLst/>
+            </a:prstGeom>
+          </p:spPr>
+        </p:pic>
+        <p:pic>
+          <p:nvPicPr>
+            <p:cNvPr id="30" name="그림 29">
+              <a:extLst>
+                <a:ext uri="{FF2B5EF4-FFF2-40B4-BE49-F238E27FC236}">
+                  <a16:creationId xmlns:a16="http://schemas.microsoft.com/office/drawing/2014/main" id="{CACE4F19-6C03-B4A0-12DF-B80E74EF21DC}"/>
+                </a:ext>
+              </a:extLst>
+            </p:cNvPr>
+            <p:cNvPicPr>
+              <a:picLocks noChangeAspect="1"/>
+            </p:cNvPicPr>
+            <p:nvPr/>
+          </p:nvPicPr>
+          <p:blipFill>
+            <a:blip r:embed="rId3"/>
+            <a:stretch>
+              <a:fillRect/>
+            </a:stretch>
+          </p:blipFill>
+          <p:spPr>
+            <a:xfrm rot="10800000">
+              <a:off x="2222659" y="276730"/>
+              <a:ext cx="147414" cy="128728"/>
+            </a:xfrm>
+            <a:prstGeom prst="rect">
+              <a:avLst/>
+            </a:prstGeom>
+          </p:spPr>
+        </p:pic>
+      </p:grpSp>
+      <p:sp>
+        <p:nvSpPr>
+          <p:cNvPr id="31" name="TextBox 30">
+            <a:extLst>
+              <a:ext uri="{FF2B5EF4-FFF2-40B4-BE49-F238E27FC236}">
+                <a16:creationId xmlns:a16="http://schemas.microsoft.com/office/drawing/2014/main" id="{8286C7F5-77BB-B584-5E2E-82705B55B19B}"/>
+              </a:ext>
+            </a:extLst>
+          </p:cNvPr>
+          <p:cNvSpPr txBox="1"/>
+          <p:nvPr/>
+        </p:nvSpPr>
+        <p:spPr>
+          <a:xfrm>
+            <a:off x="101100" y="781990"/>
+            <a:ext cx="1447832" cy="790345"/>
+          </a:xfrm>
+          <a:prstGeom prst="rect">
+            <a:avLst/>
+          </a:prstGeom>
+          <a:noFill/>
+        </p:spPr>
+        <p:txBody>
+          <a:bodyPr wrap="none" rtlCol="0">
+            <a:spAutoFit/>
+          </a:bodyPr>
+          <a:lstStyle/>
+          <a:p>
+            <a:pPr marL="88900" indent="-88900">
+              <a:lnSpc>
+                <a:spcPts val="1100"/>
+              </a:lnSpc>
+              <a:buClr>
+                <a:srgbClr val="00B0F0"/>
+              </a:buClr>
+              <a:buFont typeface="Arial" panose="020B0604020202020204" pitchFamily="34" charset="0"/>
+              <a:buChar char="•"/>
+            </a:pPr>
+            <a:r>
+              <a:rPr lang="ko-KR" altLang="en-US" sz="800" b="1" dirty="0">
+                <a:latin typeface="KoPub돋움체 Bold" panose="00000800000000000000" pitchFamily="2" charset="-127"/>
+                <a:ea typeface="KoPub돋움체 Bold" panose="00000800000000000000" pitchFamily="2" charset="-127"/>
+              </a:rPr>
+              <a:t>단계별 대응 </a:t>
+            </a:r>
+            <a:r>
+              <a:rPr lang="en-US" altLang="ko-KR" sz="800" b="1" dirty="0">
+                <a:latin typeface="KoPub돋움체 Bold" panose="00000800000000000000" pitchFamily="2" charset="-127"/>
+                <a:ea typeface="KoPub돋움체 Bold" panose="00000800000000000000" pitchFamily="2" charset="-127"/>
+              </a:rPr>
+              <a:t>(10</a:t>
+            </a:r>
+            <a:r>
+              <a:rPr lang="ko-KR" altLang="en-US" sz="800" b="1" dirty="0">
+                <a:latin typeface="KoPub돋움체 Bold" panose="00000800000000000000" pitchFamily="2" charset="-127"/>
+                <a:ea typeface="KoPub돋움체 Bold" panose="00000800000000000000" pitchFamily="2" charset="-127"/>
+              </a:rPr>
+              <a:t>분 룰</a:t>
+            </a:r>
+            <a:r>
+              <a:rPr lang="en-US" altLang="ko-KR" sz="800" b="1" dirty="0">
+                <a:latin typeface="KoPub돋움체 Bold" panose="00000800000000000000" pitchFamily="2" charset="-127"/>
+                <a:ea typeface="KoPub돋움체 Bold" panose="00000800000000000000" pitchFamily="2" charset="-127"/>
+              </a:rPr>
+              <a:t>)</a:t>
+            </a:r>
+          </a:p>
+          <a:p>
+            <a:pPr marL="88900" indent="-88900">
+              <a:lnSpc>
+                <a:spcPts val="1100"/>
+              </a:lnSpc>
+              <a:buClr>
+                <a:srgbClr val="00B0F0"/>
+              </a:buClr>
+              <a:buFont typeface="Arial" panose="020B0604020202020204" pitchFamily="34" charset="0"/>
+              <a:buChar char="•"/>
+            </a:pPr>
+            <a:r>
+              <a:rPr lang="ko-KR" altLang="en-US" sz="800" b="1" dirty="0">
+                <a:latin typeface="KoPub돋움체 Bold" panose="00000800000000000000" pitchFamily="2" charset="-127"/>
+                <a:ea typeface="KoPub돋움체 Bold" panose="00000800000000000000" pitchFamily="2" charset="-127"/>
+              </a:rPr>
+              <a:t>응급 상황 최우선 원칙</a:t>
+            </a:r>
+          </a:p>
+          <a:p>
+            <a:pPr marL="88900" indent="-88900">
+              <a:lnSpc>
+                <a:spcPts val="1100"/>
+              </a:lnSpc>
+              <a:buClr>
+                <a:srgbClr val="00B0F0"/>
+              </a:buClr>
+              <a:buFont typeface="Arial" panose="020B0604020202020204" pitchFamily="34" charset="0"/>
+              <a:buChar char="•"/>
+            </a:pPr>
+            <a:r>
+              <a:rPr lang="ko-KR" altLang="en-US" sz="800" b="1" dirty="0">
+                <a:latin typeface="KoPub돋움체 Bold" panose="00000800000000000000" pitchFamily="2" charset="-127"/>
+                <a:ea typeface="KoPub돋움체 Bold" panose="00000800000000000000" pitchFamily="2" charset="-127"/>
+              </a:rPr>
+              <a:t>정보 보안 엄수</a:t>
+            </a:r>
+          </a:p>
+          <a:p>
+            <a:pPr marL="88900" indent="-88900">
+              <a:lnSpc>
+                <a:spcPts val="1100"/>
+              </a:lnSpc>
+              <a:buClr>
+                <a:srgbClr val="00B0F0"/>
+              </a:buClr>
+              <a:buFont typeface="Arial" panose="020B0604020202020204" pitchFamily="34" charset="0"/>
+              <a:buChar char="•"/>
+            </a:pPr>
+            <a:r>
+              <a:rPr lang="ko-KR" altLang="en-US" sz="800" b="1" dirty="0" err="1">
+                <a:latin typeface="KoPub돋움체 Bold" panose="00000800000000000000" pitchFamily="2" charset="-127"/>
+                <a:ea typeface="KoPub돋움체 Bold" panose="00000800000000000000" pitchFamily="2" charset="-127"/>
+              </a:rPr>
+              <a:t>오발송</a:t>
+            </a:r>
+            <a:r>
+              <a:rPr lang="ko-KR" altLang="en-US" sz="800" b="1" dirty="0">
+                <a:latin typeface="KoPub돋움체 Bold" panose="00000800000000000000" pitchFamily="2" charset="-127"/>
+                <a:ea typeface="KoPub돋움체 Bold" panose="00000800000000000000" pitchFamily="2" charset="-127"/>
+              </a:rPr>
+              <a:t> 즉시 정정</a:t>
+            </a:r>
+          </a:p>
+          <a:p>
+            <a:pPr marL="88900" indent="-88900">
+              <a:lnSpc>
+                <a:spcPts val="1100"/>
+              </a:lnSpc>
+              <a:buClr>
+                <a:srgbClr val="00B0F0"/>
+              </a:buClr>
+              <a:buFont typeface="Arial" panose="020B0604020202020204" pitchFamily="34" charset="0"/>
+              <a:buChar char="•"/>
+            </a:pPr>
+            <a:r>
+              <a:rPr lang="en-US" altLang="ko-KR" sz="800" b="1" dirty="0">
+                <a:latin typeface="KoPub돋움체 Bold" panose="00000800000000000000" pitchFamily="2" charset="-127"/>
+                <a:ea typeface="KoPub돋움체 Bold" panose="00000800000000000000" pitchFamily="2" charset="-127"/>
+              </a:rPr>
+              <a:t>[</a:t>
+            </a:r>
+            <a:r>
+              <a:rPr lang="ko-KR" altLang="en-US" sz="800" b="1" dirty="0">
+                <a:latin typeface="KoPub돋움체 Bold" panose="00000800000000000000" pitchFamily="2" charset="-127"/>
+                <a:ea typeface="KoPub돋움체 Bold" panose="00000800000000000000" pitchFamily="2" charset="-127"/>
+              </a:rPr>
+              <a:t>인사 변동</a:t>
+            </a:r>
+            <a:r>
+              <a:rPr lang="en-US" altLang="ko-KR" sz="800" b="1" dirty="0">
+                <a:latin typeface="KoPub돋움체 Bold" panose="00000800000000000000" pitchFamily="2" charset="-127"/>
+                <a:ea typeface="KoPub돋움체 Bold" panose="00000800000000000000" pitchFamily="2" charset="-127"/>
+              </a:rPr>
+              <a:t>] </a:t>
+            </a:r>
+            <a:r>
+              <a:rPr lang="ko-KR" altLang="en-US" sz="800" b="1" dirty="0">
+                <a:latin typeface="KoPub돋움체 Bold" panose="00000800000000000000" pitchFamily="2" charset="-127"/>
+                <a:ea typeface="KoPub돋움체 Bold" panose="00000800000000000000" pitchFamily="2" charset="-127"/>
+              </a:rPr>
+              <a:t>자발적 퇴장 의무</a:t>
+            </a:r>
+          </a:p>
+        </p:txBody>
+      </p:sp>
+    </p:spTree>
+    <p:extLst>
+      <p:ext uri="{BB962C8B-B14F-4D97-AF65-F5344CB8AC3E}">
+        <p14:creationId xmlns:p14="http://schemas.microsoft.com/office/powerpoint/2010/main" val="4063746640"/>
+      </p:ext>
+    </p:extLst>
+  </p:cSld>
+  <p:clrMapOvr>
+    <a:masterClrMapping/>
+  </p:clrMapOvr>
+</p:sld>
+</file>
+
+<file path=ppt/slides/slide9.xml><?xml version="1.0" encoding="utf-8"?>
+<p:sld xmlns:a="http://schemas.openxmlformats.org/drawingml/2006/main" xmlns:r="http://schemas.openxmlformats.org/officeDocument/2006/relationships" xmlns:p="http://schemas.openxmlformats.org/presentationml/2006/main">
+  <p:cSld>
+    <p:spTree>
+      <p:nvGrpSpPr>
+        <p:cNvPr id="1" name="">
+          <a:extLst>
+            <a:ext uri="{FF2B5EF4-FFF2-40B4-BE49-F238E27FC236}">
+              <a16:creationId xmlns:a16="http://schemas.microsoft.com/office/drawing/2014/main" id="{DFA44891-DB0B-9038-5B25-629A4C227FFF}"/>
+            </a:ext>
+          </a:extLst>
+        </p:cNvPr>
+        <p:cNvGrpSpPr/>
+        <p:nvPr/>
+      </p:nvGrpSpPr>
+      <p:grpSpPr>
+        <a:xfrm>
+          <a:off x="0" y="0"/>
+          <a:ext cx="0" cy="0"/>
+          <a:chOff x="0" y="0"/>
+          <a:chExt cx="0" cy="0"/>
+        </a:xfrm>
+      </p:grpSpPr>
+      <p:pic>
+        <p:nvPicPr>
+          <p:cNvPr id="16" name="Picture 1">
+            <a:extLst>
+              <a:ext uri="{FF2B5EF4-FFF2-40B4-BE49-F238E27FC236}">
+                <a16:creationId xmlns:a16="http://schemas.microsoft.com/office/drawing/2014/main" id="{36B817F5-ED6E-4FD5-B4E2-93144A63F938}"/>
+              </a:ext>
+            </a:extLst>
+          </p:cNvPr>
+          <p:cNvPicPr>
+            <a:picLocks noChangeAspect="1"/>
+          </p:cNvPicPr>
+          <p:nvPr/>
+        </p:nvPicPr>
+        <p:blipFill>
+          <a:blip r:embed="rId2"/>
+          <a:stretch>
+            <a:fillRect/>
+          </a:stretch>
+        </p:blipFill>
+        <p:spPr>
+          <a:xfrm>
+            <a:off x="863903" y="1020048"/>
+            <a:ext cx="359069" cy="203042"/>
+          </a:xfrm>
+          <a:prstGeom prst="rect">
+            <a:avLst/>
+          </a:prstGeom>
+          <a:noFill/>
+          <a:ln>
+            <a:noFill/>
+          </a:ln>
+          <a:effectLst/>
+        </p:spPr>
+      </p:pic>
+      <p:sp>
+        <p:nvSpPr>
+          <p:cNvPr id="23" name="TextBox 22">
+            <a:extLst>
+              <a:ext uri="{FF2B5EF4-FFF2-40B4-BE49-F238E27FC236}">
+                <a16:creationId xmlns:a16="http://schemas.microsoft.com/office/drawing/2014/main" id="{8868109F-B2B0-4CE1-9870-DFF19F8890A7}"/>
+              </a:ext>
+            </a:extLst>
+          </p:cNvPr>
+          <p:cNvSpPr txBox="1"/>
+          <p:nvPr/>
+        </p:nvSpPr>
+        <p:spPr>
+          <a:xfrm>
+            <a:off x="1171577" y="1036932"/>
+            <a:ext cx="1247775" cy="169277"/>
+          </a:xfrm>
+          <a:prstGeom prst="rect">
+            <a:avLst/>
+          </a:prstGeom>
+          <a:noFill/>
+        </p:spPr>
+        <p:txBody>
+          <a:bodyPr wrap="square" rtlCol="0">
+            <a:spAutoFit/>
+          </a:bodyPr>
+          <a:lstStyle/>
+          <a:p>
+            <a:pPr algn="ctr"/>
+            <a:r>
+              <a:rPr lang="ko-KR" altLang="en-US" sz="500" b="1" dirty="0">
+                <a:solidFill>
+                  <a:srgbClr val="4472C4"/>
+                </a:solidFill>
+                <a:latin typeface="KoPub돋움체 Bold" panose="02020603020101020101" pitchFamily="18" charset="-127"/>
+                <a:ea typeface="KoPub돋움체 Bold" panose="02020603020101020101" pitchFamily="18" charset="-127"/>
+              </a:rPr>
+              <a:t>순천향대학교 천안병원 </a:t>
+            </a:r>
+            <a:r>
+              <a:rPr lang="en-US" altLang="ko-KR" sz="500" b="1" dirty="0">
+                <a:solidFill>
+                  <a:srgbClr val="4472C4"/>
+                </a:solidFill>
+                <a:latin typeface="KoPub돋움체 Bold" panose="02020603020101020101" pitchFamily="18" charset="-127"/>
+                <a:ea typeface="KoPub돋움체 Bold" panose="02020603020101020101" pitchFamily="18" charset="-127"/>
+              </a:rPr>
+              <a:t>| </a:t>
+            </a:r>
+            <a:r>
+              <a:rPr lang="ko-KR" altLang="en-US" sz="500" b="1" dirty="0">
+                <a:solidFill>
+                  <a:srgbClr val="4472C4"/>
+                </a:solidFill>
+                <a:latin typeface="KoPub돋움체 Bold" panose="02020603020101020101" pitchFamily="18" charset="-127"/>
+                <a:ea typeface="KoPub돋움체 Bold" panose="02020603020101020101" pitchFamily="18" charset="-127"/>
+              </a:rPr>
+              <a:t>진료지원간호팀</a:t>
+            </a:r>
+            <a:endParaRPr lang="ko-KR" altLang="en-US" sz="600" b="1" dirty="0">
+              <a:solidFill>
+                <a:srgbClr val="4472C4"/>
+              </a:solidFill>
+              <a:latin typeface="KoPub돋움체 Bold" panose="02020603020101020101" pitchFamily="18" charset="-127"/>
+              <a:ea typeface="KoPub돋움체 Bold" panose="02020603020101020101" pitchFamily="18" charset="-127"/>
+            </a:endParaRPr>
+          </a:p>
+        </p:txBody>
+      </p:sp>
+      <p:sp>
+        <p:nvSpPr>
+          <p:cNvPr id="27" name="TextBox 26">
+            <a:extLst>
+              <a:ext uri="{FF2B5EF4-FFF2-40B4-BE49-F238E27FC236}">
+                <a16:creationId xmlns:a16="http://schemas.microsoft.com/office/drawing/2014/main" id="{DE2D23E1-4C59-4085-BB0B-1A89E8707DBD}"/>
+              </a:ext>
+            </a:extLst>
+          </p:cNvPr>
+          <p:cNvSpPr txBox="1"/>
+          <p:nvPr/>
+        </p:nvSpPr>
+        <p:spPr>
+          <a:xfrm>
+            <a:off x="1038855" y="669281"/>
+            <a:ext cx="1103187" cy="230832"/>
+          </a:xfrm>
+          <a:prstGeom prst="rect">
+            <a:avLst/>
+          </a:prstGeom>
+          <a:noFill/>
+        </p:spPr>
+        <p:txBody>
+          <a:bodyPr wrap="none">
+            <a:spAutoFit/>
+          </a:bodyPr>
+          <a:lstStyle/>
+          <a:p>
+            <a:pPr algn="ctr"/>
+            <a:r>
+              <a:rPr lang="ko-KR" altLang="en-US" sz="900" dirty="0" err="1">
+                <a:solidFill>
+                  <a:srgbClr val="00B0F0"/>
+                </a:solidFill>
+                <a:latin typeface="KoPub돋움체 Bold" panose="00000800000000000000" pitchFamily="2" charset="-127"/>
+                <a:ea typeface="KoPub돋움체 Bold" panose="00000800000000000000" pitchFamily="2" charset="-127"/>
+              </a:rPr>
+              <a:t>우리가치</a:t>
+            </a:r>
+            <a:r>
+              <a:rPr lang="ko-KR" altLang="en-US" sz="900" dirty="0">
+                <a:solidFill>
+                  <a:schemeClr val="accent1">
+                    <a:lumMod val="50000"/>
+                  </a:schemeClr>
+                </a:solidFill>
+                <a:latin typeface="KoPub돋움체 Bold" panose="02020603020101020101" pitchFamily="18" charset="-127"/>
+                <a:ea typeface="KoPub돋움체 Bold" panose="02020603020101020101" pitchFamily="18" charset="-127"/>
+              </a:rPr>
+              <a:t> </a:t>
+            </a:r>
+            <a:r>
+              <a:rPr lang="en-US" altLang="ko-KR" sz="900" dirty="0" err="1">
+                <a:solidFill>
+                  <a:schemeClr val="accent1">
+                    <a:lumMod val="50000"/>
+                  </a:schemeClr>
+                </a:solidFill>
+                <a:latin typeface="Franklin Gothic Heavy" panose="020B0903020102020204" pitchFamily="34" charset="0"/>
+                <a:ea typeface="KoPub돋움체 Bold" panose="02020603020101020101" pitchFamily="18" charset="-127"/>
+              </a:rPr>
+              <a:t>WeValue</a:t>
+            </a:r>
+            <a:endParaRPr lang="en-US" altLang="ko-KR" sz="900" dirty="0">
+              <a:solidFill>
+                <a:schemeClr val="accent1">
+                  <a:lumMod val="50000"/>
+                </a:schemeClr>
+              </a:solidFill>
+              <a:latin typeface="Franklin Gothic Heavy" panose="020B0903020102020204" pitchFamily="34" charset="0"/>
+              <a:ea typeface="KoPub돋움체 Bold" panose="02020603020101020101" pitchFamily="18" charset="-127"/>
+            </a:endParaRPr>
+          </a:p>
+        </p:txBody>
+      </p:sp>
+      <p:sp>
+        <p:nvSpPr>
+          <p:cNvPr id="28" name="TextBox 27">
+            <a:extLst>
+              <a:ext uri="{FF2B5EF4-FFF2-40B4-BE49-F238E27FC236}">
+                <a16:creationId xmlns:a16="http://schemas.microsoft.com/office/drawing/2014/main" id="{CA87DB17-8F30-4266-A5C7-C608D527653E}"/>
+              </a:ext>
+            </a:extLst>
+          </p:cNvPr>
+          <p:cNvSpPr txBox="1"/>
+          <p:nvPr/>
+        </p:nvSpPr>
+        <p:spPr>
+          <a:xfrm>
+            <a:off x="944278" y="816062"/>
+            <a:ext cx="1292341" cy="169277"/>
+          </a:xfrm>
+          <a:prstGeom prst="rect">
+            <a:avLst/>
+          </a:prstGeom>
+          <a:noFill/>
+        </p:spPr>
+        <p:txBody>
+          <a:bodyPr wrap="none">
+            <a:spAutoFit/>
+          </a:bodyPr>
+          <a:lstStyle/>
+          <a:p>
+            <a:pPr algn="ctr"/>
+            <a:r>
+              <a:rPr lang="en-US" altLang="ko-KR" sz="500" b="1" dirty="0">
+                <a:latin typeface="KoPub돋움체 Bold" panose="00000800000000000000" pitchFamily="2" charset="-127"/>
+                <a:ea typeface="KoPub돋움체 Bold" panose="00000800000000000000" pitchFamily="2" charset="-127"/>
+              </a:rPr>
+              <a:t>[</a:t>
+            </a:r>
+            <a:r>
+              <a:rPr lang="ko-KR" altLang="en-US" sz="500" b="1" dirty="0">
+                <a:latin typeface="KoPub돋움체 Bold" panose="00000800000000000000" pitchFamily="2" charset="-127"/>
+                <a:ea typeface="KoPub돋움체 Bold" panose="00000800000000000000" pitchFamily="2" charset="-127"/>
+              </a:rPr>
+              <a:t>우리가 가치를 만드는 공간</a:t>
+            </a:r>
+            <a:r>
+              <a:rPr lang="en-US" altLang="ko-KR" sz="500" b="1" dirty="0">
+                <a:latin typeface="KoPub돋움체 Bold" panose="00000800000000000000" pitchFamily="2" charset="-127"/>
+                <a:ea typeface="KoPub돋움체 Bold" panose="00000800000000000000" pitchFamily="2" charset="-127"/>
+              </a:rPr>
+              <a:t>, </a:t>
+            </a:r>
+            <a:r>
+              <a:rPr lang="ko-KR" altLang="en-US" sz="500" b="1" dirty="0" err="1">
+                <a:latin typeface="KoPub돋움체 Bold" panose="00000800000000000000" pitchFamily="2" charset="-127"/>
+                <a:ea typeface="KoPub돋움체 Bold" panose="00000800000000000000" pitchFamily="2" charset="-127"/>
+              </a:rPr>
+              <a:t>우리가치</a:t>
+            </a:r>
+            <a:r>
+              <a:rPr lang="ko-KR" altLang="en-US" sz="500" b="1" dirty="0">
+                <a:latin typeface="KoPub돋움체 Bold" panose="00000800000000000000" pitchFamily="2" charset="-127"/>
+                <a:ea typeface="KoPub돋움체 Bold" panose="00000800000000000000" pitchFamily="2" charset="-127"/>
+              </a:rPr>
+              <a:t> 허브</a:t>
+            </a:r>
+            <a:r>
+              <a:rPr lang="en-US" altLang="ko-KR" sz="500" b="1" dirty="0">
+                <a:latin typeface="KoPub돋움체 Bold" panose="00000800000000000000" pitchFamily="2" charset="-127"/>
+                <a:ea typeface="KoPub돋움체 Bold" panose="00000800000000000000" pitchFamily="2" charset="-127"/>
+              </a:rPr>
+              <a:t>]</a:t>
+            </a:r>
+          </a:p>
+        </p:txBody>
+      </p:sp>
+      <p:pic>
+        <p:nvPicPr>
+          <p:cNvPr id="29" name="그림 28">
+            <a:extLst>
+              <a:ext uri="{FF2B5EF4-FFF2-40B4-BE49-F238E27FC236}">
+                <a16:creationId xmlns:a16="http://schemas.microsoft.com/office/drawing/2014/main" id="{1A663A6E-CD45-45A2-ADAB-0B6753415C79}"/>
+              </a:ext>
+            </a:extLst>
+          </p:cNvPr>
+          <p:cNvPicPr>
+            <a:picLocks noChangeAspect="1"/>
+          </p:cNvPicPr>
+          <p:nvPr/>
+        </p:nvPicPr>
+        <p:blipFill>
+          <a:blip r:embed="rId3"/>
+          <a:stretch>
+            <a:fillRect/>
+          </a:stretch>
+        </p:blipFill>
+        <p:spPr>
+          <a:xfrm>
+            <a:off x="926665" y="714131"/>
+            <a:ext cx="147416" cy="128728"/>
+          </a:xfrm>
+          <a:prstGeom prst="rect">
+            <a:avLst/>
+          </a:prstGeom>
+        </p:spPr>
+      </p:pic>
+      <p:pic>
+        <p:nvPicPr>
+          <p:cNvPr id="30" name="그림 29">
+            <a:extLst>
+              <a:ext uri="{FF2B5EF4-FFF2-40B4-BE49-F238E27FC236}">
+                <a16:creationId xmlns:a16="http://schemas.microsoft.com/office/drawing/2014/main" id="{235C2BE1-63D1-4862-B908-47BCDA0F5495}"/>
+              </a:ext>
+            </a:extLst>
+          </p:cNvPr>
+          <p:cNvPicPr>
+            <a:picLocks noChangeAspect="1"/>
+          </p:cNvPicPr>
+          <p:nvPr/>
+        </p:nvPicPr>
+        <p:blipFill>
+          <a:blip r:embed="rId3"/>
+          <a:stretch>
+            <a:fillRect/>
+          </a:stretch>
+        </p:blipFill>
+        <p:spPr>
+          <a:xfrm rot="10800000">
+            <a:off x="2073958" y="719539"/>
+            <a:ext cx="147414" cy="128728"/>
+          </a:xfrm>
+          <a:prstGeom prst="rect">
+            <a:avLst/>
+          </a:prstGeom>
+        </p:spPr>
+      </p:pic>
+    </p:spTree>
+    <p:extLst>
+      <p:ext uri="{BB962C8B-B14F-4D97-AF65-F5344CB8AC3E}">
+        <p14:creationId xmlns:p14="http://schemas.microsoft.com/office/powerpoint/2010/main" val="3763487974"/>
       </p:ext>
     </p:extLst>
   </p:cSld>
